--- a/slide/Từ-RAG-đến-GraphRAG-Trợ-lý-hỏi-đáp-thị-trường-bất-động-sản-Việt-Nam-có-lý-thuyết.pptx
+++ b/slide/Từ-RAG-đến-GraphRAG-Trợ-lý-hỏi-đáp-thị-trường-bất-động-sản-Việt-Nam-có-lý-thuyết.pptx
@@ -59,6 +59,7 @@
     <p:sldId id="307" r:id="rId59"/>
     <p:sldId id="308" r:id="rId60"/>
     <p:sldId id="309" r:id="rId61"/>
+    <p:sldId id="310" r:id="rId62"/>
   </p:sldIdLst>
   <p:sldSz cx="12191695" cy="6858000" type="screen4x3"/>
   <p:notesSz cx="6858000" cy="9144000"/>
@@ -343,6 +344,329 @@
               <c:strCache>
                 <c:ptCount val="1"/>
                 <c:pt idx="0">
+                  <c:v>Nhỏ</c:v>
+                </c:pt>
+              </c:strCache>
+            </c:strRef>
+          </c:tx>
+          <c:spPr>
+            <a:solidFill>
+              <a:srgbClr val="D97706"/>
+            </a:solidFill>
+          </c:spPr>
+          <c:cat>
+            <c:strRef>
+              <c:f>Sheet1!$A$2:$A$7</c:f>
+              <c:strCache>
+                <c:ptCount val="6"/>
+                <c:pt idx="0">
+                  <c:v>Dense</c:v>
+                </c:pt>
+                <c:pt idx="1">
+                  <c:v>Dense + lọc</c:v>
+                </c:pt>
+                <c:pt idx="2">
+                  <c:v>BM25</c:v>
+                </c:pt>
+                <c:pt idx="3">
+                  <c:v>BM25 + lọc</c:v>
+                </c:pt>
+                <c:pt idx="4">
+                  <c:v>Hybrid</c:v>
+                </c:pt>
+                <c:pt idx="5">
+                  <c:v>Hybrid + lọc</c:v>
+                </c:pt>
+              </c:strCache>
+            </c:strRef>
+          </c:cat>
+          <c:val>
+            <c:numRef>
+              <c:f>Sheet1!$B$2:$B$7</c:f>
+              <c:numCache>
+                <c:formatCode>General</c:formatCode>
+                <c:ptCount val="6"/>
+                <c:pt idx="0">
+                  <c:v>0.4962962962962963</c:v>
+                </c:pt>
+                <c:pt idx="1">
+                  <c:v>0.8962962962962964</c:v>
+                </c:pt>
+                <c:pt idx="2">
+                  <c:v>0.5604938271604939</c:v>
+                </c:pt>
+                <c:pt idx="3">
+                  <c:v>0.9111111111111112</c:v>
+                </c:pt>
+                <c:pt idx="4">
+                  <c:v>0.5753086419753086</c:v>
+                </c:pt>
+                <c:pt idx="5">
+                  <c:v>0.9111111111111112</c:v>
+                </c:pt>
+              </c:numCache>
+            </c:numRef>
+          </c:val>
+        </c:ser>
+        <c:ser>
+          <c:idx val="1"/>
+          <c:order val="1"/>
+          <c:tx>
+            <c:strRef>
+              <c:f>Sheet1!$C$1</c:f>
+              <c:strCache>
+                <c:ptCount val="1"/>
+                <c:pt idx="0">
+                  <c:v>Vừa</c:v>
+                </c:pt>
+              </c:strCache>
+            </c:strRef>
+          </c:tx>
+          <c:spPr>
+            <a:solidFill>
+              <a:srgbClr val="0D9488"/>
+            </a:solidFill>
+          </c:spPr>
+          <c:cat>
+            <c:strRef>
+              <c:f>Sheet1!$A$2:$A$7</c:f>
+              <c:strCache>
+                <c:ptCount val="6"/>
+                <c:pt idx="0">
+                  <c:v>Dense</c:v>
+                </c:pt>
+                <c:pt idx="1">
+                  <c:v>Dense + lọc</c:v>
+                </c:pt>
+                <c:pt idx="2">
+                  <c:v>BM25</c:v>
+                </c:pt>
+                <c:pt idx="3">
+                  <c:v>BM25 + lọc</c:v>
+                </c:pt>
+                <c:pt idx="4">
+                  <c:v>Hybrid</c:v>
+                </c:pt>
+                <c:pt idx="5">
+                  <c:v>Hybrid + lọc</c:v>
+                </c:pt>
+              </c:strCache>
+            </c:strRef>
+          </c:cat>
+          <c:val>
+            <c:numRef>
+              <c:f>Sheet1!$C$2:$C$7</c:f>
+              <c:numCache>
+                <c:formatCode>General</c:formatCode>
+                <c:ptCount val="6"/>
+                <c:pt idx="0">
+                  <c:v>0.4888888888888889</c:v>
+                </c:pt>
+                <c:pt idx="1">
+                  <c:v>0.9111111111111112</c:v>
+                </c:pt>
+                <c:pt idx="2">
+                  <c:v>0.5530864197530865</c:v>
+                </c:pt>
+                <c:pt idx="3">
+                  <c:v>0.9111111111111112</c:v>
+                </c:pt>
+                <c:pt idx="4">
+                  <c:v>0.5382716049382716</c:v>
+                </c:pt>
+                <c:pt idx="5">
+                  <c:v>0.9037037037037038</c:v>
+                </c:pt>
+              </c:numCache>
+            </c:numRef>
+          </c:val>
+        </c:ser>
+        <c:ser>
+          <c:idx val="2"/>
+          <c:order val="2"/>
+          <c:tx>
+            <c:strRef>
+              <c:f>Sheet1!$D$1</c:f>
+              <c:strCache>
+                <c:ptCount val="1"/>
+                <c:pt idx="0">
+                  <c:v>Lớn</c:v>
+                </c:pt>
+              </c:strCache>
+            </c:strRef>
+          </c:tx>
+          <c:spPr>
+            <a:solidFill>
+              <a:srgbClr val="7C3AED"/>
+            </a:solidFill>
+          </c:spPr>
+          <c:cat>
+            <c:strRef>
+              <c:f>Sheet1!$A$2:$A$7</c:f>
+              <c:strCache>
+                <c:ptCount val="6"/>
+                <c:pt idx="0">
+                  <c:v>Dense</c:v>
+                </c:pt>
+                <c:pt idx="1">
+                  <c:v>Dense + lọc</c:v>
+                </c:pt>
+                <c:pt idx="2">
+                  <c:v>BM25</c:v>
+                </c:pt>
+                <c:pt idx="3">
+                  <c:v>BM25 + lọc</c:v>
+                </c:pt>
+                <c:pt idx="4">
+                  <c:v>Hybrid</c:v>
+                </c:pt>
+                <c:pt idx="5">
+                  <c:v>Hybrid + lọc</c:v>
+                </c:pt>
+              </c:strCache>
+            </c:strRef>
+          </c:cat>
+          <c:val>
+            <c:numRef>
+              <c:f>Sheet1!$D$2:$D$7</c:f>
+              <c:numCache>
+                <c:formatCode>General</c:formatCode>
+                <c:ptCount val="6"/>
+                <c:pt idx="0">
+                  <c:v>0.5037037037037037</c:v>
+                </c:pt>
+                <c:pt idx="1">
+                  <c:v>0.9111111111111112</c:v>
+                </c:pt>
+                <c:pt idx="2">
+                  <c:v>0.5604938271604938</c:v>
+                </c:pt>
+                <c:pt idx="3">
+                  <c:v>0.9185185185185185</c:v>
+                </c:pt>
+                <c:pt idx="4">
+                  <c:v>0.5604938271604938</c:v>
+                </c:pt>
+                <c:pt idx="5">
+                  <c:v>0.9037037037037038</c:v>
+                </c:pt>
+              </c:numCache>
+            </c:numRef>
+          </c:val>
+        </c:ser>
+        <c:dLbls>
+          <c:numFmt formatCode="0.00" sourceLinked="0"/>
+          <c:txPr>
+            <a:bodyPr/>
+            <a:lstStyle/>
+            <a:p>
+              <a:pPr>
+                <a:defRPr sz="1400"/>
+              </a:pPr>
+            </a:p>
+          </c:txPr>
+          <c:showLegendKey val="0"/>
+          <c:showVal val="1"/>
+          <c:showCatName val="0"/>
+          <c:showSerName val="0"/>
+          <c:showPercent val="0"/>
+          <c:showBubbleSize val="0"/>
+          <c:showLeaderLines val="1"/>
+        </c:dLbls>
+        <c:gapWidth val="60"/>
+        <c:axId val="-2068027336"/>
+        <c:axId val="-2113994440"/>
+      </c:barChart>
+      <c:catAx>
+        <c:axId val="-2068027336"/>
+        <c:scaling>
+          <c:orientation val="minMax"/>
+        </c:scaling>
+        <c:delete val="0"/>
+        <c:axPos val="b"/>
+        <c:majorTickMark val="out"/>
+        <c:minorTickMark val="none"/>
+        <c:tickLblPos val="nextTo"/>
+        <c:spPr>
+          <a:ln>
+            <a:solidFill>
+              <a:srgbClr val="CBD5E1"/>
+            </a:solidFill>
+          </a:ln>
+        </c:spPr>
+        <c:txPr>
+          <a:bodyPr/>
+          <a:lstStyle/>
+          <a:p>
+            <a:pPr>
+              <a:defRPr sz="1400"/>
+            </a:pPr>
+          </a:p>
+        </c:txPr>
+        <c:crossAx val="-2113994440"/>
+        <c:crosses val="autoZero"/>
+        <c:auto val="1"/>
+        <c:lblAlgn val="ctr"/>
+        <c:lblOffset val="100"/>
+        <c:noMultiLvlLbl val="0"/>
+      </c:catAx>
+      <c:valAx>
+        <c:axId val="-2113994440"/>
+        <c:scaling>
+          <c:max val="1.0"/>
+        </c:scaling>
+        <c:delete/>
+        <c:axPos val="l"/>
+        <c:numFmt formatCode="0.00" sourceLinked="0"/>
+        <c:majorTickMark val="out"/>
+        <c:minorTickMark val="none"/>
+        <c:tickLblPos val="nextTo"/>
+        <c:crossAx val="-2068027336"/>
+        <c:crosses val="autoZero"/>
+      </c:valAx>
+    </c:plotArea>
+    <c:legend>
+      <c:legendPos val="t"/>
+      <c:overlay val="0"/>
+    </c:legend>
+    <c:dispBlanksAs val="gap"/>
+  </c:chart>
+  <c:txPr>
+    <a:bodyPr/>
+    <a:lstStyle/>
+    <a:p>
+      <a:pPr>
+        <a:defRPr sz="1400">
+          <a:latin typeface="Calibri"/>
+        </a:defRPr>
+      </a:pPr>
+      <a:endParaRPr lang="en-US"/>
+    </a:p>
+  </c:txPr>
+  <c:externalData r:id="rId1">
+    <c:autoUpdate val="0"/>
+  </c:externalData>
+</c:chartSpace>
+</file>
+
+<file path=ppt/charts/chart11.xml><?xml version="1.0" encoding="utf-8"?>
+<c:chartSpace xmlns:c="http://schemas.openxmlformats.org/drawingml/2006/chart" xmlns:a="http://schemas.openxmlformats.org/drawingml/2006/main" xmlns:r="http://schemas.openxmlformats.org/officeDocument/2006/relationships">
+  <c:date1904 val="0"/>
+  <c:chart>
+    <c:autoTitleDeleted val="0"/>
+    <c:plotArea>
+      <c:barChart>
+        <c:barDir val="col"/>
+        <c:grouping val="clustered"/>
+        <c:ser>
+          <c:idx val="0"/>
+          <c:order val="0"/>
+          <c:tx>
+            <c:strRef>
+              <c:f>Sheet1!$B$1</c:f>
+              <c:strCache>
+                <c:ptCount val="1"/>
+                <c:pt idx="0">
                   <c:v>LLM thuần</c:v>
                 </c:pt>
               </c:strCache>
@@ -401,7 +725,7 @@
                   <c:v>0.0</c:v>
                 </c:pt>
                 <c:pt idx="2">
-                  <c:v>0.25</c:v>
+                  <c:v>0.1667</c:v>
                 </c:pt>
                 <c:pt idx="3">
                   <c:v>0.0</c:v>
@@ -410,16 +734,16 @@
                   <c:v>0.0</c:v>
                 </c:pt>
                 <c:pt idx="5">
-                  <c:v>0.5</c:v>
+                  <c:v>0.4</c:v>
                 </c:pt>
                 <c:pt idx="6">
                   <c:v>0.0</c:v>
                 </c:pt>
                 <c:pt idx="7">
-                  <c:v>0.0</c:v>
+                  <c:v>0.1</c:v>
                 </c:pt>
                 <c:pt idx="8">
-                  <c:v>0.25</c:v>
+                  <c:v>0.3333</c:v>
                 </c:pt>
               </c:numCache>
             </c:numRef>
@@ -489,28 +813,28 @@
                   <c:v>1.0</c:v>
                 </c:pt>
                 <c:pt idx="1">
-                  <c:v>0.0</c:v>
+                  <c:v>0.1667</c:v>
                 </c:pt>
                 <c:pt idx="2">
-                  <c:v>0.0</c:v>
+                  <c:v>0.1667</c:v>
                 </c:pt>
                 <c:pt idx="3">
                   <c:v>0.0</c:v>
                 </c:pt>
                 <c:pt idx="4">
-                  <c:v>0.25</c:v>
+                  <c:v>0.1</c:v>
                 </c:pt>
                 <c:pt idx="5">
-                  <c:v>0.0</c:v>
+                  <c:v>0.1</c:v>
                 </c:pt>
                 <c:pt idx="6">
                   <c:v>0.0</c:v>
                 </c:pt>
                 <c:pt idx="7">
-                  <c:v>0.0</c:v>
+                  <c:v>0.2</c:v>
                 </c:pt>
                 <c:pt idx="8">
-                  <c:v>0.75</c:v>
+                  <c:v>0.6667</c:v>
                 </c:pt>
               </c:numCache>
             </c:numRef>
@@ -577,19 +901,19 @@
                 <c:formatCode>General</c:formatCode>
                 <c:ptCount val="9"/>
                 <c:pt idx="0">
-                  <c:v>1.0</c:v>
+                  <c:v>0.4167</c:v>
                 </c:pt>
                 <c:pt idx="1">
-                  <c:v>1.0</c:v>
+                  <c:v>0.9167</c:v>
                 </c:pt>
                 <c:pt idx="2">
-                  <c:v>1.0</c:v>
+                  <c:v>0.8333</c:v>
                 </c:pt>
                 <c:pt idx="3">
-                  <c:v>0.75</c:v>
+                  <c:v>0.8333</c:v>
                 </c:pt>
                 <c:pt idx="4">
-                  <c:v>1.0</c:v>
+                  <c:v>0.7</c:v>
                 </c:pt>
                 <c:pt idx="5">
                   <c:v>1.0</c:v>
@@ -598,10 +922,10 @@
                   <c:v>1.0</c:v>
                 </c:pt>
                 <c:pt idx="7">
-                  <c:v>0.0</c:v>
+                  <c:v>0.2</c:v>
                 </c:pt>
                 <c:pt idx="8">
-                  <c:v>0.75</c:v>
+                  <c:v>0.8333</c:v>
                 </c:pt>
               </c:numCache>
             </c:numRef>
@@ -671,28 +995,28 @@
                   <c:v>1.0</c:v>
                 </c:pt>
                 <c:pt idx="1">
-                  <c:v>0.0</c:v>
+                  <c:v>0.1667</c:v>
                 </c:pt>
                 <c:pt idx="2">
-                  <c:v>1.0</c:v>
+                  <c:v>0.8333</c:v>
                 </c:pt>
                 <c:pt idx="3">
-                  <c:v>0.75</c:v>
+                  <c:v>0.8333</c:v>
                 </c:pt>
                 <c:pt idx="4">
-                  <c:v>1.0</c:v>
+                  <c:v>0.7</c:v>
                 </c:pt>
                 <c:pt idx="5">
-                  <c:v>0.75</c:v>
+                  <c:v>0.9</c:v>
                 </c:pt>
                 <c:pt idx="6">
                   <c:v>1.0</c:v>
                 </c:pt>
                 <c:pt idx="7">
-                  <c:v>0.0</c:v>
+                  <c:v>0.2</c:v>
                 </c:pt>
                 <c:pt idx="8">
-                  <c:v>0.75</c:v>
+                  <c:v>0.8333</c:v>
                 </c:pt>
               </c:numCache>
             </c:numRef>
@@ -774,7 +1098,7 @@
 </c:chartSpace>
 </file>
 
-<file path=ppt/charts/chart11.xml><?xml version="1.0" encoding="utf-8"?>
+<file path=ppt/charts/chart12.xml><?xml version="1.0" encoding="utf-8"?>
 <c:chartSpace xmlns:c="http://schemas.openxmlformats.org/drawingml/2006/chart" xmlns:a="http://schemas.openxmlformats.org/drawingml/2006/main" xmlns:r="http://schemas.openxmlformats.org/officeDocument/2006/relationships">
   <c:date1904 val="0"/>
   <c:chart>
@@ -829,16 +1153,16 @@
                 <c:formatCode>General</c:formatCode>
                 <c:ptCount val="4"/>
                 <c:pt idx="0">
-                  <c:v>4.0291</c:v>
+                  <c:v>1.77</c:v>
                 </c:pt>
                 <c:pt idx="1">
-                  <c:v>10.4685</c:v>
+                  <c:v>3.4797</c:v>
                 </c:pt>
                 <c:pt idx="2">
-                  <c:v>8.8549</c:v>
+                  <c:v>3.4345</c:v>
                 </c:pt>
                 <c:pt idx="3">
-                  <c:v>8.9894</c:v>
+                  <c:v>2.7001999999999997</c:v>
                 </c:pt>
               </c:numCache>
             </c:numRef>
@@ -890,16 +1214,16 @@
                 <c:formatCode>General</c:formatCode>
                 <c:ptCount val="4"/>
                 <c:pt idx="0">
-                  <c:v>11.8408</c:v>
+                  <c:v>9.5676</c:v>
                 </c:pt>
                 <c:pt idx="1">
-                  <c:v>36.9998</c:v>
+                  <c:v>22.945</c:v>
                 </c:pt>
                 <c:pt idx="2">
-                  <c:v>23.0162</c:v>
+                  <c:v>20.0775</c:v>
                 </c:pt>
                 <c:pt idx="3">
-                  <c:v>21.686</c:v>
+                  <c:v>19.1808</c:v>
                 </c:pt>
               </c:numCache>
             </c:numRef>
@@ -998,7 +1322,7 @@
 </c:chartSpace>
 </file>
 
-<file path=ppt/charts/chart12.xml><?xml version="1.0" encoding="utf-8"?>
+<file path=ppt/charts/chart13.xml><?xml version="1.0" encoding="utf-8"?>
 <c:chartSpace xmlns:c="http://schemas.openxmlformats.org/drawingml/2006/chart" xmlns:a="http://schemas.openxmlformats.org/drawingml/2006/main" xmlns:r="http://schemas.openxmlformats.org/officeDocument/2006/relationships">
   <c:date1904 val="0"/>
   <c:chart>
@@ -1053,16 +1377,16 @@
                 <c:formatCode>General</c:formatCode>
                 <c:ptCount val="4"/>
                 <c:pt idx="0">
-                  <c:v>82.3056</c:v>
+                  <c:v>82.71</c:v>
                 </c:pt>
                 <c:pt idx="1">
-                  <c:v>1942.3056</c:v>
+                  <c:v>1886.95</c:v>
                 </c:pt>
                 <c:pt idx="2">
-                  <c:v>3842.8056</c:v>
+                  <c:v>4016.33</c:v>
                 </c:pt>
                 <c:pt idx="3">
-                  <c:v>4063.1389</c:v>
+                  <c:v>4154.08</c:v>
                 </c:pt>
               </c:numCache>
             </c:numRef>
@@ -1114,16 +1438,16 @@
                 <c:formatCode>General</c:formatCode>
                 <c:ptCount val="4"/>
                 <c:pt idx="0">
-                  <c:v>158.0278</c:v>
+                  <c:v>160.4</c:v>
                 </c:pt>
                 <c:pt idx="1">
-                  <c:v>260.4722</c:v>
+                  <c:v>267.78</c:v>
                 </c:pt>
                 <c:pt idx="2">
-                  <c:v>307.7778</c:v>
+                  <c:v>325.81</c:v>
                 </c:pt>
                 <c:pt idx="3">
-                  <c:v>397.5</c:v>
+                  <c:v>406.77</c:v>
                 </c:pt>
               </c:numCache>
             </c:numRef>
@@ -1222,7 +1546,7 @@
 </c:chartSpace>
 </file>
 
-<file path=ppt/charts/chart13.xml><?xml version="1.0" encoding="utf-8"?>
+<file path=ppt/charts/chart14.xml><?xml version="1.0" encoding="utf-8"?>
 <c:chartSpace xmlns:c="http://schemas.openxmlformats.org/drawingml/2006/chart" xmlns:a="http://schemas.openxmlformats.org/drawingml/2006/main" xmlns:r="http://schemas.openxmlformats.org/officeDocument/2006/relationships">
   <c:date1904 val="0"/>
   <c:chart>
@@ -1375,7 +1699,7 @@
 </c:chartSpace>
 </file>
 
-<file path=ppt/charts/chart14.xml><?xml version="1.0" encoding="utf-8"?>
+<file path=ppt/charts/chart15.xml><?xml version="1.0" encoding="utf-8"?>
 <c:chartSpace xmlns:c="http://schemas.openxmlformats.org/drawingml/2006/chart" xmlns:a="http://schemas.openxmlformats.org/drawingml/2006/main" xmlns:r="http://schemas.openxmlformats.org/officeDocument/2006/relationships">
   <c:date1904 val="0"/>
   <c:chart>
@@ -2538,10 +2862,10 @@
                   <c:v>1.0</c:v>
                 </c:pt>
                 <c:pt idx="1">
-                  <c:v>0.0</c:v>
+                  <c:v>0.1667</c:v>
                 </c:pt>
                 <c:pt idx="2">
-                  <c:v>0.0</c:v>
+                  <c:v>0.1667</c:v>
                 </c:pt>
               </c:numCache>
             </c:numRef>
@@ -3041,7 +3365,7 @@
     <c:autoTitleDeleted val="0"/>
     <c:plotArea>
       <c:barChart>
-        <c:barDir val="col"/>
+        <c:barDir val="bar"/>
         <c:grouping val="clustered"/>
         <c:ser>
           <c:idx val="0"/>
@@ -3064,53 +3388,89 @@
           </c:spPr>
           <c:cat>
             <c:strRef>
-              <c:f>Sheet1!$A$2:$A$7</c:f>
+              <c:f>Sheet1!$A$2:$A$13</c:f>
               <c:strCache>
-                <c:ptCount val="6"/>
+                <c:ptCount val="12"/>
                 <c:pt idx="0">
                   <c:v>Dense</c:v>
                 </c:pt>
                 <c:pt idx="1">
+                  <c:v>Dense + rerank</c:v>
+                </c:pt>
+                <c:pt idx="2">
                   <c:v>Dense + lọc</c:v>
                 </c:pt>
-                <c:pt idx="2">
+                <c:pt idx="3">
+                  <c:v>Dense + lọc + rerank</c:v>
+                </c:pt>
+                <c:pt idx="4">
                   <c:v>BM25</c:v>
                 </c:pt>
-                <c:pt idx="3">
+                <c:pt idx="5">
+                  <c:v>BM25 + rerank</c:v>
+                </c:pt>
+                <c:pt idx="6">
                   <c:v>BM25 + lọc</c:v>
                 </c:pt>
-                <c:pt idx="4">
+                <c:pt idx="7">
+                  <c:v>BM25 + lọc + rerank</c:v>
+                </c:pt>
+                <c:pt idx="8">
                   <c:v>Hybrid</c:v>
                 </c:pt>
-                <c:pt idx="5">
+                <c:pt idx="9">
+                  <c:v>Hybrid + rerank</c:v>
+                </c:pt>
+                <c:pt idx="10">
                   <c:v>Hybrid + lọc</c:v>
+                </c:pt>
+                <c:pt idx="11">
+                  <c:v>Hybrid + lọc + rerank</c:v>
                 </c:pt>
               </c:strCache>
             </c:strRef>
           </c:cat>
           <c:val>
             <c:numRef>
-              <c:f>Sheet1!$B$2:$B$7</c:f>
+              <c:f>Sheet1!$B$2:$B$13</c:f>
               <c:numCache>
                 <c:formatCode>General</c:formatCode>
-                <c:ptCount val="6"/>
+                <c:ptCount val="12"/>
                 <c:pt idx="0">
                   <c:v>0.291358024691358</c:v>
                 </c:pt>
                 <c:pt idx="1">
+                  <c:v>0.3604938271604939</c:v>
+                </c:pt>
+                <c:pt idx="2">
                   <c:v>0.5037037037037037</c:v>
                 </c:pt>
-                <c:pt idx="2">
+                <c:pt idx="3">
+                  <c:v>0.6444444444444443</c:v>
+                </c:pt>
+                <c:pt idx="4">
                   <c:v>0.2691358024691358</c:v>
                 </c:pt>
-                <c:pt idx="3">
+                <c:pt idx="5">
+                  <c:v>0.3061728395061728</c:v>
+                </c:pt>
+                <c:pt idx="6">
                   <c:v>0.5753086419753087</c:v>
                 </c:pt>
-                <c:pt idx="4">
+                <c:pt idx="7">
+                  <c:v>0.6222222222222221</c:v>
+                </c:pt>
+                <c:pt idx="8">
                   <c:v>0.35802469135802467</c:v>
                 </c:pt>
-                <c:pt idx="5">
+                <c:pt idx="9">
+                  <c:v>0.3728395061728395</c:v>
+                </c:pt>
+                <c:pt idx="10">
                   <c:v>0.528395061728395</c:v>
+                </c:pt>
+                <c:pt idx="11">
+                  <c:v>0.6666666666666665</c:v>
                 </c:pt>
               </c:numCache>
             </c:numRef>
@@ -3137,53 +3497,89 @@
           </c:spPr>
           <c:cat>
             <c:strRef>
-              <c:f>Sheet1!$A$2:$A$7</c:f>
+              <c:f>Sheet1!$A$2:$A$13</c:f>
               <c:strCache>
-                <c:ptCount val="6"/>
+                <c:ptCount val="12"/>
                 <c:pt idx="0">
                   <c:v>Dense</c:v>
                 </c:pt>
                 <c:pt idx="1">
+                  <c:v>Dense + rerank</c:v>
+                </c:pt>
+                <c:pt idx="2">
                   <c:v>Dense + lọc</c:v>
                 </c:pt>
-                <c:pt idx="2">
+                <c:pt idx="3">
+                  <c:v>Dense + lọc + rerank</c:v>
+                </c:pt>
+                <c:pt idx="4">
                   <c:v>BM25</c:v>
                 </c:pt>
-                <c:pt idx="3">
+                <c:pt idx="5">
+                  <c:v>BM25 + rerank</c:v>
+                </c:pt>
+                <c:pt idx="6">
                   <c:v>BM25 + lọc</c:v>
                 </c:pt>
-                <c:pt idx="4">
+                <c:pt idx="7">
+                  <c:v>BM25 + lọc + rerank</c:v>
+                </c:pt>
+                <c:pt idx="8">
                   <c:v>Hybrid</c:v>
                 </c:pt>
-                <c:pt idx="5">
+                <c:pt idx="9">
+                  <c:v>Hybrid + rerank</c:v>
+                </c:pt>
+                <c:pt idx="10">
                   <c:v>Hybrid + lọc</c:v>
+                </c:pt>
+                <c:pt idx="11">
+                  <c:v>Hybrid + lọc + rerank</c:v>
                 </c:pt>
               </c:strCache>
             </c:strRef>
           </c:cat>
           <c:val>
             <c:numRef>
-              <c:f>Sheet1!$C$2:$C$7</c:f>
+              <c:f>Sheet1!$C$2:$C$13</c:f>
               <c:numCache>
                 <c:formatCode>General</c:formatCode>
-                <c:ptCount val="6"/>
+                <c:ptCount val="12"/>
                 <c:pt idx="0">
                   <c:v>0.2768959435626102</c:v>
                 </c:pt>
                 <c:pt idx="1">
+                  <c:v>0.4470164609053498</c:v>
+                </c:pt>
+                <c:pt idx="2">
                   <c:v>0.5982510288065844</c:v>
                 </c:pt>
-                <c:pt idx="2">
+                <c:pt idx="3">
+                  <c:v>0.7355820105820106</c:v>
+                </c:pt>
+                <c:pt idx="4">
                   <c:v>0.29886831275720166</c:v>
                 </c:pt>
-                <c:pt idx="3">
+                <c:pt idx="5">
+                  <c:v>0.37345679012345684</c:v>
+                </c:pt>
+                <c:pt idx="6">
                   <c:v>0.6759259259259259</c:v>
                 </c:pt>
-                <c:pt idx="4">
+                <c:pt idx="7">
+                  <c:v>0.6518518518518519</c:v>
+                </c:pt>
+                <c:pt idx="8">
                   <c:v>0.2958259847148736</c:v>
                 </c:pt>
-                <c:pt idx="5">
+                <c:pt idx="9">
+                  <c:v>0.4148148148148148</c:v>
+                </c:pt>
+                <c:pt idx="10">
                   <c:v>0.6515873015873015</c:v>
+                </c:pt>
+                <c:pt idx="11">
+                  <c:v>0.7123456790123457</c:v>
                 </c:pt>
               </c:numCache>
             </c:numRef>
@@ -3218,7 +3614,7 @@
           <c:orientation val="minMax"/>
         </c:scaling>
         <c:delete val="0"/>
-        <c:axPos val="b"/>
+        <c:axPos val="l"/>
         <c:majorTickMark val="out"/>
         <c:minorTickMark val="none"/>
         <c:tickLblPos val="nextTo"/>
@@ -3251,7 +3647,7 @@
           <c:max val="1.0"/>
         </c:scaling>
         <c:delete/>
-        <c:axPos val="l"/>
+        <c:axPos val="b"/>
         <c:numFmt formatCode="0.00" sourceLinked="0"/>
         <c:majorTickMark val="out"/>
         <c:minorTickMark val="none"/>
@@ -4589,7 +4985,7 @@
           <a:lstStyle/>
           <a:p>
             <a:r>
-              <a:t>Cosine đo hướng nên không phụ thuộc độ dài: vector dài gấp đôi nhưng cùng hướng vẫn cho điểm bằng một, vector vuông góc cho không. Với vector đã chuẩn hoá L2 như của e5, cosine chính là tích vô hướng, nên Qdrant chỉ cần nhân. Dense hiểu nghĩa nhưng không đảm bảo điều kiện cứng: điểm cosine các tin dồn sát nhau nên tin đứng đầu có thể sai quận hay sai số phòng. Bên phải là ba tin Basic RAG đưa vào ngữ cảnh cho câu CS01 trong lượt chạy thật, sau khi đã lọc trước và gộp với BM25; dòng chữ dưới bảng cho biết chúng có thoả điều kiện không. Slide sau: ghép dense với BM25.</a:t>
+              <a:t>Cosine đo hướng nên không phụ thuộc độ dài: vector dài gấp đôi nhưng cùng hướng vẫn cho điểm bằng một, vector vuông góc cho không. Với vector đã chuẩn hoá L2 như của e5, cosine chính là tích vô hướng, nên Qdrant chỉ cần nhân. Dense hiểu nghĩa nhưng không đảm bảo điều kiện cứng: điểm cosine các tin dồn sát nhau nên tin đứng đầu có thể sai quận hay sai số phòng. Bên phải là ba tin Basic RAG đưa vào ngữ cảnh cho một câu ràng buộc trong lượt chạy thật, sau khi đã lọc trước và gộp với BM25; dòng chữ dưới bảng cho biết chúng có thoả điều kiện không. Slide sau: ghép dense với BM25.</a:t>
             </a:r>
           </a:p>
         </p:txBody>
@@ -4729,7 +5125,7 @@
           <a:lstStyle/>
           <a:p>
             <a:r>
-              <a:t>Pre-filter lọc trên payload index của Qdrant trước khi tìm lân cận, nên mọi tin trả về đều thoả điều kiện. Post-filter lấy top-k theo nghĩa rồi mới lọc, điều kiện càng chặt càng rơi nhiều tin. Trên benchmark, cùng cấu hình hybrid, Recall@5 là 0,53 khi lọc trước và 0,36 khi không lọc. Rerank bằng cross-encoder chính xác hơn nhưng chậm; trong lượt đo này rerank tắt vì model không có trong cache. Slide sau: ba điểm RAG có thể hỏng.</a:t>
+              <a:t>Pre-filter lọc trên payload index của Qdrant trước khi tìm lân cận, nên mọi tin trả về đều thoả điều kiện. Post-filter lấy top-k theo nghĩa rồi mới lọc, điều kiện càng chặt càng rơi nhiều tin. Trên benchmark, cùng cấu hình hybrid, Recall@5 là 0,53 khi lọc trước và 0,36 khi không lọc. Rerank bằng cross-encoder chấm lại các ứng viên đầu: với hybrid có lọc, Recall@5 lên 0,67 nhưng độ trễ trung vị từ 385 lên 1.189 mili giây trên CPU, nên chatbot để rerank tuỳ chọn. Slide sau: ba điểm RAG có thể hỏng.</a:t>
             </a:r>
           </a:p>
         </p:txBody>
@@ -5009,7 +5405,7 @@
           <a:lstStyle/>
           <a:p>
             <a:r>
-              <a:t>Ba nhóm câu chạy thật qua pipeline Basic RAG trong lượt eval. Tra cứu đúng 100%, ràng buộc 0%, tổng hợp 0%. Mỗi nhóm chỉ có 4 câu trong tập con đã chạy, nên một câu đúng sai làm số thay đổi rất nhiều; khoảng tin cậy trên slide cho thấy điều đó. Đọc xu hướng, không đọc từng điểm phần trăm. Câu chuyển: Basic RAG tìm tin giỏi nhưng không hiểu quan hệ; chặng 3 dựng Knowledge Graph để biểu diễn quan hệ đó.</a:t>
+              <a:t>Ba nhóm câu chạy thật qua pipeline Basic RAG trong lượt eval. Tra cứu đúng 100%, ràng buộc 17%, tổng hợp 17%. Mỗi nhóm chỉ có khoảng 12 câu, nên một câu đúng sai làm số thay đổi rất nhiều; khoảng tin cậy trên slide cho thấy điều đó. Đọc xu hướng, không đọc từng điểm phần trăm. Câu chuyển: Basic RAG tìm tin giỏi nhưng không hiểu quan hệ; chặng 3 dựng Knowledge Graph để biểu diễn quan hệ đó.</a:t>
             </a:r>
           </a:p>
         </p:txBody>
@@ -6129,7 +6525,7 @@
           <a:lstStyle/>
           <a:p>
             <a:r>
-              <a:t>Router là một lượt gọi mô hình với structured output, chọn một trong các nhãn: Basic RAG, Graph, cả hai, hoặc định giá. Trên tập con đã chạy, router chọn đúng nhãn ở 92% số câu; bỏ nhóm không trả lời được thì 94%. Nếu Cypher lỗi, trả về rỗng hoặc Neo4j mất kết nối, hệ thống lui về Basic RAG. Truy xuất RAG chạy song song với router nên đường lui không phải chờ thêm. Slide sau: đánh giá được thiết kế thế nào.</a:t>
+              <a:t>Router là một lượt gọi mô hình với structured output, chọn một trong các nhãn: Basic RAG, Graph, cả hai, hoặc định giá. Trên toàn bộ benchmark, router chọn đúng nhãn ở 96% số câu; bỏ nhóm không trả lời được thì 98%. Nếu Cypher lỗi, trả về rỗng hoặc Neo4j mất kết nối, hệ thống lui về Basic RAG. Truy xuất RAG chạy song song với router nên đường lui không phải chờ thêm. Slide sau: đánh giá được thiết kế thế nào.</a:t>
             </a:r>
           </a:p>
         </p:txBody>
@@ -6269,7 +6665,7 @@
           <a:lstStyle/>
           <a:p>
             <a:r>
-              <a:t>Benchmark có 100 câu, đáp án chuẩn tính bằng SQL trên bảng sạch. Vì hạn mức API miễn phí, lượt đánh giá chạy trên tập con 36 câu, đủ chín nhóm, với cả bốn hệ. Mô hình sinh là bản miễn phí ghi trên slide, khác mô hình dự kiến ban đầu. Câu trả lời được chấm bằng luật so với đáp án chuẩn, không dùng LLM làm giám khảo. Vì vậy mọi con số phía sau là chỉ dấu trên cỡ mẫu nhỏ, và slide nào cũng ghi n với khoảng tin cậy. Slide sau: ablation truy xuất.</a:t>
+              <a:t>Benchmark có 100 câu, đáp án chuẩn tính bằng SQL trên bảng sạch. Lượt đánh giá chạy đủ 100 câu, đủ chín nhóm, với cả bốn hệ. Mô hình sinh là bản giá rẻ ghi trên slide, khác mô hình dự kiến ban đầu. Câu trả lời được chấm bằng luật so với đáp án chuẩn, không dùng LLM làm giám khảo và không chạy RAGAS, để tiết kiệm chi phí. Mỗi nhóm chỉ có khoảng mười câu, nên slide nào cũng ghi n với khoảng tin cậy. Slide sau: ablation truy xuất.</a:t>
             </a:r>
           </a:p>
         </p:txBody>
@@ -6339,7 +6735,7 @@
           <a:lstStyle/>
           <a:p>
             <a:r>
-              <a:t>Ablation chạy thẳng trên chỉ mục đầy đủ, không qua mô hình sinh, nên không tốn lời gọi API. Ba cách truy xuất dense, BM25 và hybrid, mỗi cách có và không có lọc trước. Rerank không có trong lượt đo vì model cross-encoder không có trong cache. Số câu có tập tin đúng: 27. Bước nhảy lớn nhất đến từ bộ lọc, vì câu tìm tin có điều kiện cứng mà embedding không đảm bảo. Trên dữ liệu này BM25 có lọc ngang hoặc hơn hybrid có lọc, vì đề bài chứa tên dự án và con số khớp đúng từ. Hybrid không tự động thắng; phải đo mới biết. So sánh model embedding nằm ở chặng 1. Slide sau: kết quả câu trả lời theo nhóm câu hỏi.</a:t>
+              <a:t>Ablation chạy thẳng trên chỉ mục đầy đủ, không qua mô hình sinh, nên không tốn lời gọi API. Ba cách truy xuất dense, BM25 và hybrid, mỗi cách có và không có lọc trước, có và không có rerank. Số câu có tập tin đúng: 27. Bước nhảy lớn nhất đến từ bộ lọc, vì câu tìm tin có điều kiện cứng mà embedding không đảm bảo. Rerank cross-encoder chấm lại hai mươi ứng viên đầu: với hybrid có lọc, Recall@5 từ 0,53 lên 0,67, nhưng độ trễ trung vị từ 385 lên 1.189 mili giây vì chạy trên CPU. Hybrid không tự động thắng; phải đo mới biết. Slide sau: kích thước chunk.</a:t>
             </a:r>
           </a:p>
         </p:txBody>
@@ -6409,7 +6805,7 @@
           <a:lstStyle/>
           <a:p>
             <a:r>
-              <a:t>Biểu đồ là độ chính xác của bốn hệ theo từng nhóm câu. Tổng trên tập con: LLM thuần 11%, Basic RAG 22%, Graph 83%, Hybrid 69%. Mỗi nhóm chỉ có 4 câu, nên một câu đúng sai làm số đổi rất nhiều. Đọc theo hình dạng: hệ nào mạnh ở nhóm nào, chứ không so từng điểm phần trăm. Khoảng tin cậy ở slide sau.</a:t>
+              <a:t>Quét kích thước chunk tốn một lần nhúng lại cho mỗi cỡ, nên nhóm đo trên một subcorpus chứa mọi tin đáp án của benchmark cộng thêm tin ngẫu nhiên, thay vì chỉ mục đầy đủ. Chênh lệch giữa các cỡ chunk nhỏ hơn nhiều so với chênh lệch do lọc trước. Subcorpus dễ hơn chỉ mục đầy đủ vì ít tin gây nhiễu, nên chỉ so các cột này với nhau, không so với slide trước. Slide sau: kết quả câu trả lời theo nhóm.</a:t>
             </a:r>
           </a:p>
         </p:txBody>
@@ -6479,7 +6875,7 @@
           <a:lstStyle/>
           <a:p>
             <a:r>
-              <a:t>Bảng so ba cặp trên cùng câu hỏi: Basic RAG với LLM thuần, Hybrid với Basic RAG, và Hybrid với Graph, ở toàn tập và ở nhóm tổng hợp. Chênh lệch là hiệu độ chính xác tính bằng điểm phần trăm; khoảng tin cậy chín mươi lăm phần trăm lấy bằng bootstrap mười nghìn mẫu theo câu hỏi, ghép cặp giữa hai hệ. Khoảng nào chứa số không thì chưa đủ bằng chứng nói hệ này hơn hệ kia trên tập con này. Với bốn câu mỗi nhóm, phần lớn khoảng tin cậy rất rộng. Slide sau: chi phí và độ trễ.</a:t>
+              <a:t>Biểu đồ là độ chính xác của bốn hệ theo từng nhóm câu. Tổng trên toàn bộ benchmark: LLM thuần 11%, Basic RAG 28%, Graph 75%, Hybrid 72%. Mỗi nhóm chỉ có 12 câu, nên một câu đúng sai làm số đổi rất nhiều. Đọc theo hình dạng: hệ nào mạnh ở nhóm nào, chứ không so từng điểm phần trăm. Khoảng tin cậy ở slide sau.</a:t>
             </a:r>
           </a:p>
         </p:txBody>
@@ -6549,7 +6945,7 @@
           <a:lstStyle/>
           <a:p>
             <a:r>
-              <a:t>Độ trễ đo trên từng câu trong lượt eval, gồm router và Cypher nếu có. LLM thuần trung vị 4,0 giây, Basic RAG trung vị 10,5 giây, Graph trung vị 8,9 giây, Hybrid trung vị 9,0 giây. Token vào phản ánh lượng ngữ cảnh: Graph và Hybrid nhận thêm kết quả Cypher và lượt router. Độ trễ còn phụ thuộc API miễn phí và số lượt thử lại, nên chỉ so tương đối. Các rủi ro triển khai đều có biện pháp trong code: giá là giá rao chứ không phải giá giao dịch, nên luôn kèm nguồn; số điện thoại bị ẩn trước khi lưu; Cypher chỉ đọc; API có giới hạn tần suất và cache. Slide sau: hệ thống sai vì đâu.</a:t>
+              <a:t>Bảng so ba cặp trên cùng câu hỏi: Basic RAG với LLM thuần, Hybrid với Basic RAG, và Hybrid với Graph, ở toàn tập và ở nhóm tổng hợp. Chênh lệch là hiệu độ chính xác tính bằng điểm phần trăm; khoảng tin cậy chín mươi lăm phần trăm lấy bằng bootstrap mười nghìn mẫu theo câu hỏi, ghép cặp giữa hai hệ. Khoảng nào chứa số không thì chưa đủ bằng chứng nói hệ này hơn hệ kia. Với khoảng mười câu mỗi nhóm, khoảng tin cậy theo nhóm vẫn rộng. Slide sau: chi phí và độ trễ.</a:t>
             </a:r>
           </a:p>
         </p:txBody>
@@ -6619,7 +7015,7 @@
           <a:lstStyle/>
           <a:p>
             <a:r>
-              <a:t>Mỗi câu sai được gán đúng một nguyên nhân theo thứ tự ưu tiên: lỗi chạy, không từ chối khi phải từ chối, router chọn sai, Cypher lỗi, lọc sai, truy xuất trượt, bịa ngoài nguồn, Cypher chạy được nhưng ra sai, và còn lại là thiếu ngữ cảnh. Bảng đếm theo hệ. Hai ví dụ bên phải là câu sai thật trong lượt eval. Nguyên nhân phổ biến nhất của từng hệ là chỗ nên sửa trước. Slide sau sang phần mở rộng.</a:t>
+              <a:t>Độ trễ đo trên từng câu trong lượt eval, gồm router và Cypher nếu có. LLM thuần trung vị 1,8 giây, Basic RAG trung vị 3,5 giây, Graph trung vị 3,4 giây, Hybrid trung vị 2,7 giây. Token vào phản ánh lượng ngữ cảnh: Graph và Hybrid nhận thêm kết quả Cypher và lượt router. Độ trễ còn phụ thuộc API miễn phí và số lượt thử lại, nên chỉ so tương đối. Các rủi ro triển khai đều có biện pháp trong code: giá là giá rao chứ không phải giá giao dịch, nên luôn kèm nguồn; số điện thoại bị ẩn trước khi lưu; Cypher chỉ đọc; API có giới hạn tần suất và cache. Slide sau: hệ thống sai vì đâu.</a:t>
             </a:r>
           </a:p>
         </p:txBody>
@@ -6689,7 +7085,7 @@
           <a:lstStyle/>
           <a:p>
             <a:r>
-              <a:t>Mô-đun định giá ước lượng giá trên mét vuông của một tin bán. Mốc so sánh đơn giản nhất là lấy trung vị giá của phường. Biến thể bảng số dùng XGBoost trên loại hình, diện tích, số phòng, tiện ích trích từ mô tả, và mã hoá mục tiêu theo tỉnh, quận, phường, đường, dự án. Biến thể đầy đủ thêm embedding mô tả của e5-large, nén PCA 32 chiều. Dữ liệu chia theo thời gian: học trên các tháng cũ, chấm trên các tháng mới nhất, nên không rò tương lai vào quá khứ. Trên 395.910 tin test, MAE của ba biến thể lần lượt 50,6, 32,6, 24,0 triệu mỗi mét vuông. Đây là giá rao, không phải giá giao dịch. Slide sau: mô hình dựa vào đặc trưng nào.</a:t>
+              <a:t>Mỗi câu sai được gán đúng một nguyên nhân theo thứ tự ưu tiên: lỗi chạy, không từ chối khi phải từ chối, router chọn sai, Cypher lỗi, lọc sai, truy xuất trượt, bịa ngoài nguồn, Cypher chạy được nhưng ra sai, và còn lại là thiếu ngữ cảnh. Bảng đếm theo hệ. Hai ví dụ bên phải là câu sai thật trong lượt eval. Nguyên nhân phổ biến nhất của từng hệ là chỗ nên sửa trước. Slide sau sang phần mở rộng.</a:t>
             </a:r>
           </a:p>
         </p:txBody>
@@ -6829,7 +7225,7 @@
           <a:lstStyle/>
           <a:p>
             <a:r>
-              <a:t>Bên trái là mức đóng góp SHAP trung bình của các đặc trưng mạnh nhất trong biến thể XGBoost + embedding, tính trên thang log giá. Các đặc trưng vị trí dẫn đầu, đúng với trực giác rằng giá nhà trước hết do vị trí. Các thanh tên embedding mô tả là thành phần PCA của văn bản tin đăng: chúng mang thông tin mà cột bảng không có, như mô tả mặt tiền hay tình trạng nhà. Bảng bên phải là sai số theo loại hình; căn hộ dễ đoán nhất vì đồng chất, đất khó nhất. Mô hình cho thuê chưa được huấn luyện vì chỉ 253 tin thuê sau làm sạch. Slide sau: webapp đặt các hệ cạnh nhau.</a:t>
+              <a:t>Mô-đun định giá ước lượng giá trên mét vuông của một tin bán. Mốc so sánh đơn giản nhất là lấy trung vị giá của phường. Biến thể bảng số dùng XGBoost trên loại hình, diện tích, số phòng, tiện ích trích từ mô tả, và mã hoá mục tiêu theo tỉnh, quận, phường, đường, dự án. Biến thể đầy đủ thêm embedding mô tả của e5-large, nén PCA 32 chiều. Dữ liệu chia theo thời gian: học trên các tháng cũ, chấm trên các tháng mới nhất, nên không rò tương lai vào quá khứ. Trên 395.910 tin test, MAE của ba biến thể lần lượt 50,6, 32,6, 24,0 triệu mỗi mét vuông. Đây là giá rao, không phải giá giao dịch. Slide sau: mô hình dựa vào đặc trưng nào.</a:t>
             </a:r>
           </a:p>
         </p:txBody>
@@ -6899,7 +7295,7 @@
           <a:lstStyle/>
           <a:p>
             <a:r>
-              <a:t>Webapp là nơi gom mọi thứ lại để người dùng thử. Màn hình so sánh gửi một câu hỏi tới cả bốn hệ và hiện câu trả lời song song, mỗi câu kèm mã tin để bấm vào kiểm chứng. Màn hình bản đồ cho xem giá theo khu vực. Màn hình định giá nhận thông tin một căn và trả về mức giá ước lượng của mô-đun vừa trình bày. Màn hình cuối hiện câu Cypher mà hệ Graph đã chạy, để người xem tự đối chiếu. Câu hỏi dùng khi chụp là câu đã chạy trong lượt đánh giá. Tiếp theo là những gì bài này còn hạn chế.</a:t>
+              <a:t>Bên trái là mức đóng góp SHAP trung bình của các đặc trưng mạnh nhất trong biến thể XGBoost + embedding, tính trên thang log giá. Các đặc trưng vị trí dẫn đầu, đúng với trực giác rằng giá nhà trước hết do vị trí. Các thanh tên embedding mô tả là thành phần PCA của văn bản tin đăng: chúng mang thông tin mà cột bảng không có, như mô tả mặt tiền hay tình trạng nhà. Bảng bên phải là sai số theo loại hình; căn hộ dễ đoán nhất vì đồng chất, đất khó nhất. Mô hình cho thuê chưa được huấn luyện vì chỉ 253 tin thuê sau làm sạch. Slide sau: webapp đặt các hệ cạnh nhau.</a:t>
             </a:r>
           </a:p>
         </p:txBody>
@@ -6969,7 +7365,7 @@
           <a:lstStyle/>
           <a:p>
             <a:r>
-              <a:t>Về đánh giá, benchmark có 100 câu nhưng lượt chạy chỉ dùng tập con 36 câu vì hạn mức API miễn phí, chấm bằng luật so với đáp án SQL và chưa đo faithfulness bằng mô hình giám khảo. Mô hình sinh là gemini-flash-lite-latest, khác gpt-oss-120b dự kiến ban đầu. Về dữ liệu, giá là giá rao, không phải giá giao dịch; địa giới có cả tên cũ và tên sau sáp nhập năm 2025; tin không có toạ độ; nhiều cột thiếu, ví dụ đường thiếu 40% và dự án thiếu 71%. Giấy phép dữ liệu chỉ cho phép dùng phi thương mại. Cột bên phải là việc làm tiếp. Slide sau: những điều cần nhớ.</a:t>
+              <a:t>Webapp là nơi gom mọi thứ lại để người dùng thử. Màn hình so sánh gửi một câu hỏi tới cả bốn hệ và hiện câu trả lời song song, mỗi câu kèm mã tin để bấm vào kiểm chứng. Màn hình bản đồ cho xem giá theo khu vực. Màn hình định giá nhận thông tin một căn và trả về mức giá ước lượng của mô-đun vừa trình bày. Màn hình cuối hiện câu Cypher mà hệ Graph đã chạy, để người xem tự đối chiếu. Câu hỏi dùng khi chụp là câu đã chạy trong lượt đánh giá. Tiếp theo là những gì bài này còn hạn chế.</a:t>
             </a:r>
           </a:p>
         </p:txBody>
@@ -7039,7 +7435,7 @@
           <a:lstStyle/>
           <a:p>
             <a:r>
-              <a:t>Bốn điều xin các bạn mang về. Một, RAG giỏi tìm tin theo nghĩa và dẫn được nguồn, nhưng không đếm hay tính được. Hai, điều kiện cứng như giá, diện tích, quận phải đi vào bộ lọc trước khi tìm, đừng trông vào embedding. Ba, câu tổng hợp và đa chặng cần đồ thị hoặc truy vấn có cấu trúc: cơ sở dữ liệu tính, mô hình chỉ viết truy vấn và diễn giải. Bốn, router ghép các nguồn theo từng câu, và muốn biết hệ nào tốt hơn thì phải đo bằng benchmark có đáp án tính bằng SQL, kèm cỡ mẫu và khoảng tin cậy. Xin cảm ơn, mời các bạn đặt câu hỏi.</a:t>
+              <a:t>Về đánh giá, lượt chạy dùng đủ 100 câu benchmark với cả bốn hệ, nhưng câu trả lời chấm bằng luật so với đáp án SQL. Nhóm chủ động không dùng LLM làm giám khảo và không chạy RAGAS để tiết kiệm chi phí, nên chưa đo faithfulness. Mô hình sinh là gemini-flash-lite-latest, khác gpt-oss-120b dự kiến ban đầu. Về dữ liệu, giá là giá rao, không phải giá giao dịch; địa giới có cả tên cũ và tên sau sáp nhập năm 2025; tin không có toạ độ; nhiều cột thiếu, ví dụ đường thiếu 40% và dự án thiếu 71%. Giấy phép dữ liệu chỉ cho phép dùng phi thương mại. Image Docker của API và web đã dựng và kiểm qua nginx: trang chủ, health, chat stream và định giá đều trả về thành công. Cột bên phải là việc làm tiếp. Slide sau: những điều cần nhớ.</a:t>
             </a:r>
           </a:p>
         </p:txBody>
@@ -7065,6 +7461,76 @@
 </file>
 
 <file path=ppt/notesSlides/notesSlide54.xml><?xml version="1.0" encoding="utf-8"?>
+<p:notes xmlns:a="http://schemas.openxmlformats.org/drawingml/2006/main" xmlns:p="http://schemas.openxmlformats.org/presentationml/2006/main" xmlns:r="http://schemas.openxmlformats.org/officeDocument/2006/relationships">
+  <p:cSld>
+    <p:spTree>
+      <p:nvGrpSpPr>
+        <p:cNvPr id="1" name=""/>
+        <p:cNvGrpSpPr/>
+        <p:nvPr/>
+      </p:nvGrpSpPr>
+      <p:grpSpPr>
+        <a:xfrm>
+          <a:off x="0" y="0"/>
+          <a:ext cx="0" cy="0"/>
+          <a:chOff x="0" y="0"/>
+          <a:chExt cx="0" cy="0"/>
+        </a:xfrm>
+      </p:grpSpPr>
+      <p:sp>
+        <p:nvSpPr>
+          <p:cNvPr id="2" name="Slide Image Placeholder 1"/>
+          <p:cNvSpPr>
+            <a:spLocks noGrp="1"/>
+          </p:cNvSpPr>
+          <p:nvPr>
+            <p:ph type="sldImg" idx="2"/>
+          </p:nvPr>
+        </p:nvSpPr>
+        <p:spPr/>
+      </p:sp>
+      <p:sp>
+        <p:nvSpPr>
+          <p:cNvPr id="3" name="Notes Placeholder 2"/>
+          <p:cNvSpPr>
+            <a:spLocks noGrp="1"/>
+          </p:cNvSpPr>
+          <p:nvPr>
+            <p:ph type="body" idx="3" sz="quarter"/>
+          </p:nvPr>
+        </p:nvSpPr>
+        <p:spPr/>
+        <p:txBody>
+          <a:bodyPr/>
+          <a:lstStyle/>
+          <a:p>
+            <a:r>
+              <a:t>Bốn điều xin các bạn mang về. Một, RAG giỏi tìm tin theo nghĩa và dẫn được nguồn, nhưng không đếm hay tính được. Hai, điều kiện cứng như giá, diện tích, quận phải đi vào bộ lọc trước khi tìm, đừng trông vào embedding. Ba, câu tổng hợp và đa chặng cần đồ thị hoặc truy vấn có cấu trúc: cơ sở dữ liệu tính, mô hình chỉ viết truy vấn và diễn giải. Bốn, router ghép các nguồn theo từng câu, và muốn biết hệ nào tốt hơn thì phải đo bằng benchmark có đáp án tính bằng SQL, kèm cỡ mẫu và khoảng tin cậy. Xin cảm ơn, mời các bạn đặt câu hỏi.</a:t>
+            </a:r>
+          </a:p>
+        </p:txBody>
+      </p:sp>
+      <p:sp>
+        <p:nvSpPr>
+          <p:cNvPr id="4" name="Slide Number Placeholder 3"/>
+          <p:cNvSpPr>
+            <a:spLocks noGrp="1"/>
+          </p:cNvSpPr>
+          <p:nvPr>
+            <p:ph type="sldNum" idx="5" sz="quarter"/>
+          </p:nvPr>
+        </p:nvSpPr>
+        <p:spPr/>
+      </p:sp>
+    </p:spTree>
+  </p:cSld>
+  <p:clrMapOvr>
+    <a:masterClrMapping/>
+  </p:clrMapOvr>
+</p:notes>
+</file>
+
+<file path=ppt/notesSlides/notesSlide55.xml><?xml version="1.0" encoding="utf-8"?>
 <p:notes xmlns:a="http://schemas.openxmlformats.org/drawingml/2006/main" xmlns:p="http://schemas.openxmlformats.org/presentationml/2006/main" xmlns:r="http://schemas.openxmlformats.org/officeDocument/2006/relationships">
   <p:cSld>
     <p:spTree>
@@ -23609,7 +24075,7 @@
                 </a:solidFill>
                 <a:latin typeface="Calibri"/>
               </a:rPr>
-              <a:t>“Tìm căn hộ 2 phòng ngủ ở Quận 7 giá dưới 3 tỷ, chung cư có hồ bơi.”</a:t>
+              <a:t>“can ho 1pn o thu duc gia duoi 2 ty”</a:t>
             </a:r>
           </a:p>
         </p:txBody>
@@ -23763,7 +24229,7 @@
                 </a:solidFill>
                 <a:latin typeface="Consolas"/>
               </a:rPr>
-              <a:t> "district": "Quận 7",</a:t>
+              <a:t> "district": "Thủ Đức",</a:t>
             </a:r>
           </a:p>
           <a:p>
@@ -23811,7 +24277,7 @@
                 </a:solidFill>
                 <a:latin typeface="Consolas"/>
               </a:rPr>
-              <a:t> "bedrooms": 2,</a:t>
+              <a:t> "bedrooms": 1,</a:t>
             </a:r>
           </a:p>
           <a:p>
@@ -23827,7 +24293,7 @@
                 </a:solidFill>
                 <a:latin typeface="Consolas"/>
               </a:rPr>
-              <a:t> "max_price_mil": 3000.0</a:t>
+              <a:t> "max_price_mil": 2000.0</a:t>
             </a:r>
           </a:p>
           <a:p>
@@ -24923,7 +25389,7 @@
                           </a:solidFill>
                           <a:latin typeface="Calibri"/>
                         </a:rPr>
-                        <a:t>…662563</a:t>
+                        <a:t>…947992</a:t>
                       </a:r>
                     </a:p>
                   </a:txBody>
@@ -24946,7 +25412,7 @@
                           </a:solidFill>
                           <a:latin typeface="Calibri"/>
                         </a:rPr>
-                        <a:t>Quận 7</a:t>
+                        <a:t>Thủ Đức</a:t>
                       </a:r>
                     </a:p>
                   </a:txBody>
@@ -24969,7 +25435,7 @@
                           </a:solidFill>
                           <a:latin typeface="Calibri"/>
                         </a:rPr>
-                        <a:t>2,10 tỷ</a:t>
+                        <a:t>1,20 tỷ</a:t>
                       </a:r>
                     </a:p>
                   </a:txBody>
@@ -24994,7 +25460,7 @@
                           </a:solidFill>
                           <a:latin typeface="Calibri"/>
                         </a:rPr>
-                        <a:t>…561345</a:t>
+                        <a:t>…105555</a:t>
                       </a:r>
                     </a:p>
                   </a:txBody>
@@ -25017,7 +25483,7 @@
                           </a:solidFill>
                           <a:latin typeface="Calibri"/>
                         </a:rPr>
-                        <a:t>Quận 7</a:t>
+                        <a:t>Thủ Đức</a:t>
                       </a:r>
                     </a:p>
                   </a:txBody>
@@ -25040,7 +25506,7 @@
                           </a:solidFill>
                           <a:latin typeface="Calibri"/>
                         </a:rPr>
-                        <a:t>3,00 tỷ</a:t>
+                        <a:t>1,60 tỷ</a:t>
                       </a:r>
                     </a:p>
                   </a:txBody>
@@ -25065,7 +25531,7 @@
                           </a:solidFill>
                           <a:latin typeface="Calibri"/>
                         </a:rPr>
-                        <a:t>…585786</a:t>
+                        <a:t>…037884</a:t>
                       </a:r>
                     </a:p>
                   </a:txBody>
@@ -25088,7 +25554,7 @@
                           </a:solidFill>
                           <a:latin typeface="Calibri"/>
                         </a:rPr>
-                        <a:t>Quận 7</a:t>
+                        <a:t>Thủ Đức</a:t>
                       </a:r>
                     </a:p>
                   </a:txBody>
@@ -25111,7 +25577,7 @@
                           </a:solidFill>
                           <a:latin typeface="Calibri"/>
                         </a:rPr>
-                        <a:t>2,95 tỷ</a:t>
+                        <a:t>1,25 tỷ</a:t>
                       </a:r>
                     </a:p>
                   </a:txBody>
@@ -27722,7 +28188,7 @@
                 </a:solidFill>
                 <a:latin typeface="Calibri"/>
               </a:rPr>
-              <a:t>Rerank cross-encoder: chính xác hơn nhưng chậm, để tuỳ chọn</a:t>
+              <a:t>Rerank cross-encoder: Recall@5 lên 0,67, độ trễ 385 → 1.189 ms; để tuỳ chọn</a:t>
             </a:r>
           </a:p>
         </p:txBody>
@@ -27761,7 +28227,7 @@
                 </a:solidFill>
                 <a:latin typeface="Calibri"/>
               </a:rPr>
-              <a:t>Nguồn: ablation truy xuất, 27 câu có tập tin đúng.</a:t>
+              <a:t>Nguồn: ablation truy xuất trên chỉ mục đầy đủ, 27 câu có tập tin đúng.</a:t>
             </a:r>
           </a:p>
         </p:txBody>
@@ -31337,7 +31803,7 @@
                 </a:solidFill>
                 <a:latin typeface="Calibri"/>
               </a:rPr>
-              <a:t>Tra cứu · n = 4 · CI95 100–100%</a:t>
+              <a:t>Tra cứu · n = 12 · CI95 100–100%</a:t>
             </a:r>
           </a:p>
         </p:txBody>
@@ -31420,7 +31886,7 @@
                 </a:solidFill>
                 <a:latin typeface="Calibri"/>
               </a:rPr>
-              <a:t>0%</a:t>
+              <a:t>17%</a:t>
             </a:r>
           </a:p>
         </p:txBody>
@@ -31459,7 +31925,7 @@
                 </a:solidFill>
                 <a:latin typeface="Calibri"/>
               </a:rPr>
-              <a:t>Ràng buộc · n = 4 · CI95 0–0%</a:t>
+              <a:t>Ràng buộc · n = 12 · CI95 0–42%</a:t>
             </a:r>
           </a:p>
         </p:txBody>
@@ -31542,7 +32008,7 @@
                 </a:solidFill>
                 <a:latin typeface="Calibri"/>
               </a:rPr>
-              <a:t>0%</a:t>
+              <a:t>17%</a:t>
             </a:r>
           </a:p>
         </p:txBody>
@@ -31581,7 +32047,7 @@
                 </a:solidFill>
                 <a:latin typeface="Calibri"/>
               </a:rPr>
-              <a:t>Tổng hợp · n = 4 · CI95 0–0%</a:t>
+              <a:t>Tổng hợp · n = 12 · CI95 0–42%</a:t>
             </a:r>
           </a:p>
         </p:txBody>
@@ -31620,7 +32086,7 @@
                 </a:solidFill>
                 <a:latin typeface="Calibri"/>
               </a:rPr>
-              <a:t>Chấm bằng luật trên tập con 36 câu; mô hình sinh gemini-flash-lite-latest.</a:t>
+              <a:t>Chấm bằng luật trên toàn bộ 100 câu; mô hình sinh gemini-flash-lite-latest.</a:t>
             </a:r>
           </a:p>
         </p:txBody>
@@ -41512,7 +41978,7 @@
                 </a:solidFill>
                 <a:latin typeface="Calibri"/>
               </a:rPr>
-              <a:t>  ·  5 ms trên Neo4j</a:t>
+              <a:t>  ·  68 ms trên Neo4j</a:t>
             </a:r>
           </a:p>
         </p:txBody>
@@ -42103,7 +42569,7 @@
                 </a:solidFill>
                 <a:latin typeface="Calibri"/>
               </a:rPr>
-              <a:t>  ·  70 ms trên Neo4j</a:t>
+              <a:t>  ·  601 ms trên Neo4j</a:t>
             </a:r>
           </a:p>
         </p:txBody>
@@ -45827,7 +46293,7 @@
                 </a:solidFill>
                 <a:latin typeface="Calibri"/>
               </a:rPr>
-              <a:t>“Mình thấy tin bán căn hộ 3 phòng ngủ 80m2 ở Sun Feliza Suites Cầu Giấy giá 8 tỷ, căn đó có mấy WC vậy?”</a:t>
+              <a:t>“Diện tích trung vị của các lô đất rao bán ở Củ Chi là bao nhiêu m2?”</a:t>
             </a:r>
           </a:p>
         </p:txBody>
@@ -45991,7 +46457,7 @@
                 </a:solidFill>
                 <a:latin typeface="Calibri"/>
               </a:rPr>
-              <a:t>Dựa trên thiết kế tiêu chuẩn của các dự án căn hộ cao cấp tại Hà Nội (với diện tích khoảng 80m2 cho 3 phòng ngủ), các căn hộ này thường được bố trí 2 nhà vệ sinh (1 WC chung và 1 WC nằm trong phòng ngủ master) để đảm bảo công năng sử dụng. Tuy nhiên, thiết kế chi tiết có thể thay đổi tùy theo mặt bằng thực tế của chủ đầu tư tại dự án Sun Feliza Suites Cầu Giấy. Để chính xác …</a:t>
+              <a:t>Tôi không có dữ liệu thời gian thực hoặc cơ sở dữ liệu cụ thể về các tin rao bán đất tại huyện Củ Chi ở thời điểm hiện tại, vì vậy tôi không thể đưa ra con số chính xác về diện tích trung vị. Bạn có thể tham khảo trên các trang web bất động sản lớn tại Việt Nam để có thống kê mới nhất.</a:t>
             </a:r>
           </a:p>
         </p:txBody>
@@ -46155,7 +46621,7 @@
                 </a:solidFill>
                 <a:latin typeface="Calibri"/>
               </a:rPr>
-              <a:t>Căn hộ 3 phòng ngủ tại Sun Feliza Suites có 2 WC [Tin#3092923782945354].</a:t>
+              <a:t>Dựa trên các tài liệu được cung cấp, diện tích của các lô đất ở Củ Chi lần lượt là: 220 m² [Tin#2045133780349874], 84,2 m² [Tin#6996937738248262], 3.000 m² [Tin#759967255344203], 180 m² [Tin#1167455787622469], và 3.043 m² [Tin#8273646489036237]. Sắp xếp theo thứ tự tăng dần: 84,2 m², 180 m², 220 m², 3.000 m², 3.043 m². Giá trị trung vị (ở giữa) là 220 m² [Tin#2045133780349874].</a:t>
             </a:r>
           </a:p>
         </p:txBody>
@@ -46194,7 +46660,7 @@
                 </a:solidFill>
                 <a:latin typeface="Calibri"/>
               </a:rPr>
-              <a:t>Đầu ra thật của cùng một mô hình sinh trong lượt chạy eval (gemini-flash-lite-latest); câu LK01.</a:t>
+              <a:t>Đầu ra thật của cùng một mô hình sinh trong lượt chạy eval (gemini-flash-lite-latest); câu AG07.</a:t>
             </a:r>
           </a:p>
         </p:txBody>
@@ -46909,7 +47375,7 @@
                 </a:solidFill>
                 <a:latin typeface="Calibri"/>
               </a:rPr>
-              <a:t>Cypher mô hình sinh · câu đếm</a:t>
+              <a:t>Cypher mô hình sinh · câu tổng hợp</a:t>
             </a:r>
           </a:p>
         </p:txBody>
@@ -46948,7 +47414,7 @@
                 </a:solidFill>
                 <a:latin typeface="Calibri"/>
               </a:rPr>
-              <a:t>“Có bao nhiêu tin rao bán đất ở Đà Nẵng trong dữ liệu?”</a:t>
+              <a:t>“Giá trung vị mỗi m2 căn hộ chung cư ở Cầu Giấy là bao nhiêu?”</a:t>
             </a:r>
           </a:p>
         </p:txBody>
@@ -47031,61 +47497,7 @@
                 </a:solidFill>
                 <a:latin typeface="Consolas"/>
               </a:rPr>
-              <a:t>MATCH (d:District)-[:</a:t>
-            </a:r>
-            <a:r>
-              <a:rPr sz="1400" b="1" i="0">
-                <a:solidFill>
-                  <a:srgbClr val="FBBF24"/>
-                </a:solidFill>
-                <a:latin typeface="Consolas"/>
-              </a:rPr>
-              <a:t>IN_PROVINCE</a:t>
-            </a:r>
-            <a:r>
-              <a:rPr sz="1400" b="0" i="0">
-                <a:solidFill>
-                  <a:srgbClr val="E2E8F0"/>
-                </a:solidFill>
-                <a:latin typeface="Consolas"/>
-              </a:rPr>
-              <a:t>]-&gt;(:Province {name: 'Đà Nẵng'}) WITH d MATCH (l:Listing)-[:IN_WARD|IN_DISTRICT*1..2]-&gt;(d) </a:t>
-            </a:r>
-            <a:r>
-              <a:rPr sz="1400" b="1" i="0">
-                <a:solidFill>
-                  <a:srgbClr val="FBBF24"/>
-                </a:solidFill>
-                <a:latin typeface="Consolas"/>
-              </a:rPr>
-              <a:t>WHERE</a:t>
-            </a:r>
-            <a:r>
-              <a:rPr sz="1400" b="0" i="0">
-                <a:solidFill>
-                  <a:srgbClr val="E2E8F0"/>
-                </a:solidFill>
-                <a:latin typeface="Consolas"/>
-              </a:rPr>
-              <a:t> l.property_type = 'Đất' AND l.deal_type = 'sale' RETURN </a:t>
-            </a:r>
-            <a:r>
-              <a:rPr sz="1400" b="1" i="0">
-                <a:solidFill>
-                  <a:srgbClr val="FBBF24"/>
-                </a:solidFill>
-                <a:latin typeface="Consolas"/>
-              </a:rPr>
-              <a:t>count(</a:t>
-            </a:r>
-            <a:r>
-              <a:rPr sz="1400" b="0" i="0">
-                <a:solidFill>
-                  <a:srgbClr val="E2E8F0"/>
-                </a:solidFill>
-                <a:latin typeface="Consolas"/>
-              </a:rPr>
-              <a:t>DISTINCT l) AS n_listings</a:t>
+              <a:t>MATCH (m:MarketStat {scope: 'district', area_key: 'Hà Nội|Cầu Giấy', property_type: 'Căn hộ chung cư', month: 'ALL', deal_type: 'sale'}) RETURN round(m.median_price_m2_mil, 2) AS median_price_m2_mil, m.n AS n</a:t>
             </a:r>
           </a:p>
           <a:p>
@@ -47984,7 +48396,7 @@
                 </a:solidFill>
                 <a:latin typeface="Calibri"/>
               </a:rPr>
-              <a:t>92%</a:t>
+              <a:t>96%</a:t>
             </a:r>
           </a:p>
         </p:txBody>
@@ -48023,7 +48435,7 @@
                 </a:solidFill>
                 <a:latin typeface="Calibri"/>
               </a:rPr>
-              <a:t>router đúng nhãn · 36 câu</a:t>
+              <a:t>router đúng nhãn · 100 câu</a:t>
             </a:r>
           </a:p>
         </p:txBody>
@@ -48106,7 +48518,7 @@
                 </a:solidFill>
                 <a:latin typeface="Calibri"/>
               </a:rPr>
-              <a:t>94%</a:t>
+              <a:t>98%</a:t>
             </a:r>
           </a:p>
         </p:txBody>
@@ -48145,7 +48557,7 @@
                 </a:solidFill>
                 <a:latin typeface="Calibri"/>
               </a:rPr>
-              <a:t>không tính câu không trả lời được · 32 câu</a:t>
+              <a:t>không tính câu không trả lời được · 88 câu</a:t>
             </a:r>
           </a:p>
         </p:txBody>
@@ -49097,7 +49509,7 @@
                 </a:solidFill>
                 <a:latin typeface="Calibri"/>
               </a:rPr>
-              <a:t>Thiết lập: benchmark đủ chín nhóm, chạy trên tập con, chấm bằng luật</a:t>
+              <a:t>Thiết lập: benchmark đủ chín nhóm, chạy toàn bộ, chấm bằng luật</a:t>
             </a:r>
           </a:p>
         </p:txBody>
@@ -49302,7 +49714,7 @@
                 </a:solidFill>
                 <a:latin typeface="Calibri"/>
               </a:rPr>
-              <a:t>36</a:t>
+              <a:t>100</a:t>
             </a:r>
           </a:p>
         </p:txBody>
@@ -49341,7 +49753,7 @@
                 </a:solidFill>
                 <a:latin typeface="Calibri"/>
               </a:rPr>
-              <a:t>câu đã chạy (tập con, đủ chín nhóm)</a:t>
+              <a:t>câu đã chạy (đủ chín nhóm)</a:t>
             </a:r>
           </a:p>
         </p:txBody>
@@ -49959,7 +50371,7 @@
                 </a:solidFill>
                 <a:latin typeface="Calibri"/>
               </a:rPr>
-              <a:t>Lọc trước tăng Recall@5 ở cả ba cách truy xuất; BM25 + lọc cao nhất</a:t>
+              <a:t>Lọc trước tăng Recall@5 nhiều nhất, rerank cộng thêm ở mọi cấu hình; Hybrid + lọc + rerank cao nhất</a:t>
             </a:r>
           </a:p>
         </p:txBody>
@@ -49973,8 +50385,8 @@
           <p:nvPr/>
         </p:nvGraphicFramePr>
         <p:xfrm>
-          <a:off x="548640" y="1737360"/>
-          <a:ext cx="7498079" cy="4114800"/>
+          <a:off x="548640" y="1691640"/>
+          <a:ext cx="7680960" cy="4480560"/>
         </p:xfrm>
         <a:graphic>
           <a:graphicData uri="http://schemas.openxmlformats.org/drawingml/2006/chart">
@@ -49990,8 +50402,8 @@
         </p:nvSpPr>
         <p:spPr>
           <a:xfrm>
-            <a:off x="8321040" y="1783080"/>
-            <a:ext cx="3291840" cy="3931920"/>
+            <a:off x="8503920" y="1783080"/>
+            <a:ext cx="3154680" cy="4206240"/>
           </a:xfrm>
           <a:prstGeom prst="rect">
             <a:avLst/>
@@ -50013,7 +50425,7 @@
               </a:spcAft>
             </a:pPr>
             <a:r>
-              <a:rPr sz="1800" b="1" i="0">
+              <a:rPr sz="1600" b="1" i="0">
                 <a:solidFill>
                   <a:srgbClr val="0D9488"/>
                 </a:solidFill>
@@ -50022,7 +50434,7 @@
               <a:t>•  </a:t>
             </a:r>
             <a:r>
-              <a:rPr sz="1800" b="0" i="0">
+              <a:rPr sz="1600" b="0" i="0">
                 <a:solidFill>
                   <a:srgbClr val="334155"/>
                 </a:solidFill>
@@ -50041,7 +50453,7 @@
               </a:spcAft>
             </a:pPr>
             <a:r>
-              <a:rPr sz="1800" b="1" i="0">
+              <a:rPr sz="1600" b="1" i="0">
                 <a:solidFill>
                   <a:srgbClr val="0D9488"/>
                 </a:solidFill>
@@ -50050,7 +50462,7 @@
               <a:t>•  </a:t>
             </a:r>
             <a:r>
-              <a:rPr sz="1800" b="0" i="0">
+              <a:rPr sz="1600" b="0" i="0">
                 <a:solidFill>
                   <a:srgbClr val="334155"/>
                 </a:solidFill>
@@ -50069,7 +50481,7 @@
               </a:spcAft>
             </a:pPr>
             <a:r>
-              <a:rPr sz="1800" b="1" i="0">
+              <a:rPr sz="1600" b="1" i="0">
                 <a:solidFill>
                   <a:srgbClr val="0D9488"/>
                 </a:solidFill>
@@ -50078,7 +50490,63 @@
               <a:t>•  </a:t>
             </a:r>
             <a:r>
-              <a:rPr sz="1800" b="0" i="0">
+              <a:rPr sz="1600" b="0" i="0">
+                <a:solidFill>
+                  <a:srgbClr val="334155"/>
+                </a:solidFill>
+                <a:latin typeface="Calibri"/>
+              </a:rPr>
+              <a:t>Rerank = cross-encoder chấm lại ứng viên đầu</a:t>
+            </a:r>
+          </a:p>
+          <a:p>
+            <a:pPr algn="l">
+              <a:lnSpc>
+                <a:spcPct val="110000"/>
+              </a:lnSpc>
+              <a:spcAft>
+                <a:spcPts val="600"/>
+              </a:spcAft>
+            </a:pPr>
+            <a:r>
+              <a:rPr sz="1600" b="1" i="0">
+                <a:solidFill>
+                  <a:srgbClr val="0D9488"/>
+                </a:solidFill>
+                <a:latin typeface="Calibri"/>
+              </a:rPr>
+              <a:t>•  </a:t>
+            </a:r>
+            <a:r>
+              <a:rPr sz="1600" b="0" i="0">
+                <a:solidFill>
+                  <a:srgbClr val="334155"/>
+                </a:solidFill>
+                <a:latin typeface="Calibri"/>
+              </a:rPr>
+              <a:t>Độ trễ hybrid + lọc: 385 → 1.189 ms khi rerank</a:t>
+            </a:r>
+          </a:p>
+          <a:p>
+            <a:pPr algn="l">
+              <a:lnSpc>
+                <a:spcPct val="110000"/>
+              </a:lnSpc>
+              <a:spcAft>
+                <a:spcPts val="600"/>
+              </a:spcAft>
+            </a:pPr>
+            <a:r>
+              <a:rPr sz="1600" b="1" i="0">
+                <a:solidFill>
+                  <a:srgbClr val="0D9488"/>
+                </a:solidFill>
+                <a:latin typeface="Calibri"/>
+              </a:rPr>
+              <a:t>•  </a:t>
+            </a:r>
+            <a:r>
+              <a:rPr sz="1600" b="0" i="0">
                 <a:solidFill>
                   <a:srgbClr val="334155"/>
                 </a:solidFill>
@@ -50177,6 +50645,442 @@
 
 <file path=ppt/slides/slide45.xml><?xml version="1.0" encoding="utf-8"?>
 <p:sld xmlns:a="http://schemas.openxmlformats.org/drawingml/2006/main" xmlns:p="http://schemas.openxmlformats.org/presentationml/2006/main" xmlns:r="http://schemas.openxmlformats.org/officeDocument/2006/relationships">
+  <p:cSld name="ev-chunk">
+    <p:spTree>
+      <p:nvGrpSpPr>
+        <p:cNvPr id="1" name=""/>
+        <p:cNvGrpSpPr/>
+        <p:nvPr/>
+      </p:nvGrpSpPr>
+      <p:grpSpPr/>
+      <p:sp>
+        <p:nvSpPr>
+          <p:cNvPr id="2" name="Rectangle 1"/>
+          <p:cNvSpPr/>
+          <p:nvPr/>
+        </p:nvSpPr>
+        <p:spPr>
+          <a:xfrm>
+            <a:off x="548640" y="384048"/>
+            <a:ext cx="73152" cy="292608"/>
+          </a:xfrm>
+          <a:prstGeom prst="rect">
+            <a:avLst/>
+          </a:prstGeom>
+          <a:solidFill>
+            <a:srgbClr val="0D9488"/>
+          </a:solidFill>
+          <a:ln>
+            <a:noFill/>
+          </a:ln>
+          <a:effectLst/>
+        </p:spPr>
+        <p:style>
+          <a:lnRef idx="1">
+            <a:schemeClr val="accent1"/>
+          </a:lnRef>
+          <a:fillRef idx="3">
+            <a:schemeClr val="accent1"/>
+          </a:fillRef>
+          <a:effectRef idx="2">
+            <a:schemeClr val="accent1"/>
+          </a:effectRef>
+          <a:fontRef idx="minor">
+            <a:schemeClr val="lt1"/>
+          </a:fontRef>
+        </p:style>
+        <p:txBody>
+          <a:bodyPr rtlCol="0" anchor="ctr"/>
+          <a:lstStyle/>
+          <a:p/>
+        </p:txBody>
+      </p:sp>
+      <p:sp>
+        <p:nvSpPr>
+          <p:cNvPr id="3" name="section"/>
+          <p:cNvSpPr txBox="1"/>
+          <p:nvPr/>
+        </p:nvSpPr>
+        <p:spPr>
+          <a:xfrm>
+            <a:off x="713232" y="329184"/>
+            <a:ext cx="7315200" cy="384048"/>
+          </a:xfrm>
+          <a:prstGeom prst="rect">
+            <a:avLst/>
+          </a:prstGeom>
+          <a:noFill/>
+        </p:spPr>
+        <p:txBody>
+          <a:bodyPr wrap="square" anchor="t" lIns="36576" rIns="36576" tIns="36576" bIns="36576">
+            <a:spAutoFit/>
+          </a:bodyPr>
+          <a:lstStyle/>
+          <a:p>
+            <a:pPr algn="l">
+              <a:lnSpc>
+                <a:spcPct val="110000"/>
+              </a:lnSpc>
+            </a:pPr>
+            <a:r>
+              <a:rPr sz="1400" b="1" i="0">
+                <a:solidFill>
+                  <a:srgbClr val="0D9488"/>
+                </a:solidFill>
+                <a:latin typeface="Calibri"/>
+              </a:rPr>
+              <a:t>CHẶNG 4 · ĐÁNH GIÁ</a:t>
+            </a:r>
+          </a:p>
+        </p:txBody>
+      </p:sp>
+      <p:sp>
+        <p:nvSpPr>
+          <p:cNvPr id="4" name="title"/>
+          <p:cNvSpPr txBox="1"/>
+          <p:nvPr/>
+        </p:nvSpPr>
+        <p:spPr>
+          <a:xfrm>
+            <a:off x="548640" y="713232"/>
+            <a:ext cx="11094415" cy="868680"/>
+          </a:xfrm>
+          <a:prstGeom prst="rect">
+            <a:avLst/>
+          </a:prstGeom>
+          <a:noFill/>
+        </p:spPr>
+        <p:txBody>
+          <a:bodyPr wrap="square" anchor="t" lIns="36576" rIns="36576" tIns="36576" bIns="36576">
+            <a:spAutoFit/>
+          </a:bodyPr>
+          <a:lstStyle/>
+          <a:p>
+            <a:pPr algn="l">
+              <a:lnSpc>
+                <a:spcPct val="110000"/>
+              </a:lnSpc>
+            </a:pPr>
+            <a:r>
+              <a:rPr sz="2400" b="1" i="0">
+                <a:solidFill>
+                  <a:srgbClr val="0F172A"/>
+                </a:solidFill>
+                <a:latin typeface="Calibri"/>
+              </a:rPr>
+              <a:t>Đổi kích thước chunk gần như không đổi Recall@5; lọc trước vẫn quyết định</a:t>
+            </a:r>
+          </a:p>
+        </p:txBody>
+      </p:sp>
+      <p:graphicFrame>
+        <p:nvGraphicFramePr>
+          <p:cNvPr id="5" name="Chart 4"/>
+          <p:cNvGraphicFramePr>
+            <a:graphicFrameLocks noGrp="1"/>
+          </p:cNvGraphicFramePr>
+          <p:nvPr/>
+        </p:nvGraphicFramePr>
+        <p:xfrm>
+          <a:off x="548640" y="1691640"/>
+          <a:ext cx="7680960" cy="4023360"/>
+        </p:xfrm>
+        <a:graphic>
+          <a:graphicData uri="http://schemas.openxmlformats.org/drawingml/2006/chart">
+            <c:chart xmlns:c="http://schemas.openxmlformats.org/drawingml/2006/chart" r:id="rId3"/>
+          </a:graphicData>
+        </a:graphic>
+      </p:graphicFrame>
+      <p:sp>
+        <p:nvSpPr>
+          <p:cNvPr id="6" name="TextBox 5"/>
+          <p:cNvSpPr txBox="1"/>
+          <p:nvPr/>
+        </p:nvSpPr>
+        <p:spPr>
+          <a:xfrm>
+            <a:off x="8503920" y="1783080"/>
+            <a:ext cx="3154680" cy="3931920"/>
+          </a:xfrm>
+          <a:prstGeom prst="rect">
+            <a:avLst/>
+          </a:prstGeom>
+          <a:noFill/>
+        </p:spPr>
+        <p:txBody>
+          <a:bodyPr wrap="square" anchor="t" lIns="36576" rIns="36576" tIns="36576" bIns="36576">
+            <a:spAutoFit/>
+          </a:bodyPr>
+          <a:lstStyle/>
+          <a:p>
+            <a:pPr algn="l">
+              <a:lnSpc>
+                <a:spcPct val="110000"/>
+              </a:lnSpc>
+              <a:spcAft>
+                <a:spcPts val="600"/>
+              </a:spcAft>
+            </a:pPr>
+            <a:r>
+              <a:rPr sz="1600" b="1" i="0">
+                <a:solidFill>
+                  <a:srgbClr val="0D9488"/>
+                </a:solidFill>
+                <a:latin typeface="Calibri"/>
+              </a:rPr>
+              <a:t>•  </a:t>
+            </a:r>
+            <a:r>
+              <a:rPr sz="1600" b="0" i="0">
+                <a:solidFill>
+                  <a:srgbClr val="334155"/>
+                </a:solidFill>
+                <a:latin typeface="Calibri"/>
+              </a:rPr>
+              <a:t>Nhỏ: 256 token</a:t>
+            </a:r>
+          </a:p>
+          <a:p>
+            <a:pPr algn="l">
+              <a:lnSpc>
+                <a:spcPct val="110000"/>
+              </a:lnSpc>
+              <a:spcAft>
+                <a:spcPts val="600"/>
+              </a:spcAft>
+            </a:pPr>
+            <a:r>
+              <a:rPr sz="1600" b="1" i="0">
+                <a:solidFill>
+                  <a:srgbClr val="0D9488"/>
+                </a:solidFill>
+                <a:latin typeface="Calibri"/>
+              </a:rPr>
+              <a:t>•  </a:t>
+            </a:r>
+            <a:r>
+              <a:rPr sz="1600" b="0" i="0">
+                <a:solidFill>
+                  <a:srgbClr val="334155"/>
+                </a:solidFill>
+                <a:latin typeface="Calibri"/>
+              </a:rPr>
+              <a:t>Vừa: 400 token</a:t>
+            </a:r>
+          </a:p>
+          <a:p>
+            <a:pPr algn="l">
+              <a:lnSpc>
+                <a:spcPct val="110000"/>
+              </a:lnSpc>
+              <a:spcAft>
+                <a:spcPts val="600"/>
+              </a:spcAft>
+            </a:pPr>
+            <a:r>
+              <a:rPr sz="1600" b="1" i="0">
+                <a:solidFill>
+                  <a:srgbClr val="0D9488"/>
+                </a:solidFill>
+                <a:latin typeface="Calibri"/>
+              </a:rPr>
+              <a:t>•  </a:t>
+            </a:r>
+            <a:r>
+              <a:rPr sz="1600" b="0" i="0">
+                <a:solidFill>
+                  <a:srgbClr val="334155"/>
+                </a:solidFill>
+                <a:latin typeface="Calibri"/>
+              </a:rPr>
+              <a:t>Lớn: 512 token</a:t>
+            </a:r>
+          </a:p>
+          <a:p>
+            <a:pPr algn="l">
+              <a:lnSpc>
+                <a:spcPct val="110000"/>
+              </a:lnSpc>
+              <a:spcAft>
+                <a:spcPts val="600"/>
+              </a:spcAft>
+            </a:pPr>
+            <a:r>
+              <a:rPr sz="1600" b="1" i="0">
+                <a:solidFill>
+                  <a:srgbClr val="0D9488"/>
+                </a:solidFill>
+                <a:latin typeface="Calibri"/>
+              </a:rPr>
+              <a:t>•  </a:t>
+            </a:r>
+            <a:r>
+              <a:rPr sz="1600" b="0" i="0">
+                <a:solidFill>
+                  <a:srgbClr val="334155"/>
+                </a:solidFill>
+                <a:latin typeface="Calibri"/>
+              </a:rPr>
+              <a:t>Subcorpus 203.135 tin, gồm 3.393 tin đáp án</a:t>
+            </a:r>
+          </a:p>
+          <a:p>
+            <a:pPr algn="l">
+              <a:lnSpc>
+                <a:spcPct val="110000"/>
+              </a:lnSpc>
+              <a:spcAft>
+                <a:spcPts val="600"/>
+              </a:spcAft>
+            </a:pPr>
+            <a:r>
+              <a:rPr sz="1600" b="1" i="0">
+                <a:solidFill>
+                  <a:srgbClr val="0D9488"/>
+                </a:solidFill>
+                <a:latin typeface="Calibri"/>
+              </a:rPr>
+              <a:t>•  </a:t>
+            </a:r>
+            <a:r>
+              <a:rPr sz="1600" b="0" i="0">
+                <a:solidFill>
+                  <a:srgbClr val="334155"/>
+                </a:solidFill>
+                <a:latin typeface="Calibri"/>
+              </a:rPr>
+              <a:t>Chỉ so các cỡ chunk với nhau</a:t>
+            </a:r>
+          </a:p>
+        </p:txBody>
+      </p:sp>
+      <p:sp>
+        <p:nvSpPr>
+          <p:cNvPr id="7" name="TextBox 6"/>
+          <p:cNvSpPr txBox="1"/>
+          <p:nvPr/>
+        </p:nvSpPr>
+        <p:spPr>
+          <a:xfrm>
+            <a:off x="548640" y="5806440"/>
+            <a:ext cx="11094415" cy="365760"/>
+          </a:xfrm>
+          <a:prstGeom prst="rect">
+            <a:avLst/>
+          </a:prstGeom>
+          <a:noFill/>
+        </p:spPr>
+        <p:txBody>
+          <a:bodyPr wrap="square" anchor="t" lIns="36576" rIns="36576" tIns="36576" bIns="36576">
+            <a:spAutoFit/>
+          </a:bodyPr>
+          <a:lstStyle/>
+          <a:p>
+            <a:pPr algn="l">
+              <a:lnSpc>
+                <a:spcPct val="110000"/>
+              </a:lnSpc>
+            </a:pPr>
+            <a:r>
+              <a:rPr sz="1400" b="0" i="0">
+                <a:solidFill>
+                  <a:srgbClr val="64748B"/>
+                </a:solidFill>
+                <a:latin typeface="Calibri"/>
+              </a:rPr>
+              <a:t>Nguồn: ablation.json, 27 câu có tập tin đúng; cùng e5-large, không rerank.</a:t>
+            </a:r>
+          </a:p>
+        </p:txBody>
+      </p:sp>
+      <p:sp>
+        <p:nvSpPr>
+          <p:cNvPr id="8" name="footer-no"/>
+          <p:cNvSpPr txBox="1"/>
+          <p:nvPr/>
+        </p:nvSpPr>
+        <p:spPr>
+          <a:xfrm>
+            <a:off x="10728655" y="6419088"/>
+            <a:ext cx="914400" cy="274320"/>
+          </a:xfrm>
+          <a:prstGeom prst="rect">
+            <a:avLst/>
+          </a:prstGeom>
+          <a:noFill/>
+        </p:spPr>
+        <p:txBody>
+          <a:bodyPr wrap="square" anchor="t" lIns="36576" rIns="36576" tIns="36576" bIns="36576">
+            <a:spAutoFit/>
+          </a:bodyPr>
+          <a:lstStyle/>
+          <a:p>
+            <a:pPr algn="r">
+              <a:lnSpc>
+                <a:spcPct val="110000"/>
+              </a:lnSpc>
+            </a:pPr>
+            <a:r>
+              <a:rPr sz="1200" b="0" i="0">
+                <a:solidFill>
+                  <a:srgbClr val="64748B"/>
+                </a:solidFill>
+                <a:latin typeface="Calibri"/>
+              </a:rPr>
+              <a:t>45</a:t>
+            </a:r>
+          </a:p>
+        </p:txBody>
+      </p:sp>
+      <p:sp>
+        <p:nvSpPr>
+          <p:cNvPr id="9" name="footer"/>
+          <p:cNvSpPr txBox="1"/>
+          <p:nvPr/>
+        </p:nvSpPr>
+        <p:spPr>
+          <a:xfrm>
+            <a:off x="548640" y="6419088"/>
+            <a:ext cx="6400800" cy="274320"/>
+          </a:xfrm>
+          <a:prstGeom prst="rect">
+            <a:avLst/>
+          </a:prstGeom>
+          <a:noFill/>
+        </p:spPr>
+        <p:txBody>
+          <a:bodyPr wrap="square" anchor="t" lIns="36576" rIns="36576" tIns="36576" bIns="36576">
+            <a:spAutoFit/>
+          </a:bodyPr>
+          <a:lstStyle/>
+          <a:p>
+            <a:pPr algn="l">
+              <a:lnSpc>
+                <a:spcPct val="110000"/>
+              </a:lnSpc>
+            </a:pPr>
+            <a:r>
+              <a:rPr sz="1200" b="0" i="0">
+                <a:solidFill>
+                  <a:srgbClr val="64748B"/>
+                </a:solidFill>
+                <a:latin typeface="Calibri"/>
+              </a:rPr>
+              <a:t>Nhóm 7 · Từ RAG đến GraphRAG</a:t>
+            </a:r>
+          </a:p>
+        </p:txBody>
+      </p:sp>
+    </p:spTree>
+  </p:cSld>
+  <p:clrMapOvr>
+    <a:masterClrMapping/>
+  </p:clrMapOvr>
+</p:sld>
+</file>
+
+<file path=ppt/slides/slide46.xml><?xml version="1.0" encoding="utf-8"?>
+<p:sld xmlns:a="http://schemas.openxmlformats.org/drawingml/2006/main" xmlns:p="http://schemas.openxmlformats.org/presentationml/2006/main" xmlns:r="http://schemas.openxmlformats.org/officeDocument/2006/relationships">
   <p:cSld name="ev-results">
     <p:spTree>
       <p:nvGrpSpPr>
@@ -50300,7 +51204,7 @@
                 </a:solidFill>
                 <a:latin typeface="Calibri"/>
               </a:rPr>
-              <a:t>Graph đúng nhiều nhất trên tập con; mỗi hệ mạnh ở nhóm câu riêng</a:t>
+              <a:t>Graph đúng nhiều nhất trên toàn bộ benchmark; mỗi hệ mạnh ở nhóm câu riêng</a:t>
             </a:r>
           </a:p>
         </p:txBody>
@@ -50357,7 +51261,7 @@
                 </a:solidFill>
                 <a:latin typeface="Calibri"/>
               </a:rPr>
-              <a:t>Tổng · LLM thuần 11% · Basic RAG 22% · Graph 83% · Hybrid 69% · n = 36 câu mỗi hệ</a:t>
+              <a:t>Tổng · LLM thuần 11% · Basic RAG 28% · Graph 75% · Hybrid 72% · n = 100 câu mỗi hệ</a:t>
             </a:r>
           </a:p>
         </p:txBody>
@@ -50396,7 +51300,7 @@
                 </a:solidFill>
                 <a:latin typeface="Calibri"/>
               </a:rPr>
-              <a:t>45</a:t>
+              <a:t>46</a:t>
             </a:r>
           </a:p>
         </p:txBody>
@@ -50448,7 +51352,7 @@
 </p:sld>
 </file>
 
-<file path=ppt/slides/slide46.xml><?xml version="1.0" encoding="utf-8"?>
+<file path=ppt/slides/slide47.xml><?xml version="1.0" encoding="utf-8"?>
 <p:sld xmlns:a="http://schemas.openxmlformats.org/drawingml/2006/main" xmlns:p="http://schemas.openxmlformats.org/presentationml/2006/main" xmlns:r="http://schemas.openxmlformats.org/officeDocument/2006/relationships">
   <p:cSld name="ev-pairwise">
     <p:spTree>
@@ -50780,7 +51684,7 @@
                           </a:solidFill>
                           <a:latin typeface="Calibri"/>
                         </a:rPr>
-                        <a:t>+11 điểm %</a:t>
+                        <a:t>+17 điểm %</a:t>
                       </a:r>
                     </a:p>
                   </a:txBody>
@@ -50803,7 +51707,7 @@
                           </a:solidFill>
                           <a:latin typeface="Calibri"/>
                         </a:rPr>
-                        <a:t>−8 … +31</a:t>
+                        <a:t>+6 … +28</a:t>
                       </a:r>
                     </a:p>
                   </a:txBody>
@@ -50826,7 +51730,7 @@
                           </a:solidFill>
                           <a:latin typeface="Calibri"/>
                         </a:rPr>
-                        <a:t>0,15</a:t>
+                        <a:t>0,00</a:t>
                       </a:r>
                     </a:p>
                   </a:txBody>
@@ -50897,7 +51801,7 @@
                           </a:solidFill>
                           <a:latin typeface="Calibri"/>
                         </a:rPr>
-                        <a:t>+47 điểm %</a:t>
+                        <a:t>+44 điểm %</a:t>
                       </a:r>
                     </a:p>
                   </a:txBody>
@@ -50920,7 +51824,7 @@
                           </a:solidFill>
                           <a:latin typeface="Calibri"/>
                         </a:rPr>
-                        <a:t>+31 … +64</a:t>
+                        <a:t>+33 … +54</a:t>
                       </a:r>
                     </a:p>
                   </a:txBody>
@@ -51014,7 +51918,7 @@
                           </a:solidFill>
                           <a:latin typeface="Calibri"/>
                         </a:rPr>
-                        <a:t>−14 điểm %</a:t>
+                        <a:t>−3 điểm %</a:t>
                       </a:r>
                     </a:p>
                   </a:txBody>
@@ -51037,7 +51941,7 @@
                           </a:solidFill>
                           <a:latin typeface="Calibri"/>
                         </a:rPr>
-                        <a:t>−25 … −3</a:t>
+                        <a:t>−12 … +7</a:t>
                       </a:r>
                     </a:p>
                   </a:txBody>
@@ -51060,7 +51964,7 @@
                           </a:solidFill>
                           <a:latin typeface="Calibri"/>
                         </a:rPr>
-                        <a:t>0,00</a:t>
+                        <a:t>0,30</a:t>
                       </a:r>
                     </a:p>
                   </a:txBody>
@@ -51131,7 +52035,7 @@
                           </a:solidFill>
                           <a:latin typeface="Calibri"/>
                         </a:rPr>
-                        <a:t>−25 điểm %</a:t>
+                        <a:t>0 điểm %</a:t>
                       </a:r>
                     </a:p>
                   </a:txBody>
@@ -51154,7 +52058,7 @@
                           </a:solidFill>
                           <a:latin typeface="Calibri"/>
                         </a:rPr>
-                        <a:t>−75 … 0</a:t>
+                        <a:t>−33 … +33</a:t>
                       </a:r>
                     </a:p>
                   </a:txBody>
@@ -51177,7 +52081,7 @@
                           </a:solidFill>
                           <a:latin typeface="Calibri"/>
                         </a:rPr>
-                        <a:t>0,32</a:t>
+                        <a:t>1,00</a:t>
                       </a:r>
                     </a:p>
                   </a:txBody>
@@ -51248,7 +52152,7 @@
                           </a:solidFill>
                           <a:latin typeface="Calibri"/>
                         </a:rPr>
-                        <a:t>+100 điểm %</a:t>
+                        <a:t>+67 điểm %</a:t>
                       </a:r>
                     </a:p>
                   </a:txBody>
@@ -51271,7 +52175,7 @@
                           </a:solidFill>
                           <a:latin typeface="Calibri"/>
                         </a:rPr>
-                        <a:t>+100 … +100</a:t>
+                        <a:t>+25 … +100</a:t>
                       </a:r>
                     </a:p>
                   </a:txBody>
@@ -51460,7 +52364,7 @@
                 </a:solidFill>
                 <a:latin typeface="Calibri"/>
               </a:rPr>
-              <a:t>46</a:t>
+              <a:t>47</a:t>
             </a:r>
           </a:p>
         </p:txBody>
@@ -51512,7 +52416,7 @@
 </p:sld>
 </file>
 
-<file path=ppt/slides/slide47.xml><?xml version="1.0" encoding="utf-8"?>
+<file path=ppt/slides/slide48.xml><?xml version="1.0" encoding="utf-8"?>
 <p:sld xmlns:a="http://schemas.openxmlformats.org/drawingml/2006/main" xmlns:p="http://schemas.openxmlformats.org/presentationml/2006/main" xmlns:r="http://schemas.openxmlformats.org/officeDocument/2006/relationships">
   <p:cSld name="ev-cost">
     <p:spTree>
@@ -51751,7 +52655,7 @@
                 </a:solidFill>
                 <a:latin typeface="Calibri"/>
               </a:rPr>
-              <a:t>47</a:t>
+              <a:t>48</a:t>
             </a:r>
           </a:p>
         </p:txBody>
@@ -51803,7 +52707,7 @@
 </p:sld>
 </file>
 
-<file path=ppt/slides/slide48.xml><?xml version="1.0" encoding="utf-8"?>
+<file path=ppt/slides/slide49.xml><?xml version="1.0" encoding="utf-8"?>
 <p:sld xmlns:a="http://schemas.openxmlformats.org/drawingml/2006/main" xmlns:p="http://schemas.openxmlformats.org/presentationml/2006/main" xmlns:r="http://schemas.openxmlformats.org/officeDocument/2006/relationships">
   <p:cSld name="ev-errors">
     <p:spTree>
@@ -51943,7 +52847,7 @@
         </p:nvGraphicFramePr>
         <p:xfrm>
           <a:off x="548640" y="1783080"/>
-          <a:ext cx="6035040" cy="2011680"/>
+          <a:ext cx="6035040" cy="2414016"/>
         </p:xfrm>
         <a:graphic>
           <a:graphicData uri="http://schemas.openxmlformats.org/drawingml/2006/table">
@@ -52089,7 +52993,7 @@
                           </a:solidFill>
                           <a:latin typeface="Calibri"/>
                         </a:rPr>
-                        <a:t>Cypher ra sai</a:t>
+                        <a:t>Cypher lỗi</a:t>
                       </a:r>
                     </a:p>
                   </a:txBody>
@@ -52158,7 +53062,7 @@
                           </a:solidFill>
                           <a:latin typeface="Calibri"/>
                         </a:rPr>
-                        <a:t>4</a:t>
+                        <a:t>–</a:t>
                       </a:r>
                     </a:p>
                   </a:txBody>
@@ -52206,7 +53110,7 @@
                           </a:solidFill>
                           <a:latin typeface="Calibri"/>
                         </a:rPr>
-                        <a:t>Truy xuất trượt</a:t>
+                        <a:t>Cypher ra sai</a:t>
                       </a:r>
                     </a:p>
                   </a:txBody>
@@ -52252,7 +53156,7 @@
                           </a:solidFill>
                           <a:latin typeface="Calibri"/>
                         </a:rPr>
-                        <a:t>4</a:t>
+                        <a:t>–</a:t>
                       </a:r>
                     </a:p>
                   </a:txBody>
@@ -52275,7 +53179,195 @@
                           </a:solidFill>
                           <a:latin typeface="Calibri"/>
                         </a:rPr>
+                        <a:t>12</a:t>
+                      </a:r>
+                    </a:p>
+                  </a:txBody>
+                  <a:tcPr marL="73152" marR="73152" anchor="ctr">
+                    <a:solidFill>
+                      <a:srgbClr val="F1F5F9"/>
+                    </a:solidFill>
+                  </a:tcPr>
+                </a:tc>
+                <a:tc>
+                  <a:txBody>
+                    <a:bodyPr/>
+                    <a:lstStyle/>
+                    <a:p>
+                      <a:pPr algn="ctr"/>
+                      <a:r>
+                        <a:rPr sz="1600" b="0">
+                          <a:solidFill>
+                            <a:srgbClr val="0F172A"/>
+                          </a:solidFill>
+                          <a:latin typeface="Calibri"/>
+                        </a:rPr>
+                        <a:t>5</a:t>
+                      </a:r>
+                    </a:p>
+                  </a:txBody>
+                  <a:tcPr marL="73152" marR="73152" anchor="ctr">
+                    <a:solidFill>
+                      <a:srgbClr val="F1F5F9"/>
+                    </a:solidFill>
+                  </a:tcPr>
+                </a:tc>
+              </a:tr>
+              <a:tr h="402336">
+                <a:tc>
+                  <a:txBody>
+                    <a:bodyPr/>
+                    <a:lstStyle/>
+                    <a:p>
+                      <a:pPr algn="l"/>
+                      <a:r>
+                        <a:rPr sz="1600" b="0">
+                          <a:solidFill>
+                            <a:srgbClr val="0F172A"/>
+                          </a:solidFill>
+                          <a:latin typeface="Calibri"/>
+                        </a:rPr>
+                        <a:t>Truy xuất trượt</a:t>
+                      </a:r>
+                    </a:p>
+                  </a:txBody>
+                  <a:tcPr marL="73152" marR="73152" anchor="ctr">
+                    <a:solidFill>
+                      <a:srgbClr val="FFFFFF"/>
+                    </a:solidFill>
+                  </a:tcPr>
+                </a:tc>
+                <a:tc>
+                  <a:txBody>
+                    <a:bodyPr/>
+                    <a:lstStyle/>
+                    <a:p>
+                      <a:pPr algn="ctr"/>
+                      <a:r>
+                        <a:rPr sz="1600" b="0">
+                          <a:solidFill>
+                            <a:srgbClr val="0F172A"/>
+                          </a:solidFill>
+                          <a:latin typeface="Calibri"/>
+                        </a:rPr>
                         <a:t>–</a:t>
+                      </a:r>
+                    </a:p>
+                  </a:txBody>
+                  <a:tcPr marL="73152" marR="73152" anchor="ctr">
+                    <a:solidFill>
+                      <a:srgbClr val="FFFFFF"/>
+                    </a:solidFill>
+                  </a:tcPr>
+                </a:tc>
+                <a:tc>
+                  <a:txBody>
+                    <a:bodyPr/>
+                    <a:lstStyle/>
+                    <a:p>
+                      <a:pPr algn="ctr"/>
+                      <a:r>
+                        <a:rPr sz="1600" b="0">
+                          <a:solidFill>
+                            <a:srgbClr val="0F172A"/>
+                          </a:solidFill>
+                          <a:latin typeface="Calibri"/>
+                        </a:rPr>
+                        <a:t>13</a:t>
+                      </a:r>
+                    </a:p>
+                  </a:txBody>
+                  <a:tcPr marL="73152" marR="73152" anchor="ctr">
+                    <a:solidFill>
+                      <a:srgbClr val="FFFFFF"/>
+                    </a:solidFill>
+                  </a:tcPr>
+                </a:tc>
+                <a:tc>
+                  <a:txBody>
+                    <a:bodyPr/>
+                    <a:lstStyle/>
+                    <a:p>
+                      <a:pPr algn="ctr"/>
+                      <a:r>
+                        <a:rPr sz="1600" b="0">
+                          <a:solidFill>
+                            <a:srgbClr val="0F172A"/>
+                          </a:solidFill>
+                          <a:latin typeface="Calibri"/>
+                        </a:rPr>
+                        <a:t>8</a:t>
+                      </a:r>
+                    </a:p>
+                  </a:txBody>
+                  <a:tcPr marL="73152" marR="73152" anchor="ctr">
+                    <a:solidFill>
+                      <a:srgbClr val="FFFFFF"/>
+                    </a:solidFill>
+                  </a:tcPr>
+                </a:tc>
+                <a:tc>
+                  <a:txBody>
+                    <a:bodyPr/>
+                    <a:lstStyle/>
+                    <a:p>
+                      <a:pPr algn="ctr"/>
+                      <a:r>
+                        <a:rPr sz="1600" b="0">
+                          <a:solidFill>
+                            <a:srgbClr val="0F172A"/>
+                          </a:solidFill>
+                          <a:latin typeface="Calibri"/>
+                        </a:rPr>
+                        <a:t>10</a:t>
+                      </a:r>
+                    </a:p>
+                  </a:txBody>
+                  <a:tcPr marL="73152" marR="73152" anchor="ctr">
+                    <a:solidFill>
+                      <a:srgbClr val="FFFFFF"/>
+                    </a:solidFill>
+                  </a:tcPr>
+                </a:tc>
+              </a:tr>
+              <a:tr h="402336">
+                <a:tc>
+                  <a:txBody>
+                    <a:bodyPr/>
+                    <a:lstStyle/>
+                    <a:p>
+                      <a:pPr algn="l"/>
+                      <a:r>
+                        <a:rPr sz="1600" b="0">
+                          <a:solidFill>
+                            <a:srgbClr val="0F172A"/>
+                          </a:solidFill>
+                          <a:latin typeface="Calibri"/>
+                        </a:rPr>
+                        <a:t>Không từ chối</a:t>
+                      </a:r>
+                    </a:p>
+                  </a:txBody>
+                  <a:tcPr marL="73152" marR="73152" anchor="ctr">
+                    <a:solidFill>
+                      <a:srgbClr val="F1F5F9"/>
+                    </a:solidFill>
+                  </a:tcPr>
+                </a:tc>
+                <a:tc>
+                  <a:txBody>
+                    <a:bodyPr/>
+                    <a:lstStyle/>
+                    <a:p>
+                      <a:pPr algn="ctr"/>
+                      <a:r>
+                        <a:rPr sz="1600" b="0">
+                          <a:solidFill>
+                            <a:srgbClr val="0F172A"/>
+                          </a:solidFill>
+                          <a:latin typeface="Calibri"/>
+                        </a:rPr>
+                        <a:t>8</a:t>
                       </a:r>
                     </a:p>
                   </a:txBody>
@@ -52308,6 +53400,52 @@
                     </a:solidFill>
                   </a:tcPr>
                 </a:tc>
+                <a:tc>
+                  <a:txBody>
+                    <a:bodyPr/>
+                    <a:lstStyle/>
+                    <a:p>
+                      <a:pPr algn="ctr"/>
+                      <a:r>
+                        <a:rPr sz="1600" b="0">
+                          <a:solidFill>
+                            <a:srgbClr val="0F172A"/>
+                          </a:solidFill>
+                          <a:latin typeface="Calibri"/>
+                        </a:rPr>
+                        <a:t>2</a:t>
+                      </a:r>
+                    </a:p>
+                  </a:txBody>
+                  <a:tcPr marL="73152" marR="73152" anchor="ctr">
+                    <a:solidFill>
+                      <a:srgbClr val="F1F5F9"/>
+                    </a:solidFill>
+                  </a:tcPr>
+                </a:tc>
+                <a:tc>
+                  <a:txBody>
+                    <a:bodyPr/>
+                    <a:lstStyle/>
+                    <a:p>
+                      <a:pPr algn="ctr"/>
+                      <a:r>
+                        <a:rPr sz="1600" b="0">
+                          <a:solidFill>
+                            <a:srgbClr val="0F172A"/>
+                          </a:solidFill>
+                          <a:latin typeface="Calibri"/>
+                        </a:rPr>
+                        <a:t>2</a:t>
+                      </a:r>
+                    </a:p>
+                  </a:txBody>
+                  <a:tcPr marL="73152" marR="73152" anchor="ctr">
+                    <a:solidFill>
+                      <a:srgbClr val="F1F5F9"/>
+                    </a:solidFill>
+                  </a:tcPr>
+                </a:tc>
               </a:tr>
               <a:tr h="402336">
                 <a:tc>
@@ -52323,7 +53461,53 @@
                           </a:solidFill>
                           <a:latin typeface="Calibri"/>
                         </a:rPr>
-                        <a:t>Không từ chối</a:t>
+                        <a:t>Thiếu ngữ cảnh</a:t>
+                      </a:r>
+                    </a:p>
+                  </a:txBody>
+                  <a:tcPr marL="73152" marR="73152" anchor="ctr">
+                    <a:solidFill>
+                      <a:srgbClr val="FFFFFF"/>
+                    </a:solidFill>
+                  </a:tcPr>
+                </a:tc>
+                <a:tc>
+                  <a:txBody>
+                    <a:bodyPr/>
+                    <a:lstStyle/>
+                    <a:p>
+                      <a:pPr algn="ctr"/>
+                      <a:r>
+                        <a:rPr sz="1600" b="0">
+                          <a:solidFill>
+                            <a:srgbClr val="0F172A"/>
+                          </a:solidFill>
+                          <a:latin typeface="Calibri"/>
+                        </a:rPr>
+                        <a:t>81</a:t>
+                      </a:r>
+                    </a:p>
+                  </a:txBody>
+                  <a:tcPr marL="73152" marR="73152" anchor="ctr">
+                    <a:solidFill>
+                      <a:srgbClr val="FFFFFF"/>
+                    </a:solidFill>
+                  </a:tcPr>
+                </a:tc>
+                <a:tc>
+                  <a:txBody>
+                    <a:bodyPr/>
+                    <a:lstStyle/>
+                    <a:p>
+                      <a:pPr algn="ctr"/>
+                      <a:r>
+                        <a:rPr sz="1600" b="0">
+                          <a:solidFill>
+                            <a:srgbClr val="0F172A"/>
+                          </a:solidFill>
+                          <a:latin typeface="Calibri"/>
+                        </a:rPr>
+                        <a:t>55</a:t>
                       </a:r>
                     </a:p>
                   </a:txBody>
@@ -52369,53 +53553,7 @@
                           </a:solidFill>
                           <a:latin typeface="Calibri"/>
                         </a:rPr>
-                        <a:t>1</a:t>
-                      </a:r>
-                    </a:p>
-                  </a:txBody>
-                  <a:tcPr marL="73152" marR="73152" anchor="ctr">
-                    <a:solidFill>
-                      <a:srgbClr val="FFFFFF"/>
-                    </a:solidFill>
-                  </a:tcPr>
-                </a:tc>
-                <a:tc>
-                  <a:txBody>
-                    <a:bodyPr/>
-                    <a:lstStyle/>
-                    <a:p>
-                      <a:pPr algn="ctr"/>
-                      <a:r>
-                        <a:rPr sz="1600" b="0">
-                          <a:solidFill>
-                            <a:srgbClr val="0F172A"/>
-                          </a:solidFill>
-                          <a:latin typeface="Calibri"/>
-                        </a:rPr>
-                        <a:t>1</a:t>
-                      </a:r>
-                    </a:p>
-                  </a:txBody>
-                  <a:tcPr marL="73152" marR="73152" anchor="ctr">
-                    <a:solidFill>
-                      <a:srgbClr val="FFFFFF"/>
-                    </a:solidFill>
-                  </a:tcPr>
-                </a:tc>
-                <a:tc>
-                  <a:txBody>
-                    <a:bodyPr/>
-                    <a:lstStyle/>
-                    <a:p>
-                      <a:pPr algn="ctr"/>
-                      <a:r>
-                        <a:rPr sz="1600" b="0">
-                          <a:solidFill>
-                            <a:srgbClr val="0F172A"/>
-                          </a:solidFill>
-                          <a:latin typeface="Calibri"/>
-                        </a:rPr>
-                        <a:t>1</a:t>
+                        <a:t>10</a:t>
                       </a:r>
                     </a:p>
                   </a:txBody>
@@ -52426,123 +53564,6 @@
                   </a:tcPr>
                 </a:tc>
               </a:tr>
-              <a:tr h="402336">
-                <a:tc>
-                  <a:txBody>
-                    <a:bodyPr/>
-                    <a:lstStyle/>
-                    <a:p>
-                      <a:pPr algn="l"/>
-                      <a:r>
-                        <a:rPr sz="1600" b="0">
-                          <a:solidFill>
-                            <a:srgbClr val="0F172A"/>
-                          </a:solidFill>
-                          <a:latin typeface="Calibri"/>
-                        </a:rPr>
-                        <a:t>Thiếu ngữ cảnh</a:t>
-                      </a:r>
-                    </a:p>
-                  </a:txBody>
-                  <a:tcPr marL="73152" marR="73152" anchor="ctr">
-                    <a:solidFill>
-                      <a:srgbClr val="F1F5F9"/>
-                    </a:solidFill>
-                  </a:tcPr>
-                </a:tc>
-                <a:tc>
-                  <a:txBody>
-                    <a:bodyPr/>
-                    <a:lstStyle/>
-                    <a:p>
-                      <a:pPr algn="ctr"/>
-                      <a:r>
-                        <a:rPr sz="1600" b="0">
-                          <a:solidFill>
-                            <a:srgbClr val="0F172A"/>
-                          </a:solidFill>
-                          <a:latin typeface="Calibri"/>
-                        </a:rPr>
-                        <a:t>29</a:t>
-                      </a:r>
-                    </a:p>
-                  </a:txBody>
-                  <a:tcPr marL="73152" marR="73152" anchor="ctr">
-                    <a:solidFill>
-                      <a:srgbClr val="F1F5F9"/>
-                    </a:solidFill>
-                  </a:tcPr>
-                </a:tc>
-                <a:tc>
-                  <a:txBody>
-                    <a:bodyPr/>
-                    <a:lstStyle/>
-                    <a:p>
-                      <a:pPr algn="ctr"/>
-                      <a:r>
-                        <a:rPr sz="1600" b="0">
-                          <a:solidFill>
-                            <a:srgbClr val="0F172A"/>
-                          </a:solidFill>
-                          <a:latin typeface="Calibri"/>
-                        </a:rPr>
-                        <a:t>23</a:t>
-                      </a:r>
-                    </a:p>
-                  </a:txBody>
-                  <a:tcPr marL="73152" marR="73152" anchor="ctr">
-                    <a:solidFill>
-                      <a:srgbClr val="F1F5F9"/>
-                    </a:solidFill>
-                  </a:tcPr>
-                </a:tc>
-                <a:tc>
-                  <a:txBody>
-                    <a:bodyPr/>
-                    <a:lstStyle/>
-                    <a:p>
-                      <a:pPr algn="ctr"/>
-                      <a:r>
-                        <a:rPr sz="1600" b="0">
-                          <a:solidFill>
-                            <a:srgbClr val="0F172A"/>
-                          </a:solidFill>
-                          <a:latin typeface="Calibri"/>
-                        </a:rPr>
-                        <a:t>1</a:t>
-                      </a:r>
-                    </a:p>
-                  </a:txBody>
-                  <a:tcPr marL="73152" marR="73152" anchor="ctr">
-                    <a:solidFill>
-                      <a:srgbClr val="F1F5F9"/>
-                    </a:solidFill>
-                  </a:tcPr>
-                </a:tc>
-                <a:tc>
-                  <a:txBody>
-                    <a:bodyPr/>
-                    <a:lstStyle/>
-                    <a:p>
-                      <a:pPr algn="ctr"/>
-                      <a:r>
-                        <a:rPr sz="1600" b="0">
-                          <a:solidFill>
-                            <a:srgbClr val="0F172A"/>
-                          </a:solidFill>
-                          <a:latin typeface="Calibri"/>
-                        </a:rPr>
-                        <a:t>5</a:t>
-                      </a:r>
-                    </a:p>
-                  </a:txBody>
-                  <a:tcPr marL="73152" marR="73152" anchor="ctr">
-                    <a:solidFill>
-                      <a:srgbClr val="F1F5F9"/>
-                    </a:solidFill>
-                  </a:tcPr>
-                </a:tc>
-              </a:tr>
             </a:tbl>
           </a:graphicData>
         </a:graphic>
@@ -52625,7 +53646,7 @@
                 </a:solidFill>
                 <a:latin typeface="Calibri"/>
               </a:rPr>
-              <a:t>Graph · Cypher ra sai</a:t>
+              <a:t>Hybrid · Cypher lỗi</a:t>
             </a:r>
           </a:p>
         </p:txBody>
@@ -52664,7 +53685,7 @@
                 </a:solidFill>
                 <a:latin typeface="Calibri"/>
               </a:rPr>
-              <a:t>“Giá/m² trung vị căn hộ ở Vinhomes Central Park cao gấp bao nhiêu lần trung vị căn hộ của quận chứa dự án đó?”</a:t>
+              <a:t>“Giá/m² căn hộ Cầu Giấy quý 1/2026 so với quý 4/2025 thay đổi bao nhiêu %?”</a:t>
             </a:r>
           </a:p>
         </p:txBody>
@@ -52786,7 +53807,7 @@
                 </a:solidFill>
                 <a:latin typeface="Calibri"/>
               </a:rPr>
-              <a:t>“Căn hộ 75m2, 2 phòng ngủ ở Cầu Giấy, Hà Nội hiện đáng giá khoảng bao nhiêu?”</a:t>
+              <a:t>“Diện tích trung vị của các lô đất rao bán ở Củ Chi là bao nhiêu m2?”</a:t>
             </a:r>
           </a:p>
         </p:txBody>
@@ -52825,7 +53846,7 @@
                 </a:solidFill>
                 <a:latin typeface="Calibri"/>
               </a:rPr>
-              <a:t>48</a:t>
+              <a:t>49</a:t>
             </a:r>
           </a:p>
         </p:txBody>
@@ -52877,7 +53898,754 @@
 </p:sld>
 </file>
 
-<file path=ppt/slides/slide49.xml><?xml version="1.0" encoding="utf-8"?>
+<file path=ppt/slides/slide5.xml><?xml version="1.0" encoding="utf-8"?>
+<p:sld xmlns:a="http://schemas.openxmlformats.org/drawingml/2006/main" xmlns:p="http://schemas.openxmlformats.org/presentationml/2006/main" xmlns:r="http://schemas.openxmlformats.org/officeDocument/2006/relationships">
+  <p:cSld name="rag-theory">
+    <p:spTree>
+      <p:nvGrpSpPr>
+        <p:cNvPr id="1" name=""/>
+        <p:cNvGrpSpPr/>
+        <p:nvPr/>
+      </p:nvGrpSpPr>
+      <p:grpSpPr/>
+      <p:sp>
+        <p:nvSpPr>
+          <p:cNvPr id="2" name="Rectangle 1"/>
+          <p:cNvSpPr/>
+          <p:nvPr/>
+        </p:nvSpPr>
+        <p:spPr>
+          <a:xfrm>
+            <a:off x="548640" y="384048"/>
+            <a:ext cx="73152" cy="292608"/>
+          </a:xfrm>
+          <a:prstGeom prst="rect">
+            <a:avLst/>
+          </a:prstGeom>
+          <a:solidFill>
+            <a:srgbClr val="0D9488"/>
+          </a:solidFill>
+          <a:ln>
+            <a:noFill/>
+          </a:ln>
+          <a:effectLst/>
+        </p:spPr>
+        <p:style>
+          <a:lnRef idx="1">
+            <a:schemeClr val="accent1"/>
+          </a:lnRef>
+          <a:fillRef idx="3">
+            <a:schemeClr val="accent1"/>
+          </a:fillRef>
+          <a:effectRef idx="2">
+            <a:schemeClr val="accent1"/>
+          </a:effectRef>
+          <a:fontRef idx="minor">
+            <a:schemeClr val="lt1"/>
+          </a:fontRef>
+        </p:style>
+        <p:txBody>
+          <a:bodyPr rtlCol="0" anchor="ctr"/>
+          <a:lstStyle/>
+          <a:p/>
+        </p:txBody>
+      </p:sp>
+      <p:sp>
+        <p:nvSpPr>
+          <p:cNvPr id="3" name="section"/>
+          <p:cNvSpPr txBox="1"/>
+          <p:nvPr/>
+        </p:nvSpPr>
+        <p:spPr>
+          <a:xfrm>
+            <a:off x="713232" y="329184"/>
+            <a:ext cx="7315200" cy="384048"/>
+          </a:xfrm>
+          <a:prstGeom prst="rect">
+            <a:avLst/>
+          </a:prstGeom>
+          <a:noFill/>
+        </p:spPr>
+        <p:txBody>
+          <a:bodyPr wrap="square" anchor="t" lIns="36576" rIns="36576" tIns="36576" bIns="36576">
+            <a:spAutoFit/>
+          </a:bodyPr>
+          <a:lstStyle/>
+          <a:p>
+            <a:pPr algn="l">
+              <a:lnSpc>
+                <a:spcPct val="110000"/>
+              </a:lnSpc>
+            </a:pPr>
+            <a:r>
+              <a:rPr sz="1400" b="1" i="0">
+                <a:solidFill>
+                  <a:srgbClr val="0D9488"/>
+                </a:solidFill>
+                <a:latin typeface="Calibri"/>
+              </a:rPr>
+              <a:t>CHẶNG 1 · NỀN TẢNG RAG</a:t>
+            </a:r>
+          </a:p>
+        </p:txBody>
+      </p:sp>
+      <p:sp>
+        <p:nvSpPr>
+          <p:cNvPr id="4" name="title"/>
+          <p:cNvSpPr txBox="1"/>
+          <p:nvPr/>
+        </p:nvSpPr>
+        <p:spPr>
+          <a:xfrm>
+            <a:off x="548640" y="713232"/>
+            <a:ext cx="11094415" cy="868680"/>
+          </a:xfrm>
+          <a:prstGeom prst="rect">
+            <a:avLst/>
+          </a:prstGeom>
+          <a:noFill/>
+        </p:spPr>
+        <p:txBody>
+          <a:bodyPr wrap="square" anchor="t" lIns="36576" rIns="36576" tIns="36576" bIns="36576">
+            <a:spAutoFit/>
+          </a:bodyPr>
+          <a:lstStyle/>
+          <a:p>
+            <a:pPr algn="l">
+              <a:lnSpc>
+                <a:spcPct val="110000"/>
+              </a:lnSpc>
+            </a:pPr>
+            <a:r>
+              <a:rPr sz="3000" b="1" i="0">
+                <a:solidFill>
+                  <a:srgbClr val="0F172A"/>
+                </a:solidFill>
+                <a:latin typeface="Calibri"/>
+              </a:rPr>
+              <a:t>RAG: tra bằng chứng trước, rồi mới để LLM trả lời</a:t>
+            </a:r>
+          </a:p>
+        </p:txBody>
+      </p:sp>
+      <p:sp>
+        <p:nvSpPr>
+          <p:cNvPr id="5" name="Rounded Rectangle 4"/>
+          <p:cNvSpPr/>
+          <p:nvPr/>
+        </p:nvSpPr>
+        <p:spPr>
+          <a:xfrm>
+            <a:off x="548640" y="1828800"/>
+            <a:ext cx="3454298" cy="3017520"/>
+          </a:xfrm>
+          <a:prstGeom prst="roundRect">
+            <a:avLst>
+              <a:gd name="adj" fmla="val 5000"/>
+            </a:avLst>
+          </a:prstGeom>
+          <a:solidFill>
+            <a:srgbClr val="DBEAFE"/>
+          </a:solidFill>
+          <a:ln>
+            <a:noFill/>
+          </a:ln>
+          <a:effectLst/>
+        </p:spPr>
+        <p:style>
+          <a:lnRef idx="1">
+            <a:schemeClr val="accent1"/>
+          </a:lnRef>
+          <a:fillRef idx="3">
+            <a:schemeClr val="accent1"/>
+          </a:fillRef>
+          <a:effectRef idx="2">
+            <a:schemeClr val="accent1"/>
+          </a:effectRef>
+          <a:fontRef idx="minor">
+            <a:schemeClr val="lt1"/>
+          </a:fontRef>
+        </p:style>
+        <p:txBody>
+          <a:bodyPr rtlCol="0" anchor="ctr"/>
+          <a:lstStyle/>
+          <a:p/>
+        </p:txBody>
+      </p:sp>
+      <p:sp>
+        <p:nvSpPr>
+          <p:cNvPr id="6" name="TextBox 5"/>
+          <p:cNvSpPr txBox="1"/>
+          <p:nvPr/>
+        </p:nvSpPr>
+        <p:spPr>
+          <a:xfrm>
+            <a:off x="868680" y="2011680"/>
+            <a:ext cx="2814218" cy="1005840"/>
+          </a:xfrm>
+          <a:prstGeom prst="rect">
+            <a:avLst/>
+          </a:prstGeom>
+          <a:noFill/>
+        </p:spPr>
+        <p:txBody>
+          <a:bodyPr wrap="square" anchor="t" lIns="36576" rIns="36576" tIns="36576" bIns="36576">
+            <a:spAutoFit/>
+          </a:bodyPr>
+          <a:lstStyle/>
+          <a:p>
+            <a:pPr algn="l">
+              <a:lnSpc>
+                <a:spcPct val="110000"/>
+              </a:lnSpc>
+            </a:pPr>
+            <a:r>
+              <a:rPr sz="6000" b="1" i="0">
+                <a:solidFill>
+                  <a:srgbClr val="2563EB"/>
+                </a:solidFill>
+                <a:latin typeface="Calibri"/>
+              </a:rPr>
+              <a:t>R</a:t>
+            </a:r>
+          </a:p>
+        </p:txBody>
+      </p:sp>
+      <p:sp>
+        <p:nvSpPr>
+          <p:cNvPr id="7" name="TextBox 6"/>
+          <p:cNvSpPr txBox="1"/>
+          <p:nvPr/>
+        </p:nvSpPr>
+        <p:spPr>
+          <a:xfrm>
+            <a:off x="868680" y="3017520"/>
+            <a:ext cx="2814218" cy="457200"/>
+          </a:xfrm>
+          <a:prstGeom prst="rect">
+            <a:avLst/>
+          </a:prstGeom>
+          <a:noFill/>
+        </p:spPr>
+        <p:txBody>
+          <a:bodyPr wrap="square" anchor="t" lIns="36576" rIns="36576" tIns="36576" bIns="36576">
+            <a:spAutoFit/>
+          </a:bodyPr>
+          <a:lstStyle/>
+          <a:p>
+            <a:pPr algn="l">
+              <a:lnSpc>
+                <a:spcPct val="110000"/>
+              </a:lnSpc>
+            </a:pPr>
+            <a:r>
+              <a:rPr sz="2400" b="1" i="0">
+                <a:solidFill>
+                  <a:srgbClr val="0F172A"/>
+                </a:solidFill>
+                <a:latin typeface="Calibri"/>
+              </a:rPr>
+              <a:t>Retrieval</a:t>
+            </a:r>
+          </a:p>
+        </p:txBody>
+      </p:sp>
+      <p:sp>
+        <p:nvSpPr>
+          <p:cNvPr id="8" name="TextBox 7"/>
+          <p:cNvSpPr txBox="1"/>
+          <p:nvPr/>
+        </p:nvSpPr>
+        <p:spPr>
+          <a:xfrm>
+            <a:off x="868680" y="3566160"/>
+            <a:ext cx="2814218" cy="1188720"/>
+          </a:xfrm>
+          <a:prstGeom prst="rect">
+            <a:avLst/>
+          </a:prstGeom>
+          <a:noFill/>
+        </p:spPr>
+        <p:txBody>
+          <a:bodyPr wrap="square" anchor="t" lIns="36576" rIns="36576" tIns="36576" bIns="36576">
+            <a:spAutoFit/>
+          </a:bodyPr>
+          <a:lstStyle/>
+          <a:p>
+            <a:pPr algn="l">
+              <a:lnSpc>
+                <a:spcPct val="110000"/>
+              </a:lnSpc>
+            </a:pPr>
+            <a:r>
+              <a:rPr sz="2000" b="0" i="0">
+                <a:solidFill>
+                  <a:srgbClr val="334155"/>
+                </a:solidFill>
+                <a:latin typeface="Calibri"/>
+              </a:rPr>
+              <a:t>tìm đoạn tin đăng liên quan đến câu hỏi</a:t>
+            </a:r>
+          </a:p>
+        </p:txBody>
+      </p:sp>
+      <p:sp>
+        <p:nvSpPr>
+          <p:cNvPr id="9" name="Rounded Rectangle 8"/>
+          <p:cNvSpPr/>
+          <p:nvPr/>
+        </p:nvSpPr>
+        <p:spPr>
+          <a:xfrm>
+            <a:off x="4368698" y="1828800"/>
+            <a:ext cx="3454298" cy="3017520"/>
+          </a:xfrm>
+          <a:prstGeom prst="roundRect">
+            <a:avLst>
+              <a:gd name="adj" fmla="val 5000"/>
+            </a:avLst>
+          </a:prstGeom>
+          <a:solidFill>
+            <a:srgbClr val="CCFBF1"/>
+          </a:solidFill>
+          <a:ln>
+            <a:noFill/>
+          </a:ln>
+          <a:effectLst/>
+        </p:spPr>
+        <p:style>
+          <a:lnRef idx="1">
+            <a:schemeClr val="accent1"/>
+          </a:lnRef>
+          <a:fillRef idx="3">
+            <a:schemeClr val="accent1"/>
+          </a:fillRef>
+          <a:effectRef idx="2">
+            <a:schemeClr val="accent1"/>
+          </a:effectRef>
+          <a:fontRef idx="minor">
+            <a:schemeClr val="lt1"/>
+          </a:fontRef>
+        </p:style>
+        <p:txBody>
+          <a:bodyPr rtlCol="0" anchor="ctr"/>
+          <a:lstStyle/>
+          <a:p/>
+        </p:txBody>
+      </p:sp>
+      <p:sp>
+        <p:nvSpPr>
+          <p:cNvPr id="10" name="TextBox 9"/>
+          <p:cNvSpPr txBox="1"/>
+          <p:nvPr/>
+        </p:nvSpPr>
+        <p:spPr>
+          <a:xfrm>
+            <a:off x="4688738" y="2011680"/>
+            <a:ext cx="2814218" cy="1005840"/>
+          </a:xfrm>
+          <a:prstGeom prst="rect">
+            <a:avLst/>
+          </a:prstGeom>
+          <a:noFill/>
+        </p:spPr>
+        <p:txBody>
+          <a:bodyPr wrap="square" anchor="t" lIns="36576" rIns="36576" tIns="36576" bIns="36576">
+            <a:spAutoFit/>
+          </a:bodyPr>
+          <a:lstStyle/>
+          <a:p>
+            <a:pPr algn="l">
+              <a:lnSpc>
+                <a:spcPct val="110000"/>
+              </a:lnSpc>
+            </a:pPr>
+            <a:r>
+              <a:rPr sz="6000" b="1" i="0">
+                <a:solidFill>
+                  <a:srgbClr val="0D9488"/>
+                </a:solidFill>
+                <a:latin typeface="Calibri"/>
+              </a:rPr>
+              <a:t>A</a:t>
+            </a:r>
+          </a:p>
+        </p:txBody>
+      </p:sp>
+      <p:sp>
+        <p:nvSpPr>
+          <p:cNvPr id="11" name="TextBox 10"/>
+          <p:cNvSpPr txBox="1"/>
+          <p:nvPr/>
+        </p:nvSpPr>
+        <p:spPr>
+          <a:xfrm>
+            <a:off x="4688738" y="3017520"/>
+            <a:ext cx="2814218" cy="457200"/>
+          </a:xfrm>
+          <a:prstGeom prst="rect">
+            <a:avLst/>
+          </a:prstGeom>
+          <a:noFill/>
+        </p:spPr>
+        <p:txBody>
+          <a:bodyPr wrap="square" anchor="t" lIns="36576" rIns="36576" tIns="36576" bIns="36576">
+            <a:spAutoFit/>
+          </a:bodyPr>
+          <a:lstStyle/>
+          <a:p>
+            <a:pPr algn="l">
+              <a:lnSpc>
+                <a:spcPct val="110000"/>
+              </a:lnSpc>
+            </a:pPr>
+            <a:r>
+              <a:rPr sz="2400" b="1" i="0">
+                <a:solidFill>
+                  <a:srgbClr val="0F172A"/>
+                </a:solidFill>
+                <a:latin typeface="Calibri"/>
+              </a:rPr>
+              <a:t>Augmentation</a:t>
+            </a:r>
+          </a:p>
+        </p:txBody>
+      </p:sp>
+      <p:sp>
+        <p:nvSpPr>
+          <p:cNvPr id="12" name="TextBox 11"/>
+          <p:cNvSpPr txBox="1"/>
+          <p:nvPr/>
+        </p:nvSpPr>
+        <p:spPr>
+          <a:xfrm>
+            <a:off x="4688738" y="3566160"/>
+            <a:ext cx="2814218" cy="1188720"/>
+          </a:xfrm>
+          <a:prstGeom prst="rect">
+            <a:avLst/>
+          </a:prstGeom>
+          <a:noFill/>
+        </p:spPr>
+        <p:txBody>
+          <a:bodyPr wrap="square" anchor="t" lIns="36576" rIns="36576" tIns="36576" bIns="36576">
+            <a:spAutoFit/>
+          </a:bodyPr>
+          <a:lstStyle/>
+          <a:p>
+            <a:pPr algn="l">
+              <a:lnSpc>
+                <a:spcPct val="110000"/>
+              </a:lnSpc>
+            </a:pPr>
+            <a:r>
+              <a:rPr sz="2000" b="0" i="0">
+                <a:solidFill>
+                  <a:srgbClr val="334155"/>
+                </a:solidFill>
+                <a:latin typeface="Calibri"/>
+              </a:rPr>
+              <a:t>ghép các đoạn đó vào prompt cùng chỉ thị</a:t>
+            </a:r>
+          </a:p>
+        </p:txBody>
+      </p:sp>
+      <p:sp>
+        <p:nvSpPr>
+          <p:cNvPr id="13" name="Rounded Rectangle 12"/>
+          <p:cNvSpPr/>
+          <p:nvPr/>
+        </p:nvSpPr>
+        <p:spPr>
+          <a:xfrm>
+            <a:off x="8188756" y="1828800"/>
+            <a:ext cx="3454298" cy="3017520"/>
+          </a:xfrm>
+          <a:prstGeom prst="roundRect">
+            <a:avLst>
+              <a:gd name="adj" fmla="val 5000"/>
+            </a:avLst>
+          </a:prstGeom>
+          <a:solidFill>
+            <a:srgbClr val="EDE9FE"/>
+          </a:solidFill>
+          <a:ln>
+            <a:noFill/>
+          </a:ln>
+          <a:effectLst/>
+        </p:spPr>
+        <p:style>
+          <a:lnRef idx="1">
+            <a:schemeClr val="accent1"/>
+          </a:lnRef>
+          <a:fillRef idx="3">
+            <a:schemeClr val="accent1"/>
+          </a:fillRef>
+          <a:effectRef idx="2">
+            <a:schemeClr val="accent1"/>
+          </a:effectRef>
+          <a:fontRef idx="minor">
+            <a:schemeClr val="lt1"/>
+          </a:fontRef>
+        </p:style>
+        <p:txBody>
+          <a:bodyPr rtlCol="0" anchor="ctr"/>
+          <a:lstStyle/>
+          <a:p/>
+        </p:txBody>
+      </p:sp>
+      <p:sp>
+        <p:nvSpPr>
+          <p:cNvPr id="14" name="TextBox 13"/>
+          <p:cNvSpPr txBox="1"/>
+          <p:nvPr/>
+        </p:nvSpPr>
+        <p:spPr>
+          <a:xfrm>
+            <a:off x="8508796" y="2011680"/>
+            <a:ext cx="2814218" cy="1005840"/>
+          </a:xfrm>
+          <a:prstGeom prst="rect">
+            <a:avLst/>
+          </a:prstGeom>
+          <a:noFill/>
+        </p:spPr>
+        <p:txBody>
+          <a:bodyPr wrap="square" anchor="t" lIns="36576" rIns="36576" tIns="36576" bIns="36576">
+            <a:spAutoFit/>
+          </a:bodyPr>
+          <a:lstStyle/>
+          <a:p>
+            <a:pPr algn="l">
+              <a:lnSpc>
+                <a:spcPct val="110000"/>
+              </a:lnSpc>
+            </a:pPr>
+            <a:r>
+              <a:rPr sz="6000" b="1" i="0">
+                <a:solidFill>
+                  <a:srgbClr val="7C3AED"/>
+                </a:solidFill>
+                <a:latin typeface="Calibri"/>
+              </a:rPr>
+              <a:t>G</a:t>
+            </a:r>
+          </a:p>
+        </p:txBody>
+      </p:sp>
+      <p:sp>
+        <p:nvSpPr>
+          <p:cNvPr id="15" name="TextBox 14"/>
+          <p:cNvSpPr txBox="1"/>
+          <p:nvPr/>
+        </p:nvSpPr>
+        <p:spPr>
+          <a:xfrm>
+            <a:off x="8508796" y="3017520"/>
+            <a:ext cx="2814218" cy="457200"/>
+          </a:xfrm>
+          <a:prstGeom prst="rect">
+            <a:avLst/>
+          </a:prstGeom>
+          <a:noFill/>
+        </p:spPr>
+        <p:txBody>
+          <a:bodyPr wrap="square" anchor="t" lIns="36576" rIns="36576" tIns="36576" bIns="36576">
+            <a:spAutoFit/>
+          </a:bodyPr>
+          <a:lstStyle/>
+          <a:p>
+            <a:pPr algn="l">
+              <a:lnSpc>
+                <a:spcPct val="110000"/>
+              </a:lnSpc>
+            </a:pPr>
+            <a:r>
+              <a:rPr sz="2400" b="1" i="0">
+                <a:solidFill>
+                  <a:srgbClr val="0F172A"/>
+                </a:solidFill>
+                <a:latin typeface="Calibri"/>
+              </a:rPr>
+              <a:t>Generation</a:t>
+            </a:r>
+          </a:p>
+        </p:txBody>
+      </p:sp>
+      <p:sp>
+        <p:nvSpPr>
+          <p:cNvPr id="16" name="TextBox 15"/>
+          <p:cNvSpPr txBox="1"/>
+          <p:nvPr/>
+        </p:nvSpPr>
+        <p:spPr>
+          <a:xfrm>
+            <a:off x="8508796" y="3566160"/>
+            <a:ext cx="2814218" cy="1188720"/>
+          </a:xfrm>
+          <a:prstGeom prst="rect">
+            <a:avLst/>
+          </a:prstGeom>
+          <a:noFill/>
+        </p:spPr>
+        <p:txBody>
+          <a:bodyPr wrap="square" anchor="t" lIns="36576" rIns="36576" tIns="36576" bIns="36576">
+            <a:spAutoFit/>
+          </a:bodyPr>
+          <a:lstStyle/>
+          <a:p>
+            <a:pPr algn="l">
+              <a:lnSpc>
+                <a:spcPct val="110000"/>
+              </a:lnSpc>
+            </a:pPr>
+            <a:r>
+              <a:rPr sz="2000" b="0" i="0">
+                <a:solidFill>
+                  <a:srgbClr val="334155"/>
+                </a:solidFill>
+                <a:latin typeface="Calibri"/>
+              </a:rPr>
+              <a:t>LLM viết câu trả lời, kèm mã tin làm nguồn</a:t>
+            </a:r>
+          </a:p>
+        </p:txBody>
+      </p:sp>
+      <p:sp>
+        <p:nvSpPr>
+          <p:cNvPr id="17" name="TextBox 16"/>
+          <p:cNvSpPr txBox="1"/>
+          <p:nvPr/>
+        </p:nvSpPr>
+        <p:spPr>
+          <a:xfrm>
+            <a:off x="548640" y="5212080"/>
+            <a:ext cx="11094415" cy="548640"/>
+          </a:xfrm>
+          <a:prstGeom prst="rect">
+            <a:avLst/>
+          </a:prstGeom>
+          <a:noFill/>
+        </p:spPr>
+        <p:txBody>
+          <a:bodyPr wrap="square" anchor="t" lIns="36576" rIns="36576" tIns="36576" bIns="36576">
+            <a:spAutoFit/>
+          </a:bodyPr>
+          <a:lstStyle/>
+          <a:p>
+            <a:pPr algn="l">
+              <a:lnSpc>
+                <a:spcPct val="110000"/>
+              </a:lnSpc>
+            </a:pPr>
+            <a:r>
+              <a:rPr sz="2000" b="1" i="0">
+                <a:solidFill>
+                  <a:srgbClr val="0D9488"/>
+                </a:solidFill>
+                <a:latin typeface="Calibri"/>
+              </a:rPr>
+              <a:t>Ý chính  </a:t>
+            </a:r>
+            <a:r>
+              <a:rPr sz="2000" b="0" i="0">
+                <a:solidFill>
+                  <a:srgbClr val="334155"/>
+                </a:solidFill>
+                <a:latin typeface="Calibri"/>
+              </a:rPr>
+              <a:t>mô hình được đưa đúng tin đăng rồi mới trả lời, và chỉ ra tin nào</a:t>
+            </a:r>
+          </a:p>
+        </p:txBody>
+      </p:sp>
+      <p:sp>
+        <p:nvSpPr>
+          <p:cNvPr id="18" name="footer-no"/>
+          <p:cNvSpPr txBox="1"/>
+          <p:nvPr/>
+        </p:nvSpPr>
+        <p:spPr>
+          <a:xfrm>
+            <a:off x="10728655" y="6419088"/>
+            <a:ext cx="914400" cy="274320"/>
+          </a:xfrm>
+          <a:prstGeom prst="rect">
+            <a:avLst/>
+          </a:prstGeom>
+          <a:noFill/>
+        </p:spPr>
+        <p:txBody>
+          <a:bodyPr wrap="square" anchor="t" lIns="36576" rIns="36576" tIns="36576" bIns="36576">
+            <a:spAutoFit/>
+          </a:bodyPr>
+          <a:lstStyle/>
+          <a:p>
+            <a:pPr algn="r">
+              <a:lnSpc>
+                <a:spcPct val="110000"/>
+              </a:lnSpc>
+            </a:pPr>
+            <a:r>
+              <a:rPr sz="1200" b="0" i="0">
+                <a:solidFill>
+                  <a:srgbClr val="64748B"/>
+                </a:solidFill>
+                <a:latin typeface="Calibri"/>
+              </a:rPr>
+              <a:t>5</a:t>
+            </a:r>
+          </a:p>
+        </p:txBody>
+      </p:sp>
+      <p:sp>
+        <p:nvSpPr>
+          <p:cNvPr id="19" name="footer"/>
+          <p:cNvSpPr txBox="1"/>
+          <p:nvPr/>
+        </p:nvSpPr>
+        <p:spPr>
+          <a:xfrm>
+            <a:off x="548640" y="6419088"/>
+            <a:ext cx="6400800" cy="274320"/>
+          </a:xfrm>
+          <a:prstGeom prst="rect">
+            <a:avLst/>
+          </a:prstGeom>
+          <a:noFill/>
+        </p:spPr>
+        <p:txBody>
+          <a:bodyPr wrap="square" anchor="t" lIns="36576" rIns="36576" tIns="36576" bIns="36576">
+            <a:spAutoFit/>
+          </a:bodyPr>
+          <a:lstStyle/>
+          <a:p>
+            <a:pPr algn="l">
+              <a:lnSpc>
+                <a:spcPct val="110000"/>
+              </a:lnSpc>
+            </a:pPr>
+            <a:r>
+              <a:rPr sz="1200" b="0" i="0">
+                <a:solidFill>
+                  <a:srgbClr val="64748B"/>
+                </a:solidFill>
+                <a:latin typeface="Calibri"/>
+              </a:rPr>
+              <a:t>Nhóm 7 · Từ RAG đến GraphRAG</a:t>
+            </a:r>
+          </a:p>
+        </p:txBody>
+      </p:sp>
+    </p:spTree>
+  </p:cSld>
+  <p:clrMapOvr>
+    <a:masterClrMapping/>
+  </p:clrMapOvr>
+</p:sld>
+</file>
+
+<file path=ppt/slides/slide50.xml><?xml version="1.0" encoding="utf-8"?>
 <p:sld xmlns:a="http://schemas.openxmlformats.org/drawingml/2006/main" xmlns:p="http://schemas.openxmlformats.org/presentationml/2006/main" xmlns:r="http://schemas.openxmlformats.org/officeDocument/2006/relationships">
   <p:cSld name="ext-valuation">
     <p:spTree>
@@ -53661,7 +55429,7 @@
                 </a:solidFill>
                 <a:latin typeface="Calibri"/>
               </a:rPr>
-              <a:t>49</a:t>
+              <a:t>50</a:t>
             </a:r>
           </a:p>
         </p:txBody>
@@ -53713,754 +55481,7 @@
 </p:sld>
 </file>
 
-<file path=ppt/slides/slide5.xml><?xml version="1.0" encoding="utf-8"?>
-<p:sld xmlns:a="http://schemas.openxmlformats.org/drawingml/2006/main" xmlns:p="http://schemas.openxmlformats.org/presentationml/2006/main" xmlns:r="http://schemas.openxmlformats.org/officeDocument/2006/relationships">
-  <p:cSld name="rag-theory">
-    <p:spTree>
-      <p:nvGrpSpPr>
-        <p:cNvPr id="1" name=""/>
-        <p:cNvGrpSpPr/>
-        <p:nvPr/>
-      </p:nvGrpSpPr>
-      <p:grpSpPr/>
-      <p:sp>
-        <p:nvSpPr>
-          <p:cNvPr id="2" name="Rectangle 1"/>
-          <p:cNvSpPr/>
-          <p:nvPr/>
-        </p:nvSpPr>
-        <p:spPr>
-          <a:xfrm>
-            <a:off x="548640" y="384048"/>
-            <a:ext cx="73152" cy="292608"/>
-          </a:xfrm>
-          <a:prstGeom prst="rect">
-            <a:avLst/>
-          </a:prstGeom>
-          <a:solidFill>
-            <a:srgbClr val="0D9488"/>
-          </a:solidFill>
-          <a:ln>
-            <a:noFill/>
-          </a:ln>
-          <a:effectLst/>
-        </p:spPr>
-        <p:style>
-          <a:lnRef idx="1">
-            <a:schemeClr val="accent1"/>
-          </a:lnRef>
-          <a:fillRef idx="3">
-            <a:schemeClr val="accent1"/>
-          </a:fillRef>
-          <a:effectRef idx="2">
-            <a:schemeClr val="accent1"/>
-          </a:effectRef>
-          <a:fontRef idx="minor">
-            <a:schemeClr val="lt1"/>
-          </a:fontRef>
-        </p:style>
-        <p:txBody>
-          <a:bodyPr rtlCol="0" anchor="ctr"/>
-          <a:lstStyle/>
-          <a:p/>
-        </p:txBody>
-      </p:sp>
-      <p:sp>
-        <p:nvSpPr>
-          <p:cNvPr id="3" name="section"/>
-          <p:cNvSpPr txBox="1"/>
-          <p:nvPr/>
-        </p:nvSpPr>
-        <p:spPr>
-          <a:xfrm>
-            <a:off x="713232" y="329184"/>
-            <a:ext cx="7315200" cy="384048"/>
-          </a:xfrm>
-          <a:prstGeom prst="rect">
-            <a:avLst/>
-          </a:prstGeom>
-          <a:noFill/>
-        </p:spPr>
-        <p:txBody>
-          <a:bodyPr wrap="square" anchor="t" lIns="36576" rIns="36576" tIns="36576" bIns="36576">
-            <a:spAutoFit/>
-          </a:bodyPr>
-          <a:lstStyle/>
-          <a:p>
-            <a:pPr algn="l">
-              <a:lnSpc>
-                <a:spcPct val="110000"/>
-              </a:lnSpc>
-            </a:pPr>
-            <a:r>
-              <a:rPr sz="1400" b="1" i="0">
-                <a:solidFill>
-                  <a:srgbClr val="0D9488"/>
-                </a:solidFill>
-                <a:latin typeface="Calibri"/>
-              </a:rPr>
-              <a:t>CHẶNG 1 · NỀN TẢNG RAG</a:t>
-            </a:r>
-          </a:p>
-        </p:txBody>
-      </p:sp>
-      <p:sp>
-        <p:nvSpPr>
-          <p:cNvPr id="4" name="title"/>
-          <p:cNvSpPr txBox="1"/>
-          <p:nvPr/>
-        </p:nvSpPr>
-        <p:spPr>
-          <a:xfrm>
-            <a:off x="548640" y="713232"/>
-            <a:ext cx="11094415" cy="868680"/>
-          </a:xfrm>
-          <a:prstGeom prst="rect">
-            <a:avLst/>
-          </a:prstGeom>
-          <a:noFill/>
-        </p:spPr>
-        <p:txBody>
-          <a:bodyPr wrap="square" anchor="t" lIns="36576" rIns="36576" tIns="36576" bIns="36576">
-            <a:spAutoFit/>
-          </a:bodyPr>
-          <a:lstStyle/>
-          <a:p>
-            <a:pPr algn="l">
-              <a:lnSpc>
-                <a:spcPct val="110000"/>
-              </a:lnSpc>
-            </a:pPr>
-            <a:r>
-              <a:rPr sz="3000" b="1" i="0">
-                <a:solidFill>
-                  <a:srgbClr val="0F172A"/>
-                </a:solidFill>
-                <a:latin typeface="Calibri"/>
-              </a:rPr>
-              <a:t>RAG: tra bằng chứng trước, rồi mới để LLM trả lời</a:t>
-            </a:r>
-          </a:p>
-        </p:txBody>
-      </p:sp>
-      <p:sp>
-        <p:nvSpPr>
-          <p:cNvPr id="5" name="Rounded Rectangle 4"/>
-          <p:cNvSpPr/>
-          <p:nvPr/>
-        </p:nvSpPr>
-        <p:spPr>
-          <a:xfrm>
-            <a:off x="548640" y="1828800"/>
-            <a:ext cx="3454298" cy="3017520"/>
-          </a:xfrm>
-          <a:prstGeom prst="roundRect">
-            <a:avLst>
-              <a:gd name="adj" fmla="val 5000"/>
-            </a:avLst>
-          </a:prstGeom>
-          <a:solidFill>
-            <a:srgbClr val="DBEAFE"/>
-          </a:solidFill>
-          <a:ln>
-            <a:noFill/>
-          </a:ln>
-          <a:effectLst/>
-        </p:spPr>
-        <p:style>
-          <a:lnRef idx="1">
-            <a:schemeClr val="accent1"/>
-          </a:lnRef>
-          <a:fillRef idx="3">
-            <a:schemeClr val="accent1"/>
-          </a:fillRef>
-          <a:effectRef idx="2">
-            <a:schemeClr val="accent1"/>
-          </a:effectRef>
-          <a:fontRef idx="minor">
-            <a:schemeClr val="lt1"/>
-          </a:fontRef>
-        </p:style>
-        <p:txBody>
-          <a:bodyPr rtlCol="0" anchor="ctr"/>
-          <a:lstStyle/>
-          <a:p/>
-        </p:txBody>
-      </p:sp>
-      <p:sp>
-        <p:nvSpPr>
-          <p:cNvPr id="6" name="TextBox 5"/>
-          <p:cNvSpPr txBox="1"/>
-          <p:nvPr/>
-        </p:nvSpPr>
-        <p:spPr>
-          <a:xfrm>
-            <a:off x="868680" y="2011680"/>
-            <a:ext cx="2814218" cy="1005840"/>
-          </a:xfrm>
-          <a:prstGeom prst="rect">
-            <a:avLst/>
-          </a:prstGeom>
-          <a:noFill/>
-        </p:spPr>
-        <p:txBody>
-          <a:bodyPr wrap="square" anchor="t" lIns="36576" rIns="36576" tIns="36576" bIns="36576">
-            <a:spAutoFit/>
-          </a:bodyPr>
-          <a:lstStyle/>
-          <a:p>
-            <a:pPr algn="l">
-              <a:lnSpc>
-                <a:spcPct val="110000"/>
-              </a:lnSpc>
-            </a:pPr>
-            <a:r>
-              <a:rPr sz="6000" b="1" i="0">
-                <a:solidFill>
-                  <a:srgbClr val="2563EB"/>
-                </a:solidFill>
-                <a:latin typeface="Calibri"/>
-              </a:rPr>
-              <a:t>R</a:t>
-            </a:r>
-          </a:p>
-        </p:txBody>
-      </p:sp>
-      <p:sp>
-        <p:nvSpPr>
-          <p:cNvPr id="7" name="TextBox 6"/>
-          <p:cNvSpPr txBox="1"/>
-          <p:nvPr/>
-        </p:nvSpPr>
-        <p:spPr>
-          <a:xfrm>
-            <a:off x="868680" y="3017520"/>
-            <a:ext cx="2814218" cy="457200"/>
-          </a:xfrm>
-          <a:prstGeom prst="rect">
-            <a:avLst/>
-          </a:prstGeom>
-          <a:noFill/>
-        </p:spPr>
-        <p:txBody>
-          <a:bodyPr wrap="square" anchor="t" lIns="36576" rIns="36576" tIns="36576" bIns="36576">
-            <a:spAutoFit/>
-          </a:bodyPr>
-          <a:lstStyle/>
-          <a:p>
-            <a:pPr algn="l">
-              <a:lnSpc>
-                <a:spcPct val="110000"/>
-              </a:lnSpc>
-            </a:pPr>
-            <a:r>
-              <a:rPr sz="2400" b="1" i="0">
-                <a:solidFill>
-                  <a:srgbClr val="0F172A"/>
-                </a:solidFill>
-                <a:latin typeface="Calibri"/>
-              </a:rPr>
-              <a:t>Retrieval</a:t>
-            </a:r>
-          </a:p>
-        </p:txBody>
-      </p:sp>
-      <p:sp>
-        <p:nvSpPr>
-          <p:cNvPr id="8" name="TextBox 7"/>
-          <p:cNvSpPr txBox="1"/>
-          <p:nvPr/>
-        </p:nvSpPr>
-        <p:spPr>
-          <a:xfrm>
-            <a:off x="868680" y="3566160"/>
-            <a:ext cx="2814218" cy="1188720"/>
-          </a:xfrm>
-          <a:prstGeom prst="rect">
-            <a:avLst/>
-          </a:prstGeom>
-          <a:noFill/>
-        </p:spPr>
-        <p:txBody>
-          <a:bodyPr wrap="square" anchor="t" lIns="36576" rIns="36576" tIns="36576" bIns="36576">
-            <a:spAutoFit/>
-          </a:bodyPr>
-          <a:lstStyle/>
-          <a:p>
-            <a:pPr algn="l">
-              <a:lnSpc>
-                <a:spcPct val="110000"/>
-              </a:lnSpc>
-            </a:pPr>
-            <a:r>
-              <a:rPr sz="2000" b="0" i="0">
-                <a:solidFill>
-                  <a:srgbClr val="334155"/>
-                </a:solidFill>
-                <a:latin typeface="Calibri"/>
-              </a:rPr>
-              <a:t>tìm đoạn tin đăng liên quan đến câu hỏi</a:t>
-            </a:r>
-          </a:p>
-        </p:txBody>
-      </p:sp>
-      <p:sp>
-        <p:nvSpPr>
-          <p:cNvPr id="9" name="Rounded Rectangle 8"/>
-          <p:cNvSpPr/>
-          <p:nvPr/>
-        </p:nvSpPr>
-        <p:spPr>
-          <a:xfrm>
-            <a:off x="4368698" y="1828800"/>
-            <a:ext cx="3454298" cy="3017520"/>
-          </a:xfrm>
-          <a:prstGeom prst="roundRect">
-            <a:avLst>
-              <a:gd name="adj" fmla="val 5000"/>
-            </a:avLst>
-          </a:prstGeom>
-          <a:solidFill>
-            <a:srgbClr val="CCFBF1"/>
-          </a:solidFill>
-          <a:ln>
-            <a:noFill/>
-          </a:ln>
-          <a:effectLst/>
-        </p:spPr>
-        <p:style>
-          <a:lnRef idx="1">
-            <a:schemeClr val="accent1"/>
-          </a:lnRef>
-          <a:fillRef idx="3">
-            <a:schemeClr val="accent1"/>
-          </a:fillRef>
-          <a:effectRef idx="2">
-            <a:schemeClr val="accent1"/>
-          </a:effectRef>
-          <a:fontRef idx="minor">
-            <a:schemeClr val="lt1"/>
-          </a:fontRef>
-        </p:style>
-        <p:txBody>
-          <a:bodyPr rtlCol="0" anchor="ctr"/>
-          <a:lstStyle/>
-          <a:p/>
-        </p:txBody>
-      </p:sp>
-      <p:sp>
-        <p:nvSpPr>
-          <p:cNvPr id="10" name="TextBox 9"/>
-          <p:cNvSpPr txBox="1"/>
-          <p:nvPr/>
-        </p:nvSpPr>
-        <p:spPr>
-          <a:xfrm>
-            <a:off x="4688738" y="2011680"/>
-            <a:ext cx="2814218" cy="1005840"/>
-          </a:xfrm>
-          <a:prstGeom prst="rect">
-            <a:avLst/>
-          </a:prstGeom>
-          <a:noFill/>
-        </p:spPr>
-        <p:txBody>
-          <a:bodyPr wrap="square" anchor="t" lIns="36576" rIns="36576" tIns="36576" bIns="36576">
-            <a:spAutoFit/>
-          </a:bodyPr>
-          <a:lstStyle/>
-          <a:p>
-            <a:pPr algn="l">
-              <a:lnSpc>
-                <a:spcPct val="110000"/>
-              </a:lnSpc>
-            </a:pPr>
-            <a:r>
-              <a:rPr sz="6000" b="1" i="0">
-                <a:solidFill>
-                  <a:srgbClr val="0D9488"/>
-                </a:solidFill>
-                <a:latin typeface="Calibri"/>
-              </a:rPr>
-              <a:t>A</a:t>
-            </a:r>
-          </a:p>
-        </p:txBody>
-      </p:sp>
-      <p:sp>
-        <p:nvSpPr>
-          <p:cNvPr id="11" name="TextBox 10"/>
-          <p:cNvSpPr txBox="1"/>
-          <p:nvPr/>
-        </p:nvSpPr>
-        <p:spPr>
-          <a:xfrm>
-            <a:off x="4688738" y="3017520"/>
-            <a:ext cx="2814218" cy="457200"/>
-          </a:xfrm>
-          <a:prstGeom prst="rect">
-            <a:avLst/>
-          </a:prstGeom>
-          <a:noFill/>
-        </p:spPr>
-        <p:txBody>
-          <a:bodyPr wrap="square" anchor="t" lIns="36576" rIns="36576" tIns="36576" bIns="36576">
-            <a:spAutoFit/>
-          </a:bodyPr>
-          <a:lstStyle/>
-          <a:p>
-            <a:pPr algn="l">
-              <a:lnSpc>
-                <a:spcPct val="110000"/>
-              </a:lnSpc>
-            </a:pPr>
-            <a:r>
-              <a:rPr sz="2400" b="1" i="0">
-                <a:solidFill>
-                  <a:srgbClr val="0F172A"/>
-                </a:solidFill>
-                <a:latin typeface="Calibri"/>
-              </a:rPr>
-              <a:t>Augmentation</a:t>
-            </a:r>
-          </a:p>
-        </p:txBody>
-      </p:sp>
-      <p:sp>
-        <p:nvSpPr>
-          <p:cNvPr id="12" name="TextBox 11"/>
-          <p:cNvSpPr txBox="1"/>
-          <p:nvPr/>
-        </p:nvSpPr>
-        <p:spPr>
-          <a:xfrm>
-            <a:off x="4688738" y="3566160"/>
-            <a:ext cx="2814218" cy="1188720"/>
-          </a:xfrm>
-          <a:prstGeom prst="rect">
-            <a:avLst/>
-          </a:prstGeom>
-          <a:noFill/>
-        </p:spPr>
-        <p:txBody>
-          <a:bodyPr wrap="square" anchor="t" lIns="36576" rIns="36576" tIns="36576" bIns="36576">
-            <a:spAutoFit/>
-          </a:bodyPr>
-          <a:lstStyle/>
-          <a:p>
-            <a:pPr algn="l">
-              <a:lnSpc>
-                <a:spcPct val="110000"/>
-              </a:lnSpc>
-            </a:pPr>
-            <a:r>
-              <a:rPr sz="2000" b="0" i="0">
-                <a:solidFill>
-                  <a:srgbClr val="334155"/>
-                </a:solidFill>
-                <a:latin typeface="Calibri"/>
-              </a:rPr>
-              <a:t>ghép các đoạn đó vào prompt cùng chỉ thị</a:t>
-            </a:r>
-          </a:p>
-        </p:txBody>
-      </p:sp>
-      <p:sp>
-        <p:nvSpPr>
-          <p:cNvPr id="13" name="Rounded Rectangle 12"/>
-          <p:cNvSpPr/>
-          <p:nvPr/>
-        </p:nvSpPr>
-        <p:spPr>
-          <a:xfrm>
-            <a:off x="8188756" y="1828800"/>
-            <a:ext cx="3454298" cy="3017520"/>
-          </a:xfrm>
-          <a:prstGeom prst="roundRect">
-            <a:avLst>
-              <a:gd name="adj" fmla="val 5000"/>
-            </a:avLst>
-          </a:prstGeom>
-          <a:solidFill>
-            <a:srgbClr val="EDE9FE"/>
-          </a:solidFill>
-          <a:ln>
-            <a:noFill/>
-          </a:ln>
-          <a:effectLst/>
-        </p:spPr>
-        <p:style>
-          <a:lnRef idx="1">
-            <a:schemeClr val="accent1"/>
-          </a:lnRef>
-          <a:fillRef idx="3">
-            <a:schemeClr val="accent1"/>
-          </a:fillRef>
-          <a:effectRef idx="2">
-            <a:schemeClr val="accent1"/>
-          </a:effectRef>
-          <a:fontRef idx="minor">
-            <a:schemeClr val="lt1"/>
-          </a:fontRef>
-        </p:style>
-        <p:txBody>
-          <a:bodyPr rtlCol="0" anchor="ctr"/>
-          <a:lstStyle/>
-          <a:p/>
-        </p:txBody>
-      </p:sp>
-      <p:sp>
-        <p:nvSpPr>
-          <p:cNvPr id="14" name="TextBox 13"/>
-          <p:cNvSpPr txBox="1"/>
-          <p:nvPr/>
-        </p:nvSpPr>
-        <p:spPr>
-          <a:xfrm>
-            <a:off x="8508796" y="2011680"/>
-            <a:ext cx="2814218" cy="1005840"/>
-          </a:xfrm>
-          <a:prstGeom prst="rect">
-            <a:avLst/>
-          </a:prstGeom>
-          <a:noFill/>
-        </p:spPr>
-        <p:txBody>
-          <a:bodyPr wrap="square" anchor="t" lIns="36576" rIns="36576" tIns="36576" bIns="36576">
-            <a:spAutoFit/>
-          </a:bodyPr>
-          <a:lstStyle/>
-          <a:p>
-            <a:pPr algn="l">
-              <a:lnSpc>
-                <a:spcPct val="110000"/>
-              </a:lnSpc>
-            </a:pPr>
-            <a:r>
-              <a:rPr sz="6000" b="1" i="0">
-                <a:solidFill>
-                  <a:srgbClr val="7C3AED"/>
-                </a:solidFill>
-                <a:latin typeface="Calibri"/>
-              </a:rPr>
-              <a:t>G</a:t>
-            </a:r>
-          </a:p>
-        </p:txBody>
-      </p:sp>
-      <p:sp>
-        <p:nvSpPr>
-          <p:cNvPr id="15" name="TextBox 14"/>
-          <p:cNvSpPr txBox="1"/>
-          <p:nvPr/>
-        </p:nvSpPr>
-        <p:spPr>
-          <a:xfrm>
-            <a:off x="8508796" y="3017520"/>
-            <a:ext cx="2814218" cy="457200"/>
-          </a:xfrm>
-          <a:prstGeom prst="rect">
-            <a:avLst/>
-          </a:prstGeom>
-          <a:noFill/>
-        </p:spPr>
-        <p:txBody>
-          <a:bodyPr wrap="square" anchor="t" lIns="36576" rIns="36576" tIns="36576" bIns="36576">
-            <a:spAutoFit/>
-          </a:bodyPr>
-          <a:lstStyle/>
-          <a:p>
-            <a:pPr algn="l">
-              <a:lnSpc>
-                <a:spcPct val="110000"/>
-              </a:lnSpc>
-            </a:pPr>
-            <a:r>
-              <a:rPr sz="2400" b="1" i="0">
-                <a:solidFill>
-                  <a:srgbClr val="0F172A"/>
-                </a:solidFill>
-                <a:latin typeface="Calibri"/>
-              </a:rPr>
-              <a:t>Generation</a:t>
-            </a:r>
-          </a:p>
-        </p:txBody>
-      </p:sp>
-      <p:sp>
-        <p:nvSpPr>
-          <p:cNvPr id="16" name="TextBox 15"/>
-          <p:cNvSpPr txBox="1"/>
-          <p:nvPr/>
-        </p:nvSpPr>
-        <p:spPr>
-          <a:xfrm>
-            <a:off x="8508796" y="3566160"/>
-            <a:ext cx="2814218" cy="1188720"/>
-          </a:xfrm>
-          <a:prstGeom prst="rect">
-            <a:avLst/>
-          </a:prstGeom>
-          <a:noFill/>
-        </p:spPr>
-        <p:txBody>
-          <a:bodyPr wrap="square" anchor="t" lIns="36576" rIns="36576" tIns="36576" bIns="36576">
-            <a:spAutoFit/>
-          </a:bodyPr>
-          <a:lstStyle/>
-          <a:p>
-            <a:pPr algn="l">
-              <a:lnSpc>
-                <a:spcPct val="110000"/>
-              </a:lnSpc>
-            </a:pPr>
-            <a:r>
-              <a:rPr sz="2000" b="0" i="0">
-                <a:solidFill>
-                  <a:srgbClr val="334155"/>
-                </a:solidFill>
-                <a:latin typeface="Calibri"/>
-              </a:rPr>
-              <a:t>LLM viết câu trả lời, kèm mã tin làm nguồn</a:t>
-            </a:r>
-          </a:p>
-        </p:txBody>
-      </p:sp>
-      <p:sp>
-        <p:nvSpPr>
-          <p:cNvPr id="17" name="TextBox 16"/>
-          <p:cNvSpPr txBox="1"/>
-          <p:nvPr/>
-        </p:nvSpPr>
-        <p:spPr>
-          <a:xfrm>
-            <a:off x="548640" y="5212080"/>
-            <a:ext cx="11094415" cy="548640"/>
-          </a:xfrm>
-          <a:prstGeom prst="rect">
-            <a:avLst/>
-          </a:prstGeom>
-          <a:noFill/>
-        </p:spPr>
-        <p:txBody>
-          <a:bodyPr wrap="square" anchor="t" lIns="36576" rIns="36576" tIns="36576" bIns="36576">
-            <a:spAutoFit/>
-          </a:bodyPr>
-          <a:lstStyle/>
-          <a:p>
-            <a:pPr algn="l">
-              <a:lnSpc>
-                <a:spcPct val="110000"/>
-              </a:lnSpc>
-            </a:pPr>
-            <a:r>
-              <a:rPr sz="2000" b="1" i="0">
-                <a:solidFill>
-                  <a:srgbClr val="0D9488"/>
-                </a:solidFill>
-                <a:latin typeface="Calibri"/>
-              </a:rPr>
-              <a:t>Ý chính  </a:t>
-            </a:r>
-            <a:r>
-              <a:rPr sz="2000" b="0" i="0">
-                <a:solidFill>
-                  <a:srgbClr val="334155"/>
-                </a:solidFill>
-                <a:latin typeface="Calibri"/>
-              </a:rPr>
-              <a:t>mô hình được đưa đúng tin đăng rồi mới trả lời, và chỉ ra tin nào</a:t>
-            </a:r>
-          </a:p>
-        </p:txBody>
-      </p:sp>
-      <p:sp>
-        <p:nvSpPr>
-          <p:cNvPr id="18" name="footer-no"/>
-          <p:cNvSpPr txBox="1"/>
-          <p:nvPr/>
-        </p:nvSpPr>
-        <p:spPr>
-          <a:xfrm>
-            <a:off x="10728655" y="6419088"/>
-            <a:ext cx="914400" cy="274320"/>
-          </a:xfrm>
-          <a:prstGeom prst="rect">
-            <a:avLst/>
-          </a:prstGeom>
-          <a:noFill/>
-        </p:spPr>
-        <p:txBody>
-          <a:bodyPr wrap="square" anchor="t" lIns="36576" rIns="36576" tIns="36576" bIns="36576">
-            <a:spAutoFit/>
-          </a:bodyPr>
-          <a:lstStyle/>
-          <a:p>
-            <a:pPr algn="r">
-              <a:lnSpc>
-                <a:spcPct val="110000"/>
-              </a:lnSpc>
-            </a:pPr>
-            <a:r>
-              <a:rPr sz="1200" b="0" i="0">
-                <a:solidFill>
-                  <a:srgbClr val="64748B"/>
-                </a:solidFill>
-                <a:latin typeface="Calibri"/>
-              </a:rPr>
-              <a:t>5</a:t>
-            </a:r>
-          </a:p>
-        </p:txBody>
-      </p:sp>
-      <p:sp>
-        <p:nvSpPr>
-          <p:cNvPr id="19" name="footer"/>
-          <p:cNvSpPr txBox="1"/>
-          <p:nvPr/>
-        </p:nvSpPr>
-        <p:spPr>
-          <a:xfrm>
-            <a:off x="548640" y="6419088"/>
-            <a:ext cx="6400800" cy="274320"/>
-          </a:xfrm>
-          <a:prstGeom prst="rect">
-            <a:avLst/>
-          </a:prstGeom>
-          <a:noFill/>
-        </p:spPr>
-        <p:txBody>
-          <a:bodyPr wrap="square" anchor="t" lIns="36576" rIns="36576" tIns="36576" bIns="36576">
-            <a:spAutoFit/>
-          </a:bodyPr>
-          <a:lstStyle/>
-          <a:p>
-            <a:pPr algn="l">
-              <a:lnSpc>
-                <a:spcPct val="110000"/>
-              </a:lnSpc>
-            </a:pPr>
-            <a:r>
-              <a:rPr sz="1200" b="0" i="0">
-                <a:solidFill>
-                  <a:srgbClr val="64748B"/>
-                </a:solidFill>
-                <a:latin typeface="Calibri"/>
-              </a:rPr>
-              <a:t>Nhóm 7 · Từ RAG đến GraphRAG</a:t>
-            </a:r>
-          </a:p>
-        </p:txBody>
-      </p:sp>
-    </p:spTree>
-  </p:cSld>
-  <p:clrMapOvr>
-    <a:masterClrMapping/>
-  </p:clrMapOvr>
-</p:sld>
-</file>
-
-<file path=ppt/slides/slide50.xml><?xml version="1.0" encoding="utf-8"?>
+<file path=ppt/slides/slide51.xml><?xml version="1.0" encoding="utf-8"?>
 <p:sld xmlns:a="http://schemas.openxmlformats.org/drawingml/2006/main" xmlns:p="http://schemas.openxmlformats.org/presentationml/2006/main" xmlns:r="http://schemas.openxmlformats.org/officeDocument/2006/relationships">
   <p:cSld name="ext-valuation-detail">
     <p:spTree>
@@ -55520,7 +56541,7 @@
                 </a:solidFill>
                 <a:latin typeface="Calibri"/>
               </a:rPr>
-              <a:t>50</a:t>
+              <a:t>51</a:t>
             </a:r>
           </a:p>
         </p:txBody>
@@ -55528,474 +56549,6 @@
       <p:sp>
         <p:nvSpPr>
           <p:cNvPr id="11" name="footer"/>
-          <p:cNvSpPr txBox="1"/>
-          <p:nvPr/>
-        </p:nvSpPr>
-        <p:spPr>
-          <a:xfrm>
-            <a:off x="548640" y="6419088"/>
-            <a:ext cx="6400800" cy="274320"/>
-          </a:xfrm>
-          <a:prstGeom prst="rect">
-            <a:avLst/>
-          </a:prstGeom>
-          <a:noFill/>
-        </p:spPr>
-        <p:txBody>
-          <a:bodyPr wrap="square" anchor="t" lIns="36576" rIns="36576" tIns="36576" bIns="36576">
-            <a:spAutoFit/>
-          </a:bodyPr>
-          <a:lstStyle/>
-          <a:p>
-            <a:pPr algn="l">
-              <a:lnSpc>
-                <a:spcPct val="110000"/>
-              </a:lnSpc>
-            </a:pPr>
-            <a:r>
-              <a:rPr sz="1200" b="0" i="0">
-                <a:solidFill>
-                  <a:srgbClr val="64748B"/>
-                </a:solidFill>
-                <a:latin typeface="Calibri"/>
-              </a:rPr>
-              <a:t>Nhóm 7 · Từ RAG đến GraphRAG</a:t>
-            </a:r>
-          </a:p>
-        </p:txBody>
-      </p:sp>
-    </p:spTree>
-  </p:cSld>
-  <p:clrMapOvr>
-    <a:masterClrMapping/>
-  </p:clrMapOvr>
-</p:sld>
-</file>
-
-<file path=ppt/slides/slide51.xml><?xml version="1.0" encoding="utf-8"?>
-<p:sld xmlns:a="http://schemas.openxmlformats.org/drawingml/2006/main" xmlns:p="http://schemas.openxmlformats.org/presentationml/2006/main" xmlns:r="http://schemas.openxmlformats.org/officeDocument/2006/relationships">
-  <p:cSld name="ext-demo">
-    <p:spTree>
-      <p:nvGrpSpPr>
-        <p:cNvPr id="1" name=""/>
-        <p:cNvGrpSpPr/>
-        <p:nvPr/>
-      </p:nvGrpSpPr>
-      <p:grpSpPr/>
-      <p:sp>
-        <p:nvSpPr>
-          <p:cNvPr id="2" name="Rectangle 1"/>
-          <p:cNvSpPr/>
-          <p:nvPr/>
-        </p:nvSpPr>
-        <p:spPr>
-          <a:xfrm>
-            <a:off x="548640" y="384048"/>
-            <a:ext cx="73152" cy="292608"/>
-          </a:xfrm>
-          <a:prstGeom prst="rect">
-            <a:avLst/>
-          </a:prstGeom>
-          <a:solidFill>
-            <a:srgbClr val="0D9488"/>
-          </a:solidFill>
-          <a:ln>
-            <a:noFill/>
-          </a:ln>
-          <a:effectLst/>
-        </p:spPr>
-        <p:style>
-          <a:lnRef idx="1">
-            <a:schemeClr val="accent1"/>
-          </a:lnRef>
-          <a:fillRef idx="3">
-            <a:schemeClr val="accent1"/>
-          </a:fillRef>
-          <a:effectRef idx="2">
-            <a:schemeClr val="accent1"/>
-          </a:effectRef>
-          <a:fontRef idx="minor">
-            <a:schemeClr val="lt1"/>
-          </a:fontRef>
-        </p:style>
-        <p:txBody>
-          <a:bodyPr rtlCol="0" anchor="ctr"/>
-          <a:lstStyle/>
-          <a:p/>
-        </p:txBody>
-      </p:sp>
-      <p:sp>
-        <p:nvSpPr>
-          <p:cNvPr id="3" name="section"/>
-          <p:cNvSpPr txBox="1"/>
-          <p:nvPr/>
-        </p:nvSpPr>
-        <p:spPr>
-          <a:xfrm>
-            <a:off x="713232" y="329184"/>
-            <a:ext cx="7315200" cy="384048"/>
-          </a:xfrm>
-          <a:prstGeom prst="rect">
-            <a:avLst/>
-          </a:prstGeom>
-          <a:noFill/>
-        </p:spPr>
-        <p:txBody>
-          <a:bodyPr wrap="square" anchor="t" lIns="36576" rIns="36576" tIns="36576" bIns="36576">
-            <a:spAutoFit/>
-          </a:bodyPr>
-          <a:lstStyle/>
-          <a:p>
-            <a:pPr algn="l">
-              <a:lnSpc>
-                <a:spcPct val="110000"/>
-              </a:lnSpc>
-            </a:pPr>
-            <a:r>
-              <a:rPr sz="1400" b="1" i="0">
-                <a:solidFill>
-                  <a:srgbClr val="0D9488"/>
-                </a:solidFill>
-                <a:latin typeface="Calibri"/>
-              </a:rPr>
-              <a:t>MỞ RỘNG</a:t>
-            </a:r>
-          </a:p>
-        </p:txBody>
-      </p:sp>
-      <p:sp>
-        <p:nvSpPr>
-          <p:cNvPr id="4" name="title"/>
-          <p:cNvSpPr txBox="1"/>
-          <p:nvPr/>
-        </p:nvSpPr>
-        <p:spPr>
-          <a:xfrm>
-            <a:off x="548640" y="713232"/>
-            <a:ext cx="11094415" cy="868680"/>
-          </a:xfrm>
-          <a:prstGeom prst="rect">
-            <a:avLst/>
-          </a:prstGeom>
-          <a:noFill/>
-        </p:spPr>
-        <p:txBody>
-          <a:bodyPr wrap="square" anchor="t" lIns="36576" rIns="36576" tIns="36576" bIns="36576">
-            <a:spAutoFit/>
-          </a:bodyPr>
-          <a:lstStyle/>
-          <a:p>
-            <a:pPr algn="l">
-              <a:lnSpc>
-                <a:spcPct val="110000"/>
-              </a:lnSpc>
-            </a:pPr>
-            <a:r>
-              <a:rPr sz="2400" b="1" i="0">
-                <a:solidFill>
-                  <a:srgbClr val="0F172A"/>
-                </a:solidFill>
-                <a:latin typeface="Calibri"/>
-              </a:rPr>
-              <a:t>Webapp đặt các hệ cạnh nhau trên cùng một câu hỏi, kèm bản đồ và định giá</a:t>
-            </a:r>
-          </a:p>
-        </p:txBody>
-      </p:sp>
-      <p:sp>
-        <p:nvSpPr>
-          <p:cNvPr id="5" name="TextBox 4"/>
-          <p:cNvSpPr txBox="1"/>
-          <p:nvPr/>
-        </p:nvSpPr>
-        <p:spPr>
-          <a:xfrm>
-            <a:off x="548640" y="3451859"/>
-            <a:ext cx="5410047" cy="347472"/>
-          </a:xfrm>
-          <a:prstGeom prst="rect">
-            <a:avLst/>
-          </a:prstGeom>
-          <a:noFill/>
-        </p:spPr>
-        <p:txBody>
-          <a:bodyPr wrap="square" anchor="t" lIns="36576" rIns="36576" tIns="36576" bIns="36576">
-            <a:spAutoFit/>
-          </a:bodyPr>
-          <a:lstStyle/>
-          <a:p>
-            <a:pPr algn="l">
-              <a:lnSpc>
-                <a:spcPct val="110000"/>
-              </a:lnSpc>
-            </a:pPr>
-            <a:r>
-              <a:rPr sz="1400" b="1" i="0">
-                <a:solidFill>
-                  <a:srgbClr val="0D9488"/>
-                </a:solidFill>
-                <a:latin typeface="Calibri"/>
-              </a:rPr>
-              <a:t>So sánh bốn hệ trên một câu hỏi</a:t>
-            </a:r>
-          </a:p>
-        </p:txBody>
-      </p:sp>
-      <p:pic>
-        <p:nvPicPr>
-          <p:cNvPr id="6" name="Picture 5" descr="compare.png"/>
-          <p:cNvPicPr>
-            <a:picLocks noChangeAspect="1"/>
-          </p:cNvPicPr>
-          <p:nvPr/>
-        </p:nvPicPr>
-        <p:blipFill>
-          <a:blip r:embed="rId3"/>
-          <a:stretch>
-            <a:fillRect/>
-          </a:stretch>
-        </p:blipFill>
-        <p:spPr>
-          <a:xfrm>
-            <a:off x="1729663" y="1691640"/>
-            <a:ext cx="3047999" cy="1714499"/>
-          </a:xfrm>
-          <a:prstGeom prst="rect">
-            <a:avLst/>
-          </a:prstGeom>
-        </p:spPr>
-      </p:pic>
-      <p:sp>
-        <p:nvSpPr>
-          <p:cNvPr id="7" name="TextBox 6"/>
-          <p:cNvSpPr txBox="1"/>
-          <p:nvPr/>
-        </p:nvSpPr>
-        <p:spPr>
-          <a:xfrm>
-            <a:off x="6233007" y="3451859"/>
-            <a:ext cx="5410047" cy="347472"/>
-          </a:xfrm>
-          <a:prstGeom prst="rect">
-            <a:avLst/>
-          </a:prstGeom>
-          <a:noFill/>
-        </p:spPr>
-        <p:txBody>
-          <a:bodyPr wrap="square" anchor="t" lIns="36576" rIns="36576" tIns="36576" bIns="36576">
-            <a:spAutoFit/>
-          </a:bodyPr>
-          <a:lstStyle/>
-          <a:p>
-            <a:pPr algn="l">
-              <a:lnSpc>
-                <a:spcPct val="110000"/>
-              </a:lnSpc>
-            </a:pPr>
-            <a:r>
-              <a:rPr sz="1400" b="1" i="0">
-                <a:solidFill>
-                  <a:srgbClr val="0D9488"/>
-                </a:solidFill>
-                <a:latin typeface="Calibri"/>
-              </a:rPr>
-              <a:t>Bản đồ giá theo khu vực</a:t>
-            </a:r>
-          </a:p>
-        </p:txBody>
-      </p:sp>
-      <p:pic>
-        <p:nvPicPr>
-          <p:cNvPr id="8" name="Picture 7" descr="map.png"/>
-          <p:cNvPicPr>
-            <a:picLocks noChangeAspect="1"/>
-          </p:cNvPicPr>
-          <p:nvPr/>
-        </p:nvPicPr>
-        <p:blipFill>
-          <a:blip r:embed="rId4"/>
-          <a:stretch>
-            <a:fillRect/>
-          </a:stretch>
-        </p:blipFill>
-        <p:spPr>
-          <a:xfrm>
-            <a:off x="7414031" y="1691640"/>
-            <a:ext cx="3047999" cy="1714499"/>
-          </a:xfrm>
-          <a:prstGeom prst="rect">
-            <a:avLst/>
-          </a:prstGeom>
-        </p:spPr>
-      </p:pic>
-      <p:sp>
-        <p:nvSpPr>
-          <p:cNvPr id="9" name="TextBox 8"/>
-          <p:cNvSpPr txBox="1"/>
-          <p:nvPr/>
-        </p:nvSpPr>
-        <p:spPr>
-          <a:xfrm>
-            <a:off x="548640" y="5852159"/>
-            <a:ext cx="5410047" cy="347472"/>
-          </a:xfrm>
-          <a:prstGeom prst="rect">
-            <a:avLst/>
-          </a:prstGeom>
-          <a:noFill/>
-        </p:spPr>
-        <p:txBody>
-          <a:bodyPr wrap="square" anchor="t" lIns="36576" rIns="36576" tIns="36576" bIns="36576">
-            <a:spAutoFit/>
-          </a:bodyPr>
-          <a:lstStyle/>
-          <a:p>
-            <a:pPr algn="l">
-              <a:lnSpc>
-                <a:spcPct val="110000"/>
-              </a:lnSpc>
-            </a:pPr>
-            <a:r>
-              <a:rPr sz="1400" b="1" i="0">
-                <a:solidFill>
-                  <a:srgbClr val="0D9488"/>
-                </a:solidFill>
-                <a:latin typeface="Calibri"/>
-              </a:rPr>
-              <a:t>Định giá một tin đăng</a:t>
-            </a:r>
-          </a:p>
-        </p:txBody>
-      </p:sp>
-      <p:pic>
-        <p:nvPicPr>
-          <p:cNvPr id="10" name="Picture 9" descr="valuation.png"/>
-          <p:cNvPicPr>
-            <a:picLocks noChangeAspect="1"/>
-          </p:cNvPicPr>
-          <p:nvPr/>
-        </p:nvPicPr>
-        <p:blipFill>
-          <a:blip r:embed="rId5"/>
-          <a:stretch>
-            <a:fillRect/>
-          </a:stretch>
-        </p:blipFill>
-        <p:spPr>
-          <a:xfrm>
-            <a:off x="1729663" y="4091939"/>
-            <a:ext cx="3047999" cy="1714499"/>
-          </a:xfrm>
-          <a:prstGeom prst="rect">
-            <a:avLst/>
-          </a:prstGeom>
-        </p:spPr>
-      </p:pic>
-      <p:sp>
-        <p:nvSpPr>
-          <p:cNvPr id="11" name="TextBox 10"/>
-          <p:cNvSpPr txBox="1"/>
-          <p:nvPr/>
-        </p:nvSpPr>
-        <p:spPr>
-          <a:xfrm>
-            <a:off x="6233007" y="5852159"/>
-            <a:ext cx="5410047" cy="347472"/>
-          </a:xfrm>
-          <a:prstGeom prst="rect">
-            <a:avLst/>
-          </a:prstGeom>
-          <a:noFill/>
-        </p:spPr>
-        <p:txBody>
-          <a:bodyPr wrap="square" anchor="t" lIns="36576" rIns="36576" tIns="36576" bIns="36576">
-            <a:spAutoFit/>
-          </a:bodyPr>
-          <a:lstStyle/>
-          <a:p>
-            <a:pPr algn="l">
-              <a:lnSpc>
-                <a:spcPct val="110000"/>
-              </a:lnSpc>
-            </a:pPr>
-            <a:r>
-              <a:rPr sz="1400" b="1" i="0">
-                <a:solidFill>
-                  <a:srgbClr val="0D9488"/>
-                </a:solidFill>
-                <a:latin typeface="Calibri"/>
-              </a:rPr>
-              <a:t>Cypher và nguồn trích dẫn</a:t>
-            </a:r>
-          </a:p>
-        </p:txBody>
-      </p:sp>
-      <p:pic>
-        <p:nvPicPr>
-          <p:cNvPr id="12" name="Picture 11" descr="cypher.png"/>
-          <p:cNvPicPr>
-            <a:picLocks noChangeAspect="1"/>
-          </p:cNvPicPr>
-          <p:nvPr/>
-        </p:nvPicPr>
-        <p:blipFill>
-          <a:blip r:embed="rId6"/>
-          <a:stretch>
-            <a:fillRect/>
-          </a:stretch>
-        </p:blipFill>
-        <p:spPr>
-          <a:xfrm>
-            <a:off x="7414031" y="4091939"/>
-            <a:ext cx="3047999" cy="1714499"/>
-          </a:xfrm>
-          <a:prstGeom prst="rect">
-            <a:avLst/>
-          </a:prstGeom>
-        </p:spPr>
-      </p:pic>
-      <p:sp>
-        <p:nvSpPr>
-          <p:cNvPr id="13" name="footer-no"/>
-          <p:cNvSpPr txBox="1"/>
-          <p:nvPr/>
-        </p:nvSpPr>
-        <p:spPr>
-          <a:xfrm>
-            <a:off x="10728655" y="6419088"/>
-            <a:ext cx="914400" cy="274320"/>
-          </a:xfrm>
-          <a:prstGeom prst="rect">
-            <a:avLst/>
-          </a:prstGeom>
-          <a:noFill/>
-        </p:spPr>
-        <p:txBody>
-          <a:bodyPr wrap="square" anchor="t" lIns="36576" rIns="36576" tIns="36576" bIns="36576">
-            <a:spAutoFit/>
-          </a:bodyPr>
-          <a:lstStyle/>
-          <a:p>
-            <a:pPr algn="r">
-              <a:lnSpc>
-                <a:spcPct val="110000"/>
-              </a:lnSpc>
-            </a:pPr>
-            <a:r>
-              <a:rPr sz="1200" b="0" i="0">
-                <a:solidFill>
-                  <a:srgbClr val="64748B"/>
-                </a:solidFill>
-                <a:latin typeface="Calibri"/>
-              </a:rPr>
-              <a:t>51</a:t>
-            </a:r>
-          </a:p>
-        </p:txBody>
-      </p:sp>
-      <p:sp>
-        <p:nvSpPr>
-          <p:cNvPr id="14" name="footer"/>
           <p:cNvSpPr txBox="1"/>
           <p:nvPr/>
         </p:nvSpPr>
@@ -56042,7 +56595,7 @@
 
 <file path=ppt/slides/slide52.xml><?xml version="1.0" encoding="utf-8"?>
 <p:sld xmlns:a="http://schemas.openxmlformats.org/drawingml/2006/main" xmlns:p="http://schemas.openxmlformats.org/presentationml/2006/main" xmlns:r="http://schemas.openxmlformats.org/officeDocument/2006/relationships">
-  <p:cSld name="end-limits">
+  <p:cSld name="ext-demo">
     <p:spTree>
       <p:nvGrpSpPr>
         <p:cNvPr id="1" name=""/>
@@ -56126,7 +56679,7 @@
                 </a:solidFill>
                 <a:latin typeface="Calibri"/>
               </a:rPr>
-              <a:t>KẾT LUẬN</a:t>
+              <a:t>MỞ RỘNG</a:t>
             </a:r>
           </a:p>
         </p:txBody>
@@ -56165,65 +56718,21 @@
                 </a:solidFill>
                 <a:latin typeface="Calibri"/>
               </a:rPr>
-              <a:t>Hạn chế: đánh giá mới trên tập con và dữ liệu là giá rao; hướng tiếp theo đã rõ</a:t>
-            </a:r>
-          </a:p>
-        </p:txBody>
-      </p:sp>
-      <p:sp>
-        <p:nvSpPr>
-          <p:cNvPr id="5" name="Rounded Rectangle 4"/>
-          <p:cNvSpPr/>
-          <p:nvPr/>
-        </p:nvSpPr>
-        <p:spPr>
-          <a:xfrm>
-            <a:off x="548640" y="1737360"/>
-            <a:ext cx="3484778" cy="4434840"/>
-          </a:xfrm>
-          <a:prstGeom prst="roundRect">
-            <a:avLst>
-              <a:gd name="adj" fmla="val 4000"/>
-            </a:avLst>
-          </a:prstGeom>
-          <a:solidFill>
-            <a:srgbClr val="FFE4E6"/>
-          </a:solidFill>
-          <a:ln>
-            <a:noFill/>
-          </a:ln>
-          <a:effectLst/>
-        </p:spPr>
-        <p:style>
-          <a:lnRef idx="1">
-            <a:schemeClr val="accent1"/>
-          </a:lnRef>
-          <a:fillRef idx="3">
-            <a:schemeClr val="accent1"/>
-          </a:fillRef>
-          <a:effectRef idx="2">
-            <a:schemeClr val="accent1"/>
-          </a:effectRef>
-          <a:fontRef idx="minor">
-            <a:schemeClr val="lt1"/>
-          </a:fontRef>
-        </p:style>
-        <p:txBody>
-          <a:bodyPr rtlCol="0" anchor="ctr"/>
-          <a:lstStyle/>
-          <a:p/>
-        </p:txBody>
-      </p:sp>
-      <p:sp>
-        <p:nvSpPr>
-          <p:cNvPr id="6" name="TextBox 5"/>
-          <p:cNvSpPr txBox="1"/>
-          <p:nvPr/>
-        </p:nvSpPr>
-        <p:spPr>
-          <a:xfrm>
-            <a:off x="822959" y="1874519"/>
-            <a:ext cx="2936138" cy="411480"/>
+              <a:t>Webapp đặt các hệ cạnh nhau trên cùng một câu hỏi, kèm bản đồ và định giá</a:t>
+            </a:r>
+          </a:p>
+        </p:txBody>
+      </p:sp>
+      <p:sp>
+        <p:nvSpPr>
+          <p:cNvPr id="5" name="TextBox 4"/>
+          <p:cNvSpPr txBox="1"/>
+          <p:nvPr/>
+        </p:nvSpPr>
+        <p:spPr>
+          <a:xfrm>
+            <a:off x="548640" y="3451859"/>
+            <a:ext cx="5410047" cy="347472"/>
           </a:xfrm>
           <a:prstGeom prst="rect">
             <a:avLst/>
@@ -56244,15 +56753,39 @@
             <a:r>
               <a:rPr sz="1400" b="1" i="0">
                 <a:solidFill>
-                  <a:srgbClr val="E11D48"/>
-                </a:solidFill>
-                <a:latin typeface="Calibri"/>
-              </a:rPr>
-              <a:t>ĐÁNH GIÁ</a:t>
-            </a:r>
-          </a:p>
-        </p:txBody>
-      </p:sp>
+                  <a:srgbClr val="0D9488"/>
+                </a:solidFill>
+                <a:latin typeface="Calibri"/>
+              </a:rPr>
+              <a:t>So sánh bốn hệ trên một câu hỏi</a:t>
+            </a:r>
+          </a:p>
+        </p:txBody>
+      </p:sp>
+      <p:pic>
+        <p:nvPicPr>
+          <p:cNvPr id="6" name="Picture 5" descr="compare.png"/>
+          <p:cNvPicPr>
+            <a:picLocks noChangeAspect="1"/>
+          </p:cNvPicPr>
+          <p:nvPr/>
+        </p:nvPicPr>
+        <p:blipFill>
+          <a:blip r:embed="rId3"/>
+          <a:stretch>
+            <a:fillRect/>
+          </a:stretch>
+        </p:blipFill>
+        <p:spPr>
+          <a:xfrm>
+            <a:off x="1729663" y="1691640"/>
+            <a:ext cx="3047999" cy="1714499"/>
+          </a:xfrm>
+          <a:prstGeom prst="rect">
+            <a:avLst/>
+          </a:prstGeom>
+        </p:spPr>
+      </p:pic>
       <p:sp>
         <p:nvSpPr>
           <p:cNvPr id="7" name="TextBox 6"/>
@@ -56261,8 +56794,8 @@
         </p:nvSpPr>
         <p:spPr>
           <a:xfrm>
-            <a:off x="822959" y="2331720"/>
-            <a:ext cx="2936138" cy="3749039"/>
+            <a:off x="6233007" y="3451859"/>
+            <a:ext cx="5410047" cy="347472"/>
           </a:xfrm>
           <a:prstGeom prst="rect">
             <a:avLst/>
@@ -56279,591 +56812,172 @@
               <a:lnSpc>
                 <a:spcPct val="110000"/>
               </a:lnSpc>
-              <a:spcAft>
-                <a:spcPts val="600"/>
-              </a:spcAft>
-            </a:pPr>
-            <a:r>
-              <a:rPr sz="1600" b="1" i="0">
+            </a:pPr>
+            <a:r>
+              <a:rPr sz="1400" b="1" i="0">
                 <a:solidFill>
                   <a:srgbClr val="0D9488"/>
                 </a:solidFill>
                 <a:latin typeface="Calibri"/>
               </a:rPr>
-              <a:t>•  </a:t>
-            </a:r>
-            <a:r>
-              <a:rPr sz="1600" b="0" i="0">
-                <a:solidFill>
-                  <a:srgbClr val="334155"/>
-                </a:solidFill>
-                <a:latin typeface="Calibri"/>
-              </a:rPr>
-              <a:t>Tập con 36 câu trên 100 câu benchmark</a:t>
-            </a:r>
-          </a:p>
+              <a:t>Bản đồ giá theo khu vực</a:t>
+            </a:r>
+          </a:p>
+        </p:txBody>
+      </p:sp>
+      <p:pic>
+        <p:nvPicPr>
+          <p:cNvPr id="8" name="Picture 7" descr="map.png"/>
+          <p:cNvPicPr>
+            <a:picLocks noChangeAspect="1"/>
+          </p:cNvPicPr>
+          <p:nvPr/>
+        </p:nvPicPr>
+        <p:blipFill>
+          <a:blip r:embed="rId4"/>
+          <a:stretch>
+            <a:fillRect/>
+          </a:stretch>
+        </p:blipFill>
+        <p:spPr>
+          <a:xfrm>
+            <a:off x="7414031" y="1691640"/>
+            <a:ext cx="3047999" cy="1714499"/>
+          </a:xfrm>
+          <a:prstGeom prst="rect">
+            <a:avLst/>
+          </a:prstGeom>
+        </p:spPr>
+      </p:pic>
+      <p:sp>
+        <p:nvSpPr>
+          <p:cNvPr id="9" name="TextBox 8"/>
+          <p:cNvSpPr txBox="1"/>
+          <p:nvPr/>
+        </p:nvSpPr>
+        <p:spPr>
+          <a:xfrm>
+            <a:off x="548640" y="5852159"/>
+            <a:ext cx="5410047" cy="347472"/>
+          </a:xfrm>
+          <a:prstGeom prst="rect">
+            <a:avLst/>
+          </a:prstGeom>
+          <a:noFill/>
+        </p:spPr>
+        <p:txBody>
+          <a:bodyPr wrap="square" anchor="t" lIns="36576" rIns="36576" tIns="36576" bIns="36576">
+            <a:spAutoFit/>
+          </a:bodyPr>
+          <a:lstStyle/>
           <a:p>
             <a:pPr algn="l">
               <a:lnSpc>
                 <a:spcPct val="110000"/>
               </a:lnSpc>
-              <a:spcAft>
-                <a:spcPts val="600"/>
-              </a:spcAft>
-            </a:pPr>
-            <a:r>
-              <a:rPr sz="1600" b="1" i="0">
+            </a:pPr>
+            <a:r>
+              <a:rPr sz="1400" b="1" i="0">
                 <a:solidFill>
                   <a:srgbClr val="0D9488"/>
                 </a:solidFill>
                 <a:latin typeface="Calibri"/>
               </a:rPr>
-              <a:t>•  </a:t>
-            </a:r>
-            <a:r>
-              <a:rPr sz="1600" b="0" i="0">
-                <a:solidFill>
-                  <a:srgbClr val="334155"/>
-                </a:solidFill>
-                <a:latin typeface="Calibri"/>
-              </a:rPr>
-              <a:t>Chấm bằng luật so với đáp án SQL; chưa có faithfulness bằng LLM</a:t>
-            </a:r>
-          </a:p>
+              <a:t>Định giá một tin đăng</a:t>
+            </a:r>
+          </a:p>
+        </p:txBody>
+      </p:sp>
+      <p:pic>
+        <p:nvPicPr>
+          <p:cNvPr id="10" name="Picture 9" descr="valuation.png"/>
+          <p:cNvPicPr>
+            <a:picLocks noChangeAspect="1"/>
+          </p:cNvPicPr>
+          <p:nvPr/>
+        </p:nvPicPr>
+        <p:blipFill>
+          <a:blip r:embed="rId5"/>
+          <a:stretch>
+            <a:fillRect/>
+          </a:stretch>
+        </p:blipFill>
+        <p:spPr>
+          <a:xfrm>
+            <a:off x="1729663" y="4091939"/>
+            <a:ext cx="3047999" cy="1714499"/>
+          </a:xfrm>
+          <a:prstGeom prst="rect">
+            <a:avLst/>
+          </a:prstGeom>
+        </p:spPr>
+      </p:pic>
+      <p:sp>
+        <p:nvSpPr>
+          <p:cNvPr id="11" name="TextBox 10"/>
+          <p:cNvSpPr txBox="1"/>
+          <p:nvPr/>
+        </p:nvSpPr>
+        <p:spPr>
+          <a:xfrm>
+            <a:off x="6233007" y="5852159"/>
+            <a:ext cx="5410047" cy="347472"/>
+          </a:xfrm>
+          <a:prstGeom prst="rect">
+            <a:avLst/>
+          </a:prstGeom>
+          <a:noFill/>
+        </p:spPr>
+        <p:txBody>
+          <a:bodyPr wrap="square" anchor="t" lIns="36576" rIns="36576" tIns="36576" bIns="36576">
+            <a:spAutoFit/>
+          </a:bodyPr>
+          <a:lstStyle/>
           <a:p>
             <a:pPr algn="l">
               <a:lnSpc>
                 <a:spcPct val="110000"/>
               </a:lnSpc>
-              <a:spcAft>
-                <a:spcPts val="600"/>
-              </a:spcAft>
-            </a:pPr>
-            <a:r>
-              <a:rPr sz="1600" b="1" i="0">
+            </a:pPr>
+            <a:r>
+              <a:rPr sz="1400" b="1" i="0">
                 <a:solidFill>
                   <a:srgbClr val="0D9488"/>
                 </a:solidFill>
                 <a:latin typeface="Calibri"/>
               </a:rPr>
-              <a:t>•  </a:t>
-            </a:r>
-            <a:r>
-              <a:rPr sz="1600" b="0" i="0">
-                <a:solidFill>
-                  <a:srgbClr val="334155"/>
-                </a:solidFill>
-                <a:latin typeface="Calibri"/>
-              </a:rPr>
-              <a:t>Mô hình sinh: </a:t>
-            </a:r>
-            <a:r>
-              <a:rPr sz="1600" b="1" i="0">
-                <a:solidFill>
-                  <a:srgbClr val="334155"/>
-                </a:solidFill>
-                <a:latin typeface="Calibri"/>
-              </a:rPr>
-              <a:t>gemini-flash-lite-latest</a:t>
-            </a:r>
-          </a:p>
-          <a:p>
-            <a:pPr algn="l">
-              <a:lnSpc>
-                <a:spcPct val="110000"/>
-              </a:lnSpc>
-              <a:spcAft>
-                <a:spcPts val="600"/>
-              </a:spcAft>
-            </a:pPr>
-            <a:r>
-              <a:rPr sz="1600" b="1" i="0">
-                <a:solidFill>
-                  <a:srgbClr val="0D9488"/>
-                </a:solidFill>
-                <a:latin typeface="Calibri"/>
-              </a:rPr>
-              <a:t>•  </a:t>
-            </a:r>
-            <a:r>
-              <a:rPr sz="1600" b="0" i="0">
-                <a:solidFill>
-                  <a:srgbClr val="334155"/>
-                </a:solidFill>
-                <a:latin typeface="Calibri"/>
-              </a:rPr>
-              <a:t>Khác gpt-oss-120b dự kiến, do hạn mức và rate limit API</a:t>
-            </a:r>
-          </a:p>
-        </p:txBody>
-      </p:sp>
-      <p:sp>
-        <p:nvSpPr>
-          <p:cNvPr id="8" name="Rounded Rectangle 7"/>
-          <p:cNvSpPr/>
-          <p:nvPr/>
-        </p:nvSpPr>
-        <p:spPr>
-          <a:xfrm>
-            <a:off x="4353458" y="1737360"/>
-            <a:ext cx="3484778" cy="4434840"/>
-          </a:xfrm>
-          <a:prstGeom prst="roundRect">
-            <a:avLst>
-              <a:gd name="adj" fmla="val 4000"/>
-            </a:avLst>
-          </a:prstGeom>
-          <a:solidFill>
-            <a:srgbClr val="FEF3C7"/>
-          </a:solidFill>
-          <a:ln>
-            <a:noFill/>
-          </a:ln>
-          <a:effectLst/>
-        </p:spPr>
-        <p:style>
-          <a:lnRef idx="1">
-            <a:schemeClr val="accent1"/>
-          </a:lnRef>
-          <a:fillRef idx="3">
-            <a:schemeClr val="accent1"/>
-          </a:fillRef>
-          <a:effectRef idx="2">
-            <a:schemeClr val="accent1"/>
-          </a:effectRef>
-          <a:fontRef idx="minor">
-            <a:schemeClr val="lt1"/>
-          </a:fontRef>
-        </p:style>
-        <p:txBody>
-          <a:bodyPr rtlCol="0" anchor="ctr"/>
-          <a:lstStyle/>
-          <a:p/>
-        </p:txBody>
-      </p:sp>
-      <p:sp>
-        <p:nvSpPr>
-          <p:cNvPr id="9" name="TextBox 8"/>
-          <p:cNvSpPr txBox="1"/>
-          <p:nvPr/>
-        </p:nvSpPr>
-        <p:spPr>
-          <a:xfrm>
-            <a:off x="4627778" y="1874519"/>
-            <a:ext cx="2936138" cy="411480"/>
-          </a:xfrm>
-          <a:prstGeom prst="rect">
-            <a:avLst/>
-          </a:prstGeom>
-          <a:noFill/>
-        </p:spPr>
-        <p:txBody>
-          <a:bodyPr wrap="square" anchor="t" lIns="36576" rIns="36576" tIns="36576" bIns="36576">
-            <a:spAutoFit/>
-          </a:bodyPr>
-          <a:lstStyle/>
-          <a:p>
-            <a:pPr algn="l">
-              <a:lnSpc>
-                <a:spcPct val="110000"/>
-              </a:lnSpc>
-            </a:pPr>
-            <a:r>
-              <a:rPr sz="1400" b="1" i="0">
-                <a:solidFill>
-                  <a:srgbClr val="D97706"/>
-                </a:solidFill>
-                <a:latin typeface="Calibri"/>
-              </a:rPr>
-              <a:t>DỮ LIỆU</a:t>
-            </a:r>
-          </a:p>
-        </p:txBody>
-      </p:sp>
-      <p:sp>
-        <p:nvSpPr>
-          <p:cNvPr id="10" name="TextBox 9"/>
-          <p:cNvSpPr txBox="1"/>
-          <p:nvPr/>
-        </p:nvSpPr>
-        <p:spPr>
-          <a:xfrm>
-            <a:off x="4627778" y="2331720"/>
-            <a:ext cx="2936138" cy="3749039"/>
-          </a:xfrm>
-          <a:prstGeom prst="rect">
-            <a:avLst/>
-          </a:prstGeom>
-          <a:noFill/>
-        </p:spPr>
-        <p:txBody>
-          <a:bodyPr wrap="square" anchor="t" lIns="36576" rIns="36576" tIns="36576" bIns="36576">
-            <a:spAutoFit/>
-          </a:bodyPr>
-          <a:lstStyle/>
-          <a:p>
-            <a:pPr algn="l">
-              <a:lnSpc>
-                <a:spcPct val="110000"/>
-              </a:lnSpc>
-              <a:spcAft>
-                <a:spcPts val="600"/>
-              </a:spcAft>
-            </a:pPr>
-            <a:r>
-              <a:rPr sz="1600" b="1" i="0">
-                <a:solidFill>
-                  <a:srgbClr val="0D9488"/>
-                </a:solidFill>
-                <a:latin typeface="Calibri"/>
-              </a:rPr>
-              <a:t>•  </a:t>
-            </a:r>
-            <a:r>
-              <a:rPr sz="1600" b="0" i="0">
-                <a:solidFill>
-                  <a:srgbClr val="334155"/>
-                </a:solidFill>
-                <a:latin typeface="Calibri"/>
-              </a:rPr>
-              <a:t>Giá rao ≠ giá giao dịch</a:t>
-            </a:r>
-          </a:p>
-          <a:p>
-            <a:pPr algn="l">
-              <a:lnSpc>
-                <a:spcPct val="110000"/>
-              </a:lnSpc>
-              <a:spcAft>
-                <a:spcPts val="600"/>
-              </a:spcAft>
-            </a:pPr>
-            <a:r>
-              <a:rPr sz="1600" b="1" i="0">
-                <a:solidFill>
-                  <a:srgbClr val="0D9488"/>
-                </a:solidFill>
-                <a:latin typeface="Calibri"/>
-              </a:rPr>
-              <a:t>•  </a:t>
-            </a:r>
-            <a:r>
-              <a:rPr sz="1600" b="0" i="0">
-                <a:solidFill>
-                  <a:srgbClr val="334155"/>
-                </a:solidFill>
-                <a:latin typeface="Calibri"/>
-              </a:rPr>
-              <a:t>Địa giới cũ lẫn tên sau sáp nhập 2025</a:t>
-            </a:r>
-          </a:p>
-          <a:p>
-            <a:pPr algn="l">
-              <a:lnSpc>
-                <a:spcPct val="110000"/>
-              </a:lnSpc>
-              <a:spcAft>
-                <a:spcPts val="600"/>
-              </a:spcAft>
-            </a:pPr>
-            <a:r>
-              <a:rPr sz="1600" b="1" i="0">
-                <a:solidFill>
-                  <a:srgbClr val="0D9488"/>
-                </a:solidFill>
-                <a:latin typeface="Calibri"/>
-              </a:rPr>
-              <a:t>•  </a:t>
-            </a:r>
-            <a:r>
-              <a:rPr sz="1600" b="0" i="0">
-                <a:solidFill>
-                  <a:srgbClr val="334155"/>
-                </a:solidFill>
-                <a:latin typeface="Calibri"/>
-              </a:rPr>
-              <a:t>Không có toạ độ</a:t>
-            </a:r>
-          </a:p>
-          <a:p>
-            <a:pPr algn="l">
-              <a:lnSpc>
-                <a:spcPct val="110000"/>
-              </a:lnSpc>
-              <a:spcAft>
-                <a:spcPts val="600"/>
-              </a:spcAft>
-            </a:pPr>
-            <a:r>
-              <a:rPr sz="1600" b="1" i="0">
-                <a:solidFill>
-                  <a:srgbClr val="0D9488"/>
-                </a:solidFill>
-                <a:latin typeface="Calibri"/>
-              </a:rPr>
-              <a:t>•  </a:t>
-            </a:r>
-            <a:r>
-              <a:rPr sz="1600" b="0" i="0">
-                <a:solidFill>
-                  <a:srgbClr val="334155"/>
-                </a:solidFill>
-                <a:latin typeface="Calibri"/>
-              </a:rPr>
-              <a:t>Thiếu cột: phường 15%, đường 40%, dự án 71%</a:t>
-            </a:r>
-          </a:p>
-          <a:p>
-            <a:pPr algn="l">
-              <a:lnSpc>
-                <a:spcPct val="110000"/>
-              </a:lnSpc>
-              <a:spcAft>
-                <a:spcPts val="600"/>
-              </a:spcAft>
-            </a:pPr>
-            <a:r>
-              <a:rPr sz="1600" b="1" i="0">
-                <a:solidFill>
-                  <a:srgbClr val="0D9488"/>
-                </a:solidFill>
-                <a:latin typeface="Calibri"/>
-              </a:rPr>
-              <a:t>•  </a:t>
-            </a:r>
-            <a:r>
-              <a:rPr sz="1600" b="0" i="0">
-                <a:solidFill>
-                  <a:srgbClr val="334155"/>
-                </a:solidFill>
-                <a:latin typeface="Calibri"/>
-              </a:rPr>
-              <a:t>Giấy phép CC-BY-NC 4.0: chỉ phi thương mại</a:t>
-            </a:r>
-          </a:p>
-        </p:txBody>
-      </p:sp>
-      <p:sp>
-        <p:nvSpPr>
-          <p:cNvPr id="11" name="Rounded Rectangle 10"/>
-          <p:cNvSpPr/>
-          <p:nvPr/>
-        </p:nvSpPr>
-        <p:spPr>
-          <a:xfrm>
-            <a:off x="8158276" y="1737360"/>
-            <a:ext cx="3484778" cy="4434840"/>
-          </a:xfrm>
-          <a:prstGeom prst="roundRect">
-            <a:avLst>
-              <a:gd name="adj" fmla="val 4000"/>
-            </a:avLst>
-          </a:prstGeom>
-          <a:solidFill>
-            <a:srgbClr val="CCFBF1"/>
-          </a:solidFill>
-          <a:ln>
-            <a:noFill/>
-          </a:ln>
-          <a:effectLst/>
-        </p:spPr>
-        <p:style>
-          <a:lnRef idx="1">
-            <a:schemeClr val="accent1"/>
-          </a:lnRef>
-          <a:fillRef idx="3">
-            <a:schemeClr val="accent1"/>
-          </a:fillRef>
-          <a:effectRef idx="2">
-            <a:schemeClr val="accent1"/>
-          </a:effectRef>
-          <a:fontRef idx="minor">
-            <a:schemeClr val="lt1"/>
-          </a:fontRef>
-        </p:style>
-        <p:txBody>
-          <a:bodyPr rtlCol="0" anchor="ctr"/>
-          <a:lstStyle/>
-          <a:p/>
-        </p:txBody>
-      </p:sp>
-      <p:sp>
-        <p:nvSpPr>
-          <p:cNvPr id="12" name="TextBox 11"/>
-          <p:cNvSpPr txBox="1"/>
-          <p:nvPr/>
-        </p:nvSpPr>
-        <p:spPr>
-          <a:xfrm>
-            <a:off x="8432596" y="1874519"/>
-            <a:ext cx="2936138" cy="411480"/>
-          </a:xfrm>
-          <a:prstGeom prst="rect">
-            <a:avLst/>
-          </a:prstGeom>
-          <a:noFill/>
-        </p:spPr>
-        <p:txBody>
-          <a:bodyPr wrap="square" anchor="t" lIns="36576" rIns="36576" tIns="36576" bIns="36576">
-            <a:spAutoFit/>
-          </a:bodyPr>
-          <a:lstStyle/>
-          <a:p>
-            <a:pPr algn="l">
-              <a:lnSpc>
-                <a:spcPct val="110000"/>
-              </a:lnSpc>
-            </a:pPr>
-            <a:r>
-              <a:rPr sz="1400" b="1" i="0">
-                <a:solidFill>
-                  <a:srgbClr val="0D9488"/>
-                </a:solidFill>
-                <a:latin typeface="Calibri"/>
-              </a:rPr>
-              <a:t>HƯỚNG PHÁT TRIỂN</a:t>
-            </a:r>
-          </a:p>
-        </p:txBody>
-      </p:sp>
-      <p:sp>
-        <p:nvSpPr>
-          <p:cNvPr id="13" name="TextBox 12"/>
-          <p:cNvSpPr txBox="1"/>
-          <p:nvPr/>
-        </p:nvSpPr>
-        <p:spPr>
-          <a:xfrm>
-            <a:off x="8432596" y="2331720"/>
-            <a:ext cx="2936138" cy="3749039"/>
-          </a:xfrm>
-          <a:prstGeom prst="rect">
-            <a:avLst/>
-          </a:prstGeom>
-          <a:noFill/>
-        </p:spPr>
-        <p:txBody>
-          <a:bodyPr wrap="square" anchor="t" lIns="36576" rIns="36576" tIns="36576" bIns="36576">
-            <a:spAutoFit/>
-          </a:bodyPr>
-          <a:lstStyle/>
-          <a:p>
-            <a:pPr algn="l">
-              <a:lnSpc>
-                <a:spcPct val="110000"/>
-              </a:lnSpc>
-              <a:spcAft>
-                <a:spcPts val="600"/>
-              </a:spcAft>
-            </a:pPr>
-            <a:r>
-              <a:rPr sz="1600" b="1" i="0">
-                <a:solidFill>
-                  <a:srgbClr val="0D9488"/>
-                </a:solidFill>
-                <a:latin typeface="Calibri"/>
-              </a:rPr>
-              <a:t>•  </a:t>
-            </a:r>
-            <a:r>
-              <a:rPr sz="1600" b="0" i="0">
-                <a:solidFill>
-                  <a:srgbClr val="334155"/>
-                </a:solidFill>
-                <a:latin typeface="Calibri"/>
-              </a:rPr>
-              <a:t>Chạy đủ benchmark, thêm giám khảo LLM và RAGAS</a:t>
-            </a:r>
-          </a:p>
-          <a:p>
-            <a:pPr algn="l">
-              <a:lnSpc>
-                <a:spcPct val="110000"/>
-              </a:lnSpc>
-              <a:spcAft>
-                <a:spcPts val="600"/>
-              </a:spcAft>
-            </a:pPr>
-            <a:r>
-              <a:rPr sz="1600" b="1" i="0">
-                <a:solidFill>
-                  <a:srgbClr val="0D9488"/>
-                </a:solidFill>
-                <a:latin typeface="Calibri"/>
-              </a:rPr>
-              <a:t>•  </a:t>
-            </a:r>
-            <a:r>
-              <a:rPr sz="1600" b="0" i="0">
-                <a:solidFill>
-                  <a:srgbClr val="334155"/>
-                </a:solidFill>
-                <a:latin typeface="Calibri"/>
-              </a:rPr>
-              <a:t>Rerank cross-encoder sau truy xuất</a:t>
-            </a:r>
-          </a:p>
-          <a:p>
-            <a:pPr algn="l">
-              <a:lnSpc>
-                <a:spcPct val="110000"/>
-              </a:lnSpc>
-              <a:spcAft>
-                <a:spcPts val="600"/>
-              </a:spcAft>
-            </a:pPr>
-            <a:r>
-              <a:rPr sz="1600" b="1" i="0">
-                <a:solidFill>
-                  <a:srgbClr val="0D9488"/>
-                </a:solidFill>
-                <a:latin typeface="Calibri"/>
-              </a:rPr>
-              <a:t>•  </a:t>
-            </a:r>
-            <a:r>
-              <a:rPr sz="1600" b="0" i="0">
-                <a:solidFill>
-                  <a:srgbClr val="334155"/>
-                </a:solidFill>
-                <a:latin typeface="Calibri"/>
-              </a:rPr>
-              <a:t>Chuẩn hoá địa giới mới, gắn toạ độ</a:t>
-            </a:r>
-          </a:p>
-          <a:p>
-            <a:pPr algn="l">
-              <a:lnSpc>
-                <a:spcPct val="110000"/>
-              </a:lnSpc>
-              <a:spcAft>
-                <a:spcPts val="600"/>
-              </a:spcAft>
-            </a:pPr>
-            <a:r>
-              <a:rPr sz="1600" b="1" i="0">
-                <a:solidFill>
-                  <a:srgbClr val="0D9488"/>
-                </a:solidFill>
-                <a:latin typeface="Calibri"/>
-              </a:rPr>
-              <a:t>•  </a:t>
-            </a:r>
-            <a:r>
-              <a:rPr sz="1600" b="0" i="0">
-                <a:solidFill>
-                  <a:srgbClr val="334155"/>
-                </a:solidFill>
-                <a:latin typeface="Calibri"/>
-              </a:rPr>
-              <a:t>Định giá cho thuê khi đủ dữ liệu</a:t>
-            </a:r>
-          </a:p>
-        </p:txBody>
-      </p:sp>
-      <p:sp>
-        <p:nvSpPr>
-          <p:cNvPr id="14" name="footer-no"/>
+              <a:t>Cypher và nguồn trích dẫn</a:t>
+            </a:r>
+          </a:p>
+        </p:txBody>
+      </p:sp>
+      <p:pic>
+        <p:nvPicPr>
+          <p:cNvPr id="12" name="Picture 11" descr="cypher.png"/>
+          <p:cNvPicPr>
+            <a:picLocks noChangeAspect="1"/>
+          </p:cNvPicPr>
+          <p:nvPr/>
+        </p:nvPicPr>
+        <p:blipFill>
+          <a:blip r:embed="rId6"/>
+          <a:stretch>
+            <a:fillRect/>
+          </a:stretch>
+        </p:blipFill>
+        <p:spPr>
+          <a:xfrm>
+            <a:off x="7414031" y="4091939"/>
+            <a:ext cx="3047999" cy="1714499"/>
+          </a:xfrm>
+          <a:prstGeom prst="rect">
+            <a:avLst/>
+          </a:prstGeom>
+        </p:spPr>
+      </p:pic>
+      <p:sp>
+        <p:nvSpPr>
+          <p:cNvPr id="13" name="footer-no"/>
           <p:cNvSpPr txBox="1"/>
           <p:nvPr/>
         </p:nvSpPr>
@@ -56902,7 +57016,7 @@
       </p:sp>
       <p:sp>
         <p:nvSpPr>
-          <p:cNvPr id="15" name="footer"/>
+          <p:cNvPr id="14" name="footer"/>
           <p:cNvSpPr txBox="1"/>
           <p:nvPr/>
         </p:nvSpPr>
@@ -56949,7 +57063,7 @@
 
 <file path=ppt/slides/slide53.xml><?xml version="1.0" encoding="utf-8"?>
 <p:sld xmlns:a="http://schemas.openxmlformats.org/drawingml/2006/main" xmlns:p="http://schemas.openxmlformats.org/presentationml/2006/main" xmlns:r="http://schemas.openxmlformats.org/officeDocument/2006/relationships">
-  <p:cSld name="end-takeaways">
+  <p:cSld name="end-limits">
     <p:spTree>
       <p:nvGrpSpPr>
         <p:cNvPr id="1" name=""/>
@@ -57072,7 +57186,7 @@
                 </a:solidFill>
                 <a:latin typeface="Calibri"/>
               </a:rPr>
-              <a:t>Mỗi loại câu hỏi cần đúng công cụ; router ghép chúng, benchmark đo chúng</a:t>
+              <a:t>Hạn chế: chấm bằng luật, không giám khảo LLM, dữ liệu là giá rao; hướng tiếp theo đã rõ</a:t>
             </a:r>
           </a:p>
         </p:txBody>
@@ -57085,16 +57199,16 @@
         </p:nvSpPr>
         <p:spPr>
           <a:xfrm>
-            <a:off x="548640" y="1783080"/>
-            <a:ext cx="5387187" cy="2011680"/>
+            <a:off x="548640" y="1737360"/>
+            <a:ext cx="3484778" cy="4434840"/>
           </a:xfrm>
           <a:prstGeom prst="roundRect">
             <a:avLst>
-              <a:gd name="adj" fmla="val 6000"/>
+              <a:gd name="adj" fmla="val 4000"/>
             </a:avLst>
           </a:prstGeom>
           <a:solidFill>
-            <a:srgbClr val="F1F5F9"/>
+            <a:srgbClr val="FFE4E6"/>
           </a:solidFill>
           <a:ln>
             <a:noFill/>
@@ -57123,20 +57237,233 @@
       </p:sp>
       <p:sp>
         <p:nvSpPr>
-          <p:cNvPr id="6" name="Rectangle 5"/>
+          <p:cNvPr id="6" name="TextBox 5"/>
+          <p:cNvSpPr txBox="1"/>
+          <p:nvPr/>
+        </p:nvSpPr>
+        <p:spPr>
+          <a:xfrm>
+            <a:off x="822959" y="1874519"/>
+            <a:ext cx="2936138" cy="411480"/>
+          </a:xfrm>
+          <a:prstGeom prst="rect">
+            <a:avLst/>
+          </a:prstGeom>
+          <a:noFill/>
+        </p:spPr>
+        <p:txBody>
+          <a:bodyPr wrap="square" anchor="t" lIns="36576" rIns="36576" tIns="36576" bIns="36576">
+            <a:spAutoFit/>
+          </a:bodyPr>
+          <a:lstStyle/>
+          <a:p>
+            <a:pPr algn="l">
+              <a:lnSpc>
+                <a:spcPct val="110000"/>
+              </a:lnSpc>
+            </a:pPr>
+            <a:r>
+              <a:rPr sz="1400" b="1" i="0">
+                <a:solidFill>
+                  <a:srgbClr val="E11D48"/>
+                </a:solidFill>
+                <a:latin typeface="Calibri"/>
+              </a:rPr>
+              <a:t>ĐÁNH GIÁ</a:t>
+            </a:r>
+          </a:p>
+        </p:txBody>
+      </p:sp>
+      <p:sp>
+        <p:nvSpPr>
+          <p:cNvPr id="7" name="TextBox 6"/>
+          <p:cNvSpPr txBox="1"/>
+          <p:nvPr/>
+        </p:nvSpPr>
+        <p:spPr>
+          <a:xfrm>
+            <a:off x="822959" y="2331720"/>
+            <a:ext cx="2936138" cy="3749039"/>
+          </a:xfrm>
+          <a:prstGeom prst="rect">
+            <a:avLst/>
+          </a:prstGeom>
+          <a:noFill/>
+        </p:spPr>
+        <p:txBody>
+          <a:bodyPr wrap="square" anchor="t" lIns="36576" rIns="36576" tIns="36576" bIns="36576">
+            <a:spAutoFit/>
+          </a:bodyPr>
+          <a:lstStyle/>
+          <a:p>
+            <a:pPr algn="l">
+              <a:lnSpc>
+                <a:spcPct val="110000"/>
+              </a:lnSpc>
+              <a:spcAft>
+                <a:spcPts val="600"/>
+              </a:spcAft>
+            </a:pPr>
+            <a:r>
+              <a:rPr sz="1600" b="1" i="0">
+                <a:solidFill>
+                  <a:srgbClr val="0D9488"/>
+                </a:solidFill>
+                <a:latin typeface="Calibri"/>
+              </a:rPr>
+              <a:t>•  </a:t>
+            </a:r>
+            <a:r>
+              <a:rPr sz="1600" b="0" i="0">
+                <a:solidFill>
+                  <a:srgbClr val="334155"/>
+                </a:solidFill>
+                <a:latin typeface="Calibri"/>
+              </a:rPr>
+              <a:t>Đủ 100 câu benchmark, bốn hệ</a:t>
+            </a:r>
+          </a:p>
+          <a:p>
+            <a:pPr algn="l">
+              <a:lnSpc>
+                <a:spcPct val="110000"/>
+              </a:lnSpc>
+              <a:spcAft>
+                <a:spcPts val="600"/>
+              </a:spcAft>
+            </a:pPr>
+            <a:r>
+              <a:rPr sz="1600" b="1" i="0">
+                <a:solidFill>
+                  <a:srgbClr val="0D9488"/>
+                </a:solidFill>
+                <a:latin typeface="Calibri"/>
+              </a:rPr>
+              <a:t>•  </a:t>
+            </a:r>
+            <a:r>
+              <a:rPr sz="1600" b="0" i="0">
+                <a:solidFill>
+                  <a:srgbClr val="334155"/>
+                </a:solidFill>
+                <a:latin typeface="Calibri"/>
+              </a:rPr>
+              <a:t>Chấm bằng luật so với đáp án SQL; không giám khảo LLM, không RAGAS (tiết kiệm chi phí)</a:t>
+            </a:r>
+          </a:p>
+          <a:p>
+            <a:pPr algn="l">
+              <a:lnSpc>
+                <a:spcPct val="110000"/>
+              </a:lnSpc>
+              <a:spcAft>
+                <a:spcPts val="600"/>
+              </a:spcAft>
+            </a:pPr>
+            <a:r>
+              <a:rPr sz="1600" b="1" i="0">
+                <a:solidFill>
+                  <a:srgbClr val="0D9488"/>
+                </a:solidFill>
+                <a:latin typeface="Calibri"/>
+              </a:rPr>
+              <a:t>•  </a:t>
+            </a:r>
+            <a:r>
+              <a:rPr sz="1600" b="0" i="0">
+                <a:solidFill>
+                  <a:srgbClr val="334155"/>
+                </a:solidFill>
+                <a:latin typeface="Calibri"/>
+              </a:rPr>
+              <a:t>Mô hình sinh: </a:t>
+            </a:r>
+            <a:r>
+              <a:rPr sz="1600" b="1" i="0">
+                <a:solidFill>
+                  <a:srgbClr val="334155"/>
+                </a:solidFill>
+                <a:latin typeface="Calibri"/>
+              </a:rPr>
+              <a:t>gemini-flash-lite-latest</a:t>
+            </a:r>
+          </a:p>
+          <a:p>
+            <a:pPr algn="l">
+              <a:lnSpc>
+                <a:spcPct val="110000"/>
+              </a:lnSpc>
+              <a:spcAft>
+                <a:spcPts val="600"/>
+              </a:spcAft>
+            </a:pPr>
+            <a:r>
+              <a:rPr sz="1600" b="1" i="0">
+                <a:solidFill>
+                  <a:srgbClr val="0D9488"/>
+                </a:solidFill>
+                <a:latin typeface="Calibri"/>
+              </a:rPr>
+              <a:t>•  </a:t>
+            </a:r>
+            <a:r>
+              <a:rPr sz="1600" b="0" i="0">
+                <a:solidFill>
+                  <a:srgbClr val="334155"/>
+                </a:solidFill>
+                <a:latin typeface="Calibri"/>
+              </a:rPr>
+              <a:t>Khác gpt-oss-120b dự kiến, do hạn mức và rate limit API</a:t>
+            </a:r>
+          </a:p>
+          <a:p>
+            <a:pPr algn="l">
+              <a:lnSpc>
+                <a:spcPct val="110000"/>
+              </a:lnSpc>
+              <a:spcAft>
+                <a:spcPts val="600"/>
+              </a:spcAft>
+            </a:pPr>
+            <a:r>
+              <a:rPr sz="1600" b="1" i="0">
+                <a:solidFill>
+                  <a:srgbClr val="0D9488"/>
+                </a:solidFill>
+                <a:latin typeface="Calibri"/>
+              </a:rPr>
+              <a:t>•  </a:t>
+            </a:r>
+            <a:r>
+              <a:rPr sz="1600" b="0" i="0">
+                <a:solidFill>
+                  <a:srgbClr val="334155"/>
+                </a:solidFill>
+                <a:latin typeface="Calibri"/>
+              </a:rPr>
+              <a:t>Docker api + web đã dựng, kiểm qua nginx</a:t>
+            </a:r>
+          </a:p>
+        </p:txBody>
+      </p:sp>
+      <p:sp>
+        <p:nvSpPr>
+          <p:cNvPr id="8" name="Rounded Rectangle 7"/>
           <p:cNvSpPr/>
           <p:nvPr/>
         </p:nvSpPr>
         <p:spPr>
           <a:xfrm>
-            <a:off x="548640" y="1783080"/>
-            <a:ext cx="73152" cy="2011680"/>
-          </a:xfrm>
-          <a:prstGeom prst="rect">
-            <a:avLst/>
+            <a:off x="4353458" y="1737360"/>
+            <a:ext cx="3484778" cy="4434840"/>
+          </a:xfrm>
+          <a:prstGeom prst="roundRect">
+            <a:avLst>
+              <a:gd name="adj" fmla="val 4000"/>
+            </a:avLst>
           </a:prstGeom>
           <a:solidFill>
-            <a:srgbClr val="2563EB"/>
+            <a:srgbClr val="FEF3C7"/>
           </a:solidFill>
           <a:ln>
             <a:noFill/>
@@ -57165,14 +57492,14 @@
       </p:sp>
       <p:sp>
         <p:nvSpPr>
-          <p:cNvPr id="7" name="TextBox 6"/>
-          <p:cNvSpPr txBox="1"/>
-          <p:nvPr/>
-        </p:nvSpPr>
-        <p:spPr>
-          <a:xfrm>
-            <a:off x="777240" y="1920240"/>
-            <a:ext cx="5021427" cy="457200"/>
+          <p:cNvPr id="9" name="TextBox 8"/>
+          <p:cNvSpPr txBox="1"/>
+          <p:nvPr/>
+        </p:nvSpPr>
+        <p:spPr>
+          <a:xfrm>
+            <a:off x="4627778" y="1874519"/>
+            <a:ext cx="2936138" cy="411480"/>
           </a:xfrm>
           <a:prstGeom prst="rect">
             <a:avLst/>
@@ -57191,27 +57518,27 @@
               </a:lnSpc>
             </a:pPr>
             <a:r>
-              <a:rPr sz="2400" b="1" i="0">
-                <a:solidFill>
-                  <a:srgbClr val="0F172A"/>
-                </a:solidFill>
-                <a:latin typeface="Calibri"/>
-              </a:rPr>
-              <a:t>RAG để tìm tin</a:t>
-            </a:r>
-          </a:p>
-        </p:txBody>
-      </p:sp>
-      <p:sp>
-        <p:nvSpPr>
-          <p:cNvPr id="8" name="TextBox 7"/>
-          <p:cNvSpPr txBox="1"/>
-          <p:nvPr/>
-        </p:nvSpPr>
-        <p:spPr>
-          <a:xfrm>
-            <a:off x="777240" y="2468880"/>
-            <a:ext cx="5021427" cy="1188720"/>
+              <a:rPr sz="1400" b="1" i="0">
+                <a:solidFill>
+                  <a:srgbClr val="D97706"/>
+                </a:solidFill>
+                <a:latin typeface="Calibri"/>
+              </a:rPr>
+              <a:t>DỮ LIỆU</a:t>
+            </a:r>
+          </a:p>
+        </p:txBody>
+      </p:sp>
+      <p:sp>
+        <p:nvSpPr>
+          <p:cNvPr id="10" name="TextBox 9"/>
+          <p:cNvSpPr txBox="1"/>
+          <p:nvPr/>
+        </p:nvSpPr>
+        <p:spPr>
+          <a:xfrm>
+            <a:off x="4627778" y="2331720"/>
+            <a:ext cx="2936138" cy="3749039"/>
           </a:xfrm>
           <a:prstGeom prst="rect">
             <a:avLst/>
@@ -57228,37 +57555,161 @@
               <a:lnSpc>
                 <a:spcPct val="110000"/>
               </a:lnSpc>
-            </a:pPr>
-            <a:r>
-              <a:rPr sz="2000" b="0" i="0">
+              <a:spcAft>
+                <a:spcPts val="600"/>
+              </a:spcAft>
+            </a:pPr>
+            <a:r>
+              <a:rPr sz="1600" b="1" i="0">
+                <a:solidFill>
+                  <a:srgbClr val="0D9488"/>
+                </a:solidFill>
+                <a:latin typeface="Calibri"/>
+              </a:rPr>
+              <a:t>•  </a:t>
+            </a:r>
+            <a:r>
+              <a:rPr sz="1600" b="0" i="0">
                 <a:solidFill>
                   <a:srgbClr val="334155"/>
                 </a:solidFill>
                 <a:latin typeface="Calibri"/>
               </a:rPr>
-              <a:t>Tìm theo nghĩa, dẫn nguồn bằng mã tin; không đếm, không tính</a:t>
-            </a:r>
-          </a:p>
-        </p:txBody>
-      </p:sp>
-      <p:sp>
-        <p:nvSpPr>
-          <p:cNvPr id="9" name="Rounded Rectangle 8"/>
+              <a:t>Giá rao ≠ giá giao dịch</a:t>
+            </a:r>
+          </a:p>
+          <a:p>
+            <a:pPr algn="l">
+              <a:lnSpc>
+                <a:spcPct val="110000"/>
+              </a:lnSpc>
+              <a:spcAft>
+                <a:spcPts val="600"/>
+              </a:spcAft>
+            </a:pPr>
+            <a:r>
+              <a:rPr sz="1600" b="1" i="0">
+                <a:solidFill>
+                  <a:srgbClr val="0D9488"/>
+                </a:solidFill>
+                <a:latin typeface="Calibri"/>
+              </a:rPr>
+              <a:t>•  </a:t>
+            </a:r>
+            <a:r>
+              <a:rPr sz="1600" b="0" i="0">
+                <a:solidFill>
+                  <a:srgbClr val="334155"/>
+                </a:solidFill>
+                <a:latin typeface="Calibri"/>
+              </a:rPr>
+              <a:t>Địa giới cũ lẫn tên sau sáp nhập 2025</a:t>
+            </a:r>
+          </a:p>
+          <a:p>
+            <a:pPr algn="l">
+              <a:lnSpc>
+                <a:spcPct val="110000"/>
+              </a:lnSpc>
+              <a:spcAft>
+                <a:spcPts val="600"/>
+              </a:spcAft>
+            </a:pPr>
+            <a:r>
+              <a:rPr sz="1600" b="1" i="0">
+                <a:solidFill>
+                  <a:srgbClr val="0D9488"/>
+                </a:solidFill>
+                <a:latin typeface="Calibri"/>
+              </a:rPr>
+              <a:t>•  </a:t>
+            </a:r>
+            <a:r>
+              <a:rPr sz="1600" b="0" i="0">
+                <a:solidFill>
+                  <a:srgbClr val="334155"/>
+                </a:solidFill>
+                <a:latin typeface="Calibri"/>
+              </a:rPr>
+              <a:t>Không có toạ độ</a:t>
+            </a:r>
+          </a:p>
+          <a:p>
+            <a:pPr algn="l">
+              <a:lnSpc>
+                <a:spcPct val="110000"/>
+              </a:lnSpc>
+              <a:spcAft>
+                <a:spcPts val="600"/>
+              </a:spcAft>
+            </a:pPr>
+            <a:r>
+              <a:rPr sz="1600" b="1" i="0">
+                <a:solidFill>
+                  <a:srgbClr val="0D9488"/>
+                </a:solidFill>
+                <a:latin typeface="Calibri"/>
+              </a:rPr>
+              <a:t>•  </a:t>
+            </a:r>
+            <a:r>
+              <a:rPr sz="1600" b="0" i="0">
+                <a:solidFill>
+                  <a:srgbClr val="334155"/>
+                </a:solidFill>
+                <a:latin typeface="Calibri"/>
+              </a:rPr>
+              <a:t>Thiếu cột: phường 15%, đường 40%, dự án 71%</a:t>
+            </a:r>
+          </a:p>
+          <a:p>
+            <a:pPr algn="l">
+              <a:lnSpc>
+                <a:spcPct val="110000"/>
+              </a:lnSpc>
+              <a:spcAft>
+                <a:spcPts val="600"/>
+              </a:spcAft>
+            </a:pPr>
+            <a:r>
+              <a:rPr sz="1600" b="1" i="0">
+                <a:solidFill>
+                  <a:srgbClr val="0D9488"/>
+                </a:solidFill>
+                <a:latin typeface="Calibri"/>
+              </a:rPr>
+              <a:t>•  </a:t>
+            </a:r>
+            <a:r>
+              <a:rPr sz="1600" b="0" i="0">
+                <a:solidFill>
+                  <a:srgbClr val="334155"/>
+                </a:solidFill>
+                <a:latin typeface="Calibri"/>
+              </a:rPr>
+              <a:t>Giấy phép CC-BY-NC 4.0: chỉ phi thương mại</a:t>
+            </a:r>
+          </a:p>
+        </p:txBody>
+      </p:sp>
+      <p:sp>
+        <p:nvSpPr>
+          <p:cNvPr id="11" name="Rounded Rectangle 10"/>
           <p:cNvSpPr/>
           <p:nvPr/>
         </p:nvSpPr>
         <p:spPr>
           <a:xfrm>
-            <a:off x="6255867" y="1783080"/>
-            <a:ext cx="5387187" cy="2011680"/>
+            <a:off x="8158276" y="1737360"/>
+            <a:ext cx="3484778" cy="4434840"/>
           </a:xfrm>
           <a:prstGeom prst="roundRect">
             <a:avLst>
-              <a:gd name="adj" fmla="val 6000"/>
+              <a:gd name="adj" fmla="val 4000"/>
             </a:avLst>
           </a:prstGeom>
           <a:solidFill>
-            <a:srgbClr val="F1F5F9"/>
+            <a:srgbClr val="CCFBF1"/>
           </a:solidFill>
           <a:ln>
             <a:noFill/>
@@ -57287,56 +57738,14 @@
       </p:sp>
       <p:sp>
         <p:nvSpPr>
-          <p:cNvPr id="10" name="Rectangle 9"/>
-          <p:cNvSpPr/>
-          <p:nvPr/>
-        </p:nvSpPr>
-        <p:spPr>
-          <a:xfrm>
-            <a:off x="6255867" y="1783080"/>
-            <a:ext cx="73152" cy="2011680"/>
-          </a:xfrm>
-          <a:prstGeom prst="rect">
-            <a:avLst/>
-          </a:prstGeom>
-          <a:solidFill>
-            <a:srgbClr val="0D9488"/>
-          </a:solidFill>
-          <a:ln>
-            <a:noFill/>
-          </a:ln>
-          <a:effectLst/>
-        </p:spPr>
-        <p:style>
-          <a:lnRef idx="1">
-            <a:schemeClr val="accent1"/>
-          </a:lnRef>
-          <a:fillRef idx="3">
-            <a:schemeClr val="accent1"/>
-          </a:fillRef>
-          <a:effectRef idx="2">
-            <a:schemeClr val="accent1"/>
-          </a:effectRef>
-          <a:fontRef idx="minor">
-            <a:schemeClr val="lt1"/>
-          </a:fontRef>
-        </p:style>
-        <p:txBody>
-          <a:bodyPr rtlCol="0" anchor="ctr"/>
-          <a:lstStyle/>
-          <a:p/>
-        </p:txBody>
-      </p:sp>
-      <p:sp>
-        <p:nvSpPr>
-          <p:cNvPr id="11" name="TextBox 10"/>
-          <p:cNvSpPr txBox="1"/>
-          <p:nvPr/>
-        </p:nvSpPr>
-        <p:spPr>
-          <a:xfrm>
-            <a:off x="6484467" y="1920240"/>
-            <a:ext cx="5021427" cy="457200"/>
+          <p:cNvPr id="12" name="TextBox 11"/>
+          <p:cNvSpPr txBox="1"/>
+          <p:nvPr/>
+        </p:nvSpPr>
+        <p:spPr>
+          <a:xfrm>
+            <a:off x="8432596" y="1874519"/>
+            <a:ext cx="2936138" cy="411480"/>
           </a:xfrm>
           <a:prstGeom prst="rect">
             <a:avLst/>
@@ -57355,27 +57764,27 @@
               </a:lnSpc>
             </a:pPr>
             <a:r>
-              <a:rPr sz="2400" b="1" i="0">
-                <a:solidFill>
-                  <a:srgbClr val="0F172A"/>
-                </a:solidFill>
-                <a:latin typeface="Calibri"/>
-              </a:rPr>
-              <a:t>Lọc trước cho điều kiện cứng</a:t>
-            </a:r>
-          </a:p>
-        </p:txBody>
-      </p:sp>
-      <p:sp>
-        <p:nvSpPr>
-          <p:cNvPr id="12" name="TextBox 11"/>
-          <p:cNvSpPr txBox="1"/>
-          <p:nvPr/>
-        </p:nvSpPr>
-        <p:spPr>
-          <a:xfrm>
-            <a:off x="6484467" y="2468880"/>
-            <a:ext cx="5021427" cy="1188720"/>
+              <a:rPr sz="1400" b="1" i="0">
+                <a:solidFill>
+                  <a:srgbClr val="0D9488"/>
+                </a:solidFill>
+                <a:latin typeface="Calibri"/>
+              </a:rPr>
+              <a:t>HƯỚNG PHÁT TRIỂN</a:t>
+            </a:r>
+          </a:p>
+        </p:txBody>
+      </p:sp>
+      <p:sp>
+        <p:nvSpPr>
+          <p:cNvPr id="13" name="TextBox 12"/>
+          <p:cNvSpPr txBox="1"/>
+          <p:nvPr/>
+        </p:nvSpPr>
+        <p:spPr>
+          <a:xfrm>
+            <a:off x="8432596" y="2331720"/>
+            <a:ext cx="2936138" cy="3749039"/>
           </a:xfrm>
           <a:prstGeom prst="rect">
             <a:avLst/>
@@ -57392,350 +57801,118 @@
               <a:lnSpc>
                 <a:spcPct val="110000"/>
               </a:lnSpc>
-            </a:pPr>
-            <a:r>
-              <a:rPr sz="2000" b="0" i="0">
+              <a:spcAft>
+                <a:spcPts val="600"/>
+              </a:spcAft>
+            </a:pPr>
+            <a:r>
+              <a:rPr sz="1600" b="1" i="0">
+                <a:solidFill>
+                  <a:srgbClr val="0D9488"/>
+                </a:solidFill>
+                <a:latin typeface="Calibri"/>
+              </a:rPr>
+              <a:t>•  </a:t>
+            </a:r>
+            <a:r>
+              <a:rPr sz="1600" b="0" i="0">
                 <a:solidFill>
                   <a:srgbClr val="334155"/>
                 </a:solidFill>
                 <a:latin typeface="Calibri"/>
               </a:rPr>
-              <a:t>Giá, diện tích, khu vực vào bộ lọc trước khi tìm vector</a:t>
-            </a:r>
-          </a:p>
-        </p:txBody>
-      </p:sp>
-      <p:sp>
-        <p:nvSpPr>
-          <p:cNvPr id="13" name="Rounded Rectangle 12"/>
-          <p:cNvSpPr/>
-          <p:nvPr/>
-        </p:nvSpPr>
-        <p:spPr>
-          <a:xfrm>
-            <a:off x="548640" y="4114800"/>
-            <a:ext cx="5387187" cy="2011680"/>
-          </a:xfrm>
-          <a:prstGeom prst="roundRect">
-            <a:avLst>
-              <a:gd name="adj" fmla="val 6000"/>
-            </a:avLst>
-          </a:prstGeom>
-          <a:solidFill>
-            <a:srgbClr val="F1F5F9"/>
-          </a:solidFill>
-          <a:ln>
-            <a:noFill/>
-          </a:ln>
-          <a:effectLst/>
-        </p:spPr>
-        <p:style>
-          <a:lnRef idx="1">
-            <a:schemeClr val="accent1"/>
-          </a:lnRef>
-          <a:fillRef idx="3">
-            <a:schemeClr val="accent1"/>
-          </a:fillRef>
-          <a:effectRef idx="2">
-            <a:schemeClr val="accent1"/>
-          </a:effectRef>
-          <a:fontRef idx="minor">
-            <a:schemeClr val="lt1"/>
-          </a:fontRef>
-        </p:style>
-        <p:txBody>
-          <a:bodyPr rtlCol="0" anchor="ctr"/>
-          <a:lstStyle/>
-          <a:p/>
-        </p:txBody>
-      </p:sp>
-      <p:sp>
-        <p:nvSpPr>
-          <p:cNvPr id="14" name="Rectangle 13"/>
-          <p:cNvSpPr/>
-          <p:nvPr/>
-        </p:nvSpPr>
-        <p:spPr>
-          <a:xfrm>
-            <a:off x="548640" y="4114800"/>
-            <a:ext cx="73152" cy="2011680"/>
-          </a:xfrm>
-          <a:prstGeom prst="rect">
-            <a:avLst/>
-          </a:prstGeom>
-          <a:solidFill>
-            <a:srgbClr val="D97706"/>
-          </a:solidFill>
-          <a:ln>
-            <a:noFill/>
-          </a:ln>
-          <a:effectLst/>
-        </p:spPr>
-        <p:style>
-          <a:lnRef idx="1">
-            <a:schemeClr val="accent1"/>
-          </a:lnRef>
-          <a:fillRef idx="3">
-            <a:schemeClr val="accent1"/>
-          </a:fillRef>
-          <a:effectRef idx="2">
-            <a:schemeClr val="accent1"/>
-          </a:effectRef>
-          <a:fontRef idx="minor">
-            <a:schemeClr val="lt1"/>
-          </a:fontRef>
-        </p:style>
-        <p:txBody>
-          <a:bodyPr rtlCol="0" anchor="ctr"/>
-          <a:lstStyle/>
-          <a:p/>
-        </p:txBody>
-      </p:sp>
-      <p:sp>
-        <p:nvSpPr>
-          <p:cNvPr id="15" name="TextBox 14"/>
-          <p:cNvSpPr txBox="1"/>
-          <p:nvPr/>
-        </p:nvSpPr>
-        <p:spPr>
-          <a:xfrm>
-            <a:off x="777240" y="4251960"/>
-            <a:ext cx="5021427" cy="457200"/>
-          </a:xfrm>
-          <a:prstGeom prst="rect">
-            <a:avLst/>
-          </a:prstGeom>
-          <a:noFill/>
-        </p:spPr>
-        <p:txBody>
-          <a:bodyPr wrap="square" anchor="t" lIns="36576" rIns="36576" tIns="36576" bIns="36576">
-            <a:spAutoFit/>
-          </a:bodyPr>
-          <a:lstStyle/>
+              <a:t>Thêm giám khảo LLM và RAGAS khi có ngân sách</a:t>
+            </a:r>
+          </a:p>
           <a:p>
             <a:pPr algn="l">
               <a:lnSpc>
                 <a:spcPct val="110000"/>
               </a:lnSpc>
-            </a:pPr>
-            <a:r>
-              <a:rPr sz="2400" b="1" i="0">
-                <a:solidFill>
-                  <a:srgbClr val="0F172A"/>
-                </a:solidFill>
-                <a:latin typeface="Calibri"/>
-              </a:rPr>
-              <a:t>Đồ thị cho câu tổng hợp</a:t>
-            </a:r>
-          </a:p>
-        </p:txBody>
-      </p:sp>
-      <p:sp>
-        <p:nvSpPr>
-          <p:cNvPr id="16" name="TextBox 15"/>
-          <p:cNvSpPr txBox="1"/>
-          <p:nvPr/>
-        </p:nvSpPr>
-        <p:spPr>
-          <a:xfrm>
-            <a:off x="777240" y="4800600"/>
-            <a:ext cx="5021427" cy="1188720"/>
-          </a:xfrm>
-          <a:prstGeom prst="rect">
-            <a:avLst/>
-          </a:prstGeom>
-          <a:noFill/>
-        </p:spPr>
-        <p:txBody>
-          <a:bodyPr wrap="square" anchor="t" lIns="36576" rIns="36576" tIns="36576" bIns="36576">
-            <a:spAutoFit/>
-          </a:bodyPr>
-          <a:lstStyle/>
+              <a:spcAft>
+                <a:spcPts val="600"/>
+              </a:spcAft>
+            </a:pPr>
+            <a:r>
+              <a:rPr sz="1600" b="1" i="0">
+                <a:solidFill>
+                  <a:srgbClr val="0D9488"/>
+                </a:solidFill>
+                <a:latin typeface="Calibri"/>
+              </a:rPr>
+              <a:t>•  </a:t>
+            </a:r>
+            <a:r>
+              <a:rPr sz="1600" b="0" i="0">
+                <a:solidFill>
+                  <a:srgbClr val="334155"/>
+                </a:solidFill>
+                <a:latin typeface="Calibri"/>
+              </a:rPr>
+              <a:t>Rerank trên GPU để bật mặc định mà không tăng độ trễ</a:t>
+            </a:r>
+          </a:p>
           <a:p>
             <a:pPr algn="l">
               <a:lnSpc>
                 <a:spcPct val="110000"/>
               </a:lnSpc>
-            </a:pPr>
-            <a:r>
-              <a:rPr sz="2000" b="0" i="0">
+              <a:spcAft>
+                <a:spcPts val="600"/>
+              </a:spcAft>
+            </a:pPr>
+            <a:r>
+              <a:rPr sz="1600" b="1" i="0">
+                <a:solidFill>
+                  <a:srgbClr val="0D9488"/>
+                </a:solidFill>
+                <a:latin typeface="Calibri"/>
+              </a:rPr>
+              <a:t>•  </a:t>
+            </a:r>
+            <a:r>
+              <a:rPr sz="1600" b="0" i="0">
                 <a:solidFill>
                   <a:srgbClr val="334155"/>
                 </a:solidFill>
                 <a:latin typeface="Calibri"/>
               </a:rPr>
-              <a:t>Đếm, trung vị, đa chặng: cơ sở dữ liệu tính, mô hình viết truy vấn</a:t>
-            </a:r>
-          </a:p>
-        </p:txBody>
-      </p:sp>
-      <p:sp>
-        <p:nvSpPr>
-          <p:cNvPr id="17" name="Rounded Rectangle 16"/>
-          <p:cNvSpPr/>
-          <p:nvPr/>
-        </p:nvSpPr>
-        <p:spPr>
-          <a:xfrm>
-            <a:off x="6255867" y="4114800"/>
-            <a:ext cx="5387187" cy="2011680"/>
-          </a:xfrm>
-          <a:prstGeom prst="roundRect">
-            <a:avLst>
-              <a:gd name="adj" fmla="val 6000"/>
-            </a:avLst>
-          </a:prstGeom>
-          <a:solidFill>
-            <a:srgbClr val="F1F5F9"/>
-          </a:solidFill>
-          <a:ln>
-            <a:noFill/>
-          </a:ln>
-          <a:effectLst/>
-        </p:spPr>
-        <p:style>
-          <a:lnRef idx="1">
-            <a:schemeClr val="accent1"/>
-          </a:lnRef>
-          <a:fillRef idx="3">
-            <a:schemeClr val="accent1"/>
-          </a:fillRef>
-          <a:effectRef idx="2">
-            <a:schemeClr val="accent1"/>
-          </a:effectRef>
-          <a:fontRef idx="minor">
-            <a:schemeClr val="lt1"/>
-          </a:fontRef>
-        </p:style>
-        <p:txBody>
-          <a:bodyPr rtlCol="0" anchor="ctr"/>
-          <a:lstStyle/>
-          <a:p/>
-        </p:txBody>
-      </p:sp>
-      <p:sp>
-        <p:nvSpPr>
-          <p:cNvPr id="18" name="Rectangle 17"/>
-          <p:cNvSpPr/>
-          <p:nvPr/>
-        </p:nvSpPr>
-        <p:spPr>
-          <a:xfrm>
-            <a:off x="6255867" y="4114800"/>
-            <a:ext cx="73152" cy="2011680"/>
-          </a:xfrm>
-          <a:prstGeom prst="rect">
-            <a:avLst/>
-          </a:prstGeom>
-          <a:solidFill>
-            <a:srgbClr val="7C3AED"/>
-          </a:solidFill>
-          <a:ln>
-            <a:noFill/>
-          </a:ln>
-          <a:effectLst/>
-        </p:spPr>
-        <p:style>
-          <a:lnRef idx="1">
-            <a:schemeClr val="accent1"/>
-          </a:lnRef>
-          <a:fillRef idx="3">
-            <a:schemeClr val="accent1"/>
-          </a:fillRef>
-          <a:effectRef idx="2">
-            <a:schemeClr val="accent1"/>
-          </a:effectRef>
-          <a:fontRef idx="minor">
-            <a:schemeClr val="lt1"/>
-          </a:fontRef>
-        </p:style>
-        <p:txBody>
-          <a:bodyPr rtlCol="0" anchor="ctr"/>
-          <a:lstStyle/>
-          <a:p/>
-        </p:txBody>
-      </p:sp>
-      <p:sp>
-        <p:nvSpPr>
-          <p:cNvPr id="19" name="TextBox 18"/>
-          <p:cNvSpPr txBox="1"/>
-          <p:nvPr/>
-        </p:nvSpPr>
-        <p:spPr>
-          <a:xfrm>
-            <a:off x="6484467" y="4251960"/>
-            <a:ext cx="5021427" cy="457200"/>
-          </a:xfrm>
-          <a:prstGeom prst="rect">
-            <a:avLst/>
-          </a:prstGeom>
-          <a:noFill/>
-        </p:spPr>
-        <p:txBody>
-          <a:bodyPr wrap="square" anchor="t" lIns="36576" rIns="36576" tIns="36576" bIns="36576">
-            <a:spAutoFit/>
-          </a:bodyPr>
-          <a:lstStyle/>
+              <a:t>Chuẩn hoá địa giới mới, gắn toạ độ</a:t>
+            </a:r>
+          </a:p>
           <a:p>
             <a:pPr algn="l">
               <a:lnSpc>
                 <a:spcPct val="110000"/>
               </a:lnSpc>
-            </a:pPr>
-            <a:r>
-              <a:rPr sz="2400" b="1" i="0">
-                <a:solidFill>
-                  <a:srgbClr val="0F172A"/>
-                </a:solidFill>
-                <a:latin typeface="Calibri"/>
-              </a:rPr>
-              <a:t>Router ghép, benchmark đo</a:t>
-            </a:r>
-          </a:p>
-        </p:txBody>
-      </p:sp>
-      <p:sp>
-        <p:nvSpPr>
-          <p:cNvPr id="20" name="TextBox 19"/>
-          <p:cNvSpPr txBox="1"/>
-          <p:nvPr/>
-        </p:nvSpPr>
-        <p:spPr>
-          <a:xfrm>
-            <a:off x="6484467" y="4800600"/>
-            <a:ext cx="5021427" cy="1188720"/>
-          </a:xfrm>
-          <a:prstGeom prst="rect">
-            <a:avLst/>
-          </a:prstGeom>
-          <a:noFill/>
-        </p:spPr>
-        <p:txBody>
-          <a:bodyPr wrap="square" anchor="t" lIns="36576" rIns="36576" tIns="36576" bIns="36576">
-            <a:spAutoFit/>
-          </a:bodyPr>
-          <a:lstStyle/>
-          <a:p>
-            <a:pPr algn="l">
-              <a:lnSpc>
-                <a:spcPct val="110000"/>
-              </a:lnSpc>
-            </a:pPr>
-            <a:r>
-              <a:rPr sz="2000" b="0" i="0">
+              <a:spcAft>
+                <a:spcPts val="600"/>
+              </a:spcAft>
+            </a:pPr>
+            <a:r>
+              <a:rPr sz="1600" b="1" i="0">
+                <a:solidFill>
+                  <a:srgbClr val="0D9488"/>
+                </a:solidFill>
+                <a:latin typeface="Calibri"/>
+              </a:rPr>
+              <a:t>•  </a:t>
+            </a:r>
+            <a:r>
+              <a:rPr sz="1600" b="0" i="0">
                 <a:solidFill>
                   <a:srgbClr val="334155"/>
                 </a:solidFill>
                 <a:latin typeface="Calibri"/>
               </a:rPr>
-              <a:t>Chọn nguồn từng câu; đo bằng đáp án SQL, ghi rõ cỡ mẫu</a:t>
-            </a:r>
-          </a:p>
-        </p:txBody>
-      </p:sp>
-      <p:sp>
-        <p:nvSpPr>
-          <p:cNvPr id="21" name="footer-no"/>
+              <a:t>Định giá cho thuê khi đủ dữ liệu</a:t>
+            </a:r>
+          </a:p>
+        </p:txBody>
+      </p:sp>
+      <p:sp>
+        <p:nvSpPr>
+          <p:cNvPr id="14" name="footer-no"/>
           <p:cNvSpPr txBox="1"/>
           <p:nvPr/>
         </p:nvSpPr>
@@ -57774,7 +57951,7 @@
       </p:sp>
       <p:sp>
         <p:nvSpPr>
-          <p:cNvPr id="22" name="footer"/>
+          <p:cNvPr id="15" name="footer"/>
           <p:cNvSpPr txBox="1"/>
           <p:nvPr/>
         </p:nvSpPr>
@@ -57821,6 +57998,878 @@
 
 <file path=ppt/slides/slide54.xml><?xml version="1.0" encoding="utf-8"?>
 <p:sld xmlns:a="http://schemas.openxmlformats.org/drawingml/2006/main" xmlns:p="http://schemas.openxmlformats.org/presentationml/2006/main" xmlns:r="http://schemas.openxmlformats.org/officeDocument/2006/relationships">
+  <p:cSld name="end-takeaways">
+    <p:spTree>
+      <p:nvGrpSpPr>
+        <p:cNvPr id="1" name=""/>
+        <p:cNvGrpSpPr/>
+        <p:nvPr/>
+      </p:nvGrpSpPr>
+      <p:grpSpPr/>
+      <p:sp>
+        <p:nvSpPr>
+          <p:cNvPr id="2" name="Rectangle 1"/>
+          <p:cNvSpPr/>
+          <p:nvPr/>
+        </p:nvSpPr>
+        <p:spPr>
+          <a:xfrm>
+            <a:off x="548640" y="384048"/>
+            <a:ext cx="73152" cy="292608"/>
+          </a:xfrm>
+          <a:prstGeom prst="rect">
+            <a:avLst/>
+          </a:prstGeom>
+          <a:solidFill>
+            <a:srgbClr val="0D9488"/>
+          </a:solidFill>
+          <a:ln>
+            <a:noFill/>
+          </a:ln>
+          <a:effectLst/>
+        </p:spPr>
+        <p:style>
+          <a:lnRef idx="1">
+            <a:schemeClr val="accent1"/>
+          </a:lnRef>
+          <a:fillRef idx="3">
+            <a:schemeClr val="accent1"/>
+          </a:fillRef>
+          <a:effectRef idx="2">
+            <a:schemeClr val="accent1"/>
+          </a:effectRef>
+          <a:fontRef idx="minor">
+            <a:schemeClr val="lt1"/>
+          </a:fontRef>
+        </p:style>
+        <p:txBody>
+          <a:bodyPr rtlCol="0" anchor="ctr"/>
+          <a:lstStyle/>
+          <a:p/>
+        </p:txBody>
+      </p:sp>
+      <p:sp>
+        <p:nvSpPr>
+          <p:cNvPr id="3" name="section"/>
+          <p:cNvSpPr txBox="1"/>
+          <p:nvPr/>
+        </p:nvSpPr>
+        <p:spPr>
+          <a:xfrm>
+            <a:off x="713232" y="329184"/>
+            <a:ext cx="7315200" cy="384048"/>
+          </a:xfrm>
+          <a:prstGeom prst="rect">
+            <a:avLst/>
+          </a:prstGeom>
+          <a:noFill/>
+        </p:spPr>
+        <p:txBody>
+          <a:bodyPr wrap="square" anchor="t" lIns="36576" rIns="36576" tIns="36576" bIns="36576">
+            <a:spAutoFit/>
+          </a:bodyPr>
+          <a:lstStyle/>
+          <a:p>
+            <a:pPr algn="l">
+              <a:lnSpc>
+                <a:spcPct val="110000"/>
+              </a:lnSpc>
+            </a:pPr>
+            <a:r>
+              <a:rPr sz="1400" b="1" i="0">
+                <a:solidFill>
+                  <a:srgbClr val="0D9488"/>
+                </a:solidFill>
+                <a:latin typeface="Calibri"/>
+              </a:rPr>
+              <a:t>KẾT LUẬN</a:t>
+            </a:r>
+          </a:p>
+        </p:txBody>
+      </p:sp>
+      <p:sp>
+        <p:nvSpPr>
+          <p:cNvPr id="4" name="title"/>
+          <p:cNvSpPr txBox="1"/>
+          <p:nvPr/>
+        </p:nvSpPr>
+        <p:spPr>
+          <a:xfrm>
+            <a:off x="548640" y="713232"/>
+            <a:ext cx="11094415" cy="868680"/>
+          </a:xfrm>
+          <a:prstGeom prst="rect">
+            <a:avLst/>
+          </a:prstGeom>
+          <a:noFill/>
+        </p:spPr>
+        <p:txBody>
+          <a:bodyPr wrap="square" anchor="t" lIns="36576" rIns="36576" tIns="36576" bIns="36576">
+            <a:spAutoFit/>
+          </a:bodyPr>
+          <a:lstStyle/>
+          <a:p>
+            <a:pPr algn="l">
+              <a:lnSpc>
+                <a:spcPct val="110000"/>
+              </a:lnSpc>
+            </a:pPr>
+            <a:r>
+              <a:rPr sz="2400" b="1" i="0">
+                <a:solidFill>
+                  <a:srgbClr val="0F172A"/>
+                </a:solidFill>
+                <a:latin typeface="Calibri"/>
+              </a:rPr>
+              <a:t>Mỗi loại câu hỏi cần đúng công cụ; router ghép chúng, benchmark đo chúng</a:t>
+            </a:r>
+          </a:p>
+        </p:txBody>
+      </p:sp>
+      <p:sp>
+        <p:nvSpPr>
+          <p:cNvPr id="5" name="Rounded Rectangle 4"/>
+          <p:cNvSpPr/>
+          <p:nvPr/>
+        </p:nvSpPr>
+        <p:spPr>
+          <a:xfrm>
+            <a:off x="548640" y="1783080"/>
+            <a:ext cx="5387187" cy="2011680"/>
+          </a:xfrm>
+          <a:prstGeom prst="roundRect">
+            <a:avLst>
+              <a:gd name="adj" fmla="val 6000"/>
+            </a:avLst>
+          </a:prstGeom>
+          <a:solidFill>
+            <a:srgbClr val="F1F5F9"/>
+          </a:solidFill>
+          <a:ln>
+            <a:noFill/>
+          </a:ln>
+          <a:effectLst/>
+        </p:spPr>
+        <p:style>
+          <a:lnRef idx="1">
+            <a:schemeClr val="accent1"/>
+          </a:lnRef>
+          <a:fillRef idx="3">
+            <a:schemeClr val="accent1"/>
+          </a:fillRef>
+          <a:effectRef idx="2">
+            <a:schemeClr val="accent1"/>
+          </a:effectRef>
+          <a:fontRef idx="minor">
+            <a:schemeClr val="lt1"/>
+          </a:fontRef>
+        </p:style>
+        <p:txBody>
+          <a:bodyPr rtlCol="0" anchor="ctr"/>
+          <a:lstStyle/>
+          <a:p/>
+        </p:txBody>
+      </p:sp>
+      <p:sp>
+        <p:nvSpPr>
+          <p:cNvPr id="6" name="Rectangle 5"/>
+          <p:cNvSpPr/>
+          <p:nvPr/>
+        </p:nvSpPr>
+        <p:spPr>
+          <a:xfrm>
+            <a:off x="548640" y="1783080"/>
+            <a:ext cx="73152" cy="2011680"/>
+          </a:xfrm>
+          <a:prstGeom prst="rect">
+            <a:avLst/>
+          </a:prstGeom>
+          <a:solidFill>
+            <a:srgbClr val="2563EB"/>
+          </a:solidFill>
+          <a:ln>
+            <a:noFill/>
+          </a:ln>
+          <a:effectLst/>
+        </p:spPr>
+        <p:style>
+          <a:lnRef idx="1">
+            <a:schemeClr val="accent1"/>
+          </a:lnRef>
+          <a:fillRef idx="3">
+            <a:schemeClr val="accent1"/>
+          </a:fillRef>
+          <a:effectRef idx="2">
+            <a:schemeClr val="accent1"/>
+          </a:effectRef>
+          <a:fontRef idx="minor">
+            <a:schemeClr val="lt1"/>
+          </a:fontRef>
+        </p:style>
+        <p:txBody>
+          <a:bodyPr rtlCol="0" anchor="ctr"/>
+          <a:lstStyle/>
+          <a:p/>
+        </p:txBody>
+      </p:sp>
+      <p:sp>
+        <p:nvSpPr>
+          <p:cNvPr id="7" name="TextBox 6"/>
+          <p:cNvSpPr txBox="1"/>
+          <p:nvPr/>
+        </p:nvSpPr>
+        <p:spPr>
+          <a:xfrm>
+            <a:off x="777240" y="1920240"/>
+            <a:ext cx="5021427" cy="457200"/>
+          </a:xfrm>
+          <a:prstGeom prst="rect">
+            <a:avLst/>
+          </a:prstGeom>
+          <a:noFill/>
+        </p:spPr>
+        <p:txBody>
+          <a:bodyPr wrap="square" anchor="t" lIns="36576" rIns="36576" tIns="36576" bIns="36576">
+            <a:spAutoFit/>
+          </a:bodyPr>
+          <a:lstStyle/>
+          <a:p>
+            <a:pPr algn="l">
+              <a:lnSpc>
+                <a:spcPct val="110000"/>
+              </a:lnSpc>
+            </a:pPr>
+            <a:r>
+              <a:rPr sz="2400" b="1" i="0">
+                <a:solidFill>
+                  <a:srgbClr val="0F172A"/>
+                </a:solidFill>
+                <a:latin typeface="Calibri"/>
+              </a:rPr>
+              <a:t>RAG để tìm tin</a:t>
+            </a:r>
+          </a:p>
+        </p:txBody>
+      </p:sp>
+      <p:sp>
+        <p:nvSpPr>
+          <p:cNvPr id="8" name="TextBox 7"/>
+          <p:cNvSpPr txBox="1"/>
+          <p:nvPr/>
+        </p:nvSpPr>
+        <p:spPr>
+          <a:xfrm>
+            <a:off x="777240" y="2468880"/>
+            <a:ext cx="5021427" cy="1188720"/>
+          </a:xfrm>
+          <a:prstGeom prst="rect">
+            <a:avLst/>
+          </a:prstGeom>
+          <a:noFill/>
+        </p:spPr>
+        <p:txBody>
+          <a:bodyPr wrap="square" anchor="t" lIns="36576" rIns="36576" tIns="36576" bIns="36576">
+            <a:spAutoFit/>
+          </a:bodyPr>
+          <a:lstStyle/>
+          <a:p>
+            <a:pPr algn="l">
+              <a:lnSpc>
+                <a:spcPct val="110000"/>
+              </a:lnSpc>
+            </a:pPr>
+            <a:r>
+              <a:rPr sz="2000" b="0" i="0">
+                <a:solidFill>
+                  <a:srgbClr val="334155"/>
+                </a:solidFill>
+                <a:latin typeface="Calibri"/>
+              </a:rPr>
+              <a:t>Tìm theo nghĩa, dẫn nguồn bằng mã tin; không đếm, không tính</a:t>
+            </a:r>
+          </a:p>
+        </p:txBody>
+      </p:sp>
+      <p:sp>
+        <p:nvSpPr>
+          <p:cNvPr id="9" name="Rounded Rectangle 8"/>
+          <p:cNvSpPr/>
+          <p:nvPr/>
+        </p:nvSpPr>
+        <p:spPr>
+          <a:xfrm>
+            <a:off x="6255867" y="1783080"/>
+            <a:ext cx="5387187" cy="2011680"/>
+          </a:xfrm>
+          <a:prstGeom prst="roundRect">
+            <a:avLst>
+              <a:gd name="adj" fmla="val 6000"/>
+            </a:avLst>
+          </a:prstGeom>
+          <a:solidFill>
+            <a:srgbClr val="F1F5F9"/>
+          </a:solidFill>
+          <a:ln>
+            <a:noFill/>
+          </a:ln>
+          <a:effectLst/>
+        </p:spPr>
+        <p:style>
+          <a:lnRef idx="1">
+            <a:schemeClr val="accent1"/>
+          </a:lnRef>
+          <a:fillRef idx="3">
+            <a:schemeClr val="accent1"/>
+          </a:fillRef>
+          <a:effectRef idx="2">
+            <a:schemeClr val="accent1"/>
+          </a:effectRef>
+          <a:fontRef idx="minor">
+            <a:schemeClr val="lt1"/>
+          </a:fontRef>
+        </p:style>
+        <p:txBody>
+          <a:bodyPr rtlCol="0" anchor="ctr"/>
+          <a:lstStyle/>
+          <a:p/>
+        </p:txBody>
+      </p:sp>
+      <p:sp>
+        <p:nvSpPr>
+          <p:cNvPr id="10" name="Rectangle 9"/>
+          <p:cNvSpPr/>
+          <p:nvPr/>
+        </p:nvSpPr>
+        <p:spPr>
+          <a:xfrm>
+            <a:off x="6255867" y="1783080"/>
+            <a:ext cx="73152" cy="2011680"/>
+          </a:xfrm>
+          <a:prstGeom prst="rect">
+            <a:avLst/>
+          </a:prstGeom>
+          <a:solidFill>
+            <a:srgbClr val="0D9488"/>
+          </a:solidFill>
+          <a:ln>
+            <a:noFill/>
+          </a:ln>
+          <a:effectLst/>
+        </p:spPr>
+        <p:style>
+          <a:lnRef idx="1">
+            <a:schemeClr val="accent1"/>
+          </a:lnRef>
+          <a:fillRef idx="3">
+            <a:schemeClr val="accent1"/>
+          </a:fillRef>
+          <a:effectRef idx="2">
+            <a:schemeClr val="accent1"/>
+          </a:effectRef>
+          <a:fontRef idx="minor">
+            <a:schemeClr val="lt1"/>
+          </a:fontRef>
+        </p:style>
+        <p:txBody>
+          <a:bodyPr rtlCol="0" anchor="ctr"/>
+          <a:lstStyle/>
+          <a:p/>
+        </p:txBody>
+      </p:sp>
+      <p:sp>
+        <p:nvSpPr>
+          <p:cNvPr id="11" name="TextBox 10"/>
+          <p:cNvSpPr txBox="1"/>
+          <p:nvPr/>
+        </p:nvSpPr>
+        <p:spPr>
+          <a:xfrm>
+            <a:off x="6484467" y="1920240"/>
+            <a:ext cx="5021427" cy="457200"/>
+          </a:xfrm>
+          <a:prstGeom prst="rect">
+            <a:avLst/>
+          </a:prstGeom>
+          <a:noFill/>
+        </p:spPr>
+        <p:txBody>
+          <a:bodyPr wrap="square" anchor="t" lIns="36576" rIns="36576" tIns="36576" bIns="36576">
+            <a:spAutoFit/>
+          </a:bodyPr>
+          <a:lstStyle/>
+          <a:p>
+            <a:pPr algn="l">
+              <a:lnSpc>
+                <a:spcPct val="110000"/>
+              </a:lnSpc>
+            </a:pPr>
+            <a:r>
+              <a:rPr sz="2400" b="1" i="0">
+                <a:solidFill>
+                  <a:srgbClr val="0F172A"/>
+                </a:solidFill>
+                <a:latin typeface="Calibri"/>
+              </a:rPr>
+              <a:t>Lọc trước cho điều kiện cứng</a:t>
+            </a:r>
+          </a:p>
+        </p:txBody>
+      </p:sp>
+      <p:sp>
+        <p:nvSpPr>
+          <p:cNvPr id="12" name="TextBox 11"/>
+          <p:cNvSpPr txBox="1"/>
+          <p:nvPr/>
+        </p:nvSpPr>
+        <p:spPr>
+          <a:xfrm>
+            <a:off x="6484467" y="2468880"/>
+            <a:ext cx="5021427" cy="1188720"/>
+          </a:xfrm>
+          <a:prstGeom prst="rect">
+            <a:avLst/>
+          </a:prstGeom>
+          <a:noFill/>
+        </p:spPr>
+        <p:txBody>
+          <a:bodyPr wrap="square" anchor="t" lIns="36576" rIns="36576" tIns="36576" bIns="36576">
+            <a:spAutoFit/>
+          </a:bodyPr>
+          <a:lstStyle/>
+          <a:p>
+            <a:pPr algn="l">
+              <a:lnSpc>
+                <a:spcPct val="110000"/>
+              </a:lnSpc>
+            </a:pPr>
+            <a:r>
+              <a:rPr sz="2000" b="0" i="0">
+                <a:solidFill>
+                  <a:srgbClr val="334155"/>
+                </a:solidFill>
+                <a:latin typeface="Calibri"/>
+              </a:rPr>
+              <a:t>Giá, diện tích, khu vực vào bộ lọc trước khi tìm vector</a:t>
+            </a:r>
+          </a:p>
+        </p:txBody>
+      </p:sp>
+      <p:sp>
+        <p:nvSpPr>
+          <p:cNvPr id="13" name="Rounded Rectangle 12"/>
+          <p:cNvSpPr/>
+          <p:nvPr/>
+        </p:nvSpPr>
+        <p:spPr>
+          <a:xfrm>
+            <a:off x="548640" y="4114800"/>
+            <a:ext cx="5387187" cy="2011680"/>
+          </a:xfrm>
+          <a:prstGeom prst="roundRect">
+            <a:avLst>
+              <a:gd name="adj" fmla="val 6000"/>
+            </a:avLst>
+          </a:prstGeom>
+          <a:solidFill>
+            <a:srgbClr val="F1F5F9"/>
+          </a:solidFill>
+          <a:ln>
+            <a:noFill/>
+          </a:ln>
+          <a:effectLst/>
+        </p:spPr>
+        <p:style>
+          <a:lnRef idx="1">
+            <a:schemeClr val="accent1"/>
+          </a:lnRef>
+          <a:fillRef idx="3">
+            <a:schemeClr val="accent1"/>
+          </a:fillRef>
+          <a:effectRef idx="2">
+            <a:schemeClr val="accent1"/>
+          </a:effectRef>
+          <a:fontRef idx="minor">
+            <a:schemeClr val="lt1"/>
+          </a:fontRef>
+        </p:style>
+        <p:txBody>
+          <a:bodyPr rtlCol="0" anchor="ctr"/>
+          <a:lstStyle/>
+          <a:p/>
+        </p:txBody>
+      </p:sp>
+      <p:sp>
+        <p:nvSpPr>
+          <p:cNvPr id="14" name="Rectangle 13"/>
+          <p:cNvSpPr/>
+          <p:nvPr/>
+        </p:nvSpPr>
+        <p:spPr>
+          <a:xfrm>
+            <a:off x="548640" y="4114800"/>
+            <a:ext cx="73152" cy="2011680"/>
+          </a:xfrm>
+          <a:prstGeom prst="rect">
+            <a:avLst/>
+          </a:prstGeom>
+          <a:solidFill>
+            <a:srgbClr val="D97706"/>
+          </a:solidFill>
+          <a:ln>
+            <a:noFill/>
+          </a:ln>
+          <a:effectLst/>
+        </p:spPr>
+        <p:style>
+          <a:lnRef idx="1">
+            <a:schemeClr val="accent1"/>
+          </a:lnRef>
+          <a:fillRef idx="3">
+            <a:schemeClr val="accent1"/>
+          </a:fillRef>
+          <a:effectRef idx="2">
+            <a:schemeClr val="accent1"/>
+          </a:effectRef>
+          <a:fontRef idx="minor">
+            <a:schemeClr val="lt1"/>
+          </a:fontRef>
+        </p:style>
+        <p:txBody>
+          <a:bodyPr rtlCol="0" anchor="ctr"/>
+          <a:lstStyle/>
+          <a:p/>
+        </p:txBody>
+      </p:sp>
+      <p:sp>
+        <p:nvSpPr>
+          <p:cNvPr id="15" name="TextBox 14"/>
+          <p:cNvSpPr txBox="1"/>
+          <p:nvPr/>
+        </p:nvSpPr>
+        <p:spPr>
+          <a:xfrm>
+            <a:off x="777240" y="4251960"/>
+            <a:ext cx="5021427" cy="457200"/>
+          </a:xfrm>
+          <a:prstGeom prst="rect">
+            <a:avLst/>
+          </a:prstGeom>
+          <a:noFill/>
+        </p:spPr>
+        <p:txBody>
+          <a:bodyPr wrap="square" anchor="t" lIns="36576" rIns="36576" tIns="36576" bIns="36576">
+            <a:spAutoFit/>
+          </a:bodyPr>
+          <a:lstStyle/>
+          <a:p>
+            <a:pPr algn="l">
+              <a:lnSpc>
+                <a:spcPct val="110000"/>
+              </a:lnSpc>
+            </a:pPr>
+            <a:r>
+              <a:rPr sz="2400" b="1" i="0">
+                <a:solidFill>
+                  <a:srgbClr val="0F172A"/>
+                </a:solidFill>
+                <a:latin typeface="Calibri"/>
+              </a:rPr>
+              <a:t>Đồ thị cho câu tổng hợp</a:t>
+            </a:r>
+          </a:p>
+        </p:txBody>
+      </p:sp>
+      <p:sp>
+        <p:nvSpPr>
+          <p:cNvPr id="16" name="TextBox 15"/>
+          <p:cNvSpPr txBox="1"/>
+          <p:nvPr/>
+        </p:nvSpPr>
+        <p:spPr>
+          <a:xfrm>
+            <a:off x="777240" y="4800600"/>
+            <a:ext cx="5021427" cy="1188720"/>
+          </a:xfrm>
+          <a:prstGeom prst="rect">
+            <a:avLst/>
+          </a:prstGeom>
+          <a:noFill/>
+        </p:spPr>
+        <p:txBody>
+          <a:bodyPr wrap="square" anchor="t" lIns="36576" rIns="36576" tIns="36576" bIns="36576">
+            <a:spAutoFit/>
+          </a:bodyPr>
+          <a:lstStyle/>
+          <a:p>
+            <a:pPr algn="l">
+              <a:lnSpc>
+                <a:spcPct val="110000"/>
+              </a:lnSpc>
+            </a:pPr>
+            <a:r>
+              <a:rPr sz="2000" b="0" i="0">
+                <a:solidFill>
+                  <a:srgbClr val="334155"/>
+                </a:solidFill>
+                <a:latin typeface="Calibri"/>
+              </a:rPr>
+              <a:t>Đếm, trung vị, đa chặng: cơ sở dữ liệu tính, mô hình viết truy vấn</a:t>
+            </a:r>
+          </a:p>
+        </p:txBody>
+      </p:sp>
+      <p:sp>
+        <p:nvSpPr>
+          <p:cNvPr id="17" name="Rounded Rectangle 16"/>
+          <p:cNvSpPr/>
+          <p:nvPr/>
+        </p:nvSpPr>
+        <p:spPr>
+          <a:xfrm>
+            <a:off x="6255867" y="4114800"/>
+            <a:ext cx="5387187" cy="2011680"/>
+          </a:xfrm>
+          <a:prstGeom prst="roundRect">
+            <a:avLst>
+              <a:gd name="adj" fmla="val 6000"/>
+            </a:avLst>
+          </a:prstGeom>
+          <a:solidFill>
+            <a:srgbClr val="F1F5F9"/>
+          </a:solidFill>
+          <a:ln>
+            <a:noFill/>
+          </a:ln>
+          <a:effectLst/>
+        </p:spPr>
+        <p:style>
+          <a:lnRef idx="1">
+            <a:schemeClr val="accent1"/>
+          </a:lnRef>
+          <a:fillRef idx="3">
+            <a:schemeClr val="accent1"/>
+          </a:fillRef>
+          <a:effectRef idx="2">
+            <a:schemeClr val="accent1"/>
+          </a:effectRef>
+          <a:fontRef idx="minor">
+            <a:schemeClr val="lt1"/>
+          </a:fontRef>
+        </p:style>
+        <p:txBody>
+          <a:bodyPr rtlCol="0" anchor="ctr"/>
+          <a:lstStyle/>
+          <a:p/>
+        </p:txBody>
+      </p:sp>
+      <p:sp>
+        <p:nvSpPr>
+          <p:cNvPr id="18" name="Rectangle 17"/>
+          <p:cNvSpPr/>
+          <p:nvPr/>
+        </p:nvSpPr>
+        <p:spPr>
+          <a:xfrm>
+            <a:off x="6255867" y="4114800"/>
+            <a:ext cx="73152" cy="2011680"/>
+          </a:xfrm>
+          <a:prstGeom prst="rect">
+            <a:avLst/>
+          </a:prstGeom>
+          <a:solidFill>
+            <a:srgbClr val="7C3AED"/>
+          </a:solidFill>
+          <a:ln>
+            <a:noFill/>
+          </a:ln>
+          <a:effectLst/>
+        </p:spPr>
+        <p:style>
+          <a:lnRef idx="1">
+            <a:schemeClr val="accent1"/>
+          </a:lnRef>
+          <a:fillRef idx="3">
+            <a:schemeClr val="accent1"/>
+          </a:fillRef>
+          <a:effectRef idx="2">
+            <a:schemeClr val="accent1"/>
+          </a:effectRef>
+          <a:fontRef idx="minor">
+            <a:schemeClr val="lt1"/>
+          </a:fontRef>
+        </p:style>
+        <p:txBody>
+          <a:bodyPr rtlCol="0" anchor="ctr"/>
+          <a:lstStyle/>
+          <a:p/>
+        </p:txBody>
+      </p:sp>
+      <p:sp>
+        <p:nvSpPr>
+          <p:cNvPr id="19" name="TextBox 18"/>
+          <p:cNvSpPr txBox="1"/>
+          <p:nvPr/>
+        </p:nvSpPr>
+        <p:spPr>
+          <a:xfrm>
+            <a:off x="6484467" y="4251960"/>
+            <a:ext cx="5021427" cy="457200"/>
+          </a:xfrm>
+          <a:prstGeom prst="rect">
+            <a:avLst/>
+          </a:prstGeom>
+          <a:noFill/>
+        </p:spPr>
+        <p:txBody>
+          <a:bodyPr wrap="square" anchor="t" lIns="36576" rIns="36576" tIns="36576" bIns="36576">
+            <a:spAutoFit/>
+          </a:bodyPr>
+          <a:lstStyle/>
+          <a:p>
+            <a:pPr algn="l">
+              <a:lnSpc>
+                <a:spcPct val="110000"/>
+              </a:lnSpc>
+            </a:pPr>
+            <a:r>
+              <a:rPr sz="2400" b="1" i="0">
+                <a:solidFill>
+                  <a:srgbClr val="0F172A"/>
+                </a:solidFill>
+                <a:latin typeface="Calibri"/>
+              </a:rPr>
+              <a:t>Router ghép, benchmark đo</a:t>
+            </a:r>
+          </a:p>
+        </p:txBody>
+      </p:sp>
+      <p:sp>
+        <p:nvSpPr>
+          <p:cNvPr id="20" name="TextBox 19"/>
+          <p:cNvSpPr txBox="1"/>
+          <p:nvPr/>
+        </p:nvSpPr>
+        <p:spPr>
+          <a:xfrm>
+            <a:off x="6484467" y="4800600"/>
+            <a:ext cx="5021427" cy="1188720"/>
+          </a:xfrm>
+          <a:prstGeom prst="rect">
+            <a:avLst/>
+          </a:prstGeom>
+          <a:noFill/>
+        </p:spPr>
+        <p:txBody>
+          <a:bodyPr wrap="square" anchor="t" lIns="36576" rIns="36576" tIns="36576" bIns="36576">
+            <a:spAutoFit/>
+          </a:bodyPr>
+          <a:lstStyle/>
+          <a:p>
+            <a:pPr algn="l">
+              <a:lnSpc>
+                <a:spcPct val="110000"/>
+              </a:lnSpc>
+            </a:pPr>
+            <a:r>
+              <a:rPr sz="2000" b="0" i="0">
+                <a:solidFill>
+                  <a:srgbClr val="334155"/>
+                </a:solidFill>
+                <a:latin typeface="Calibri"/>
+              </a:rPr>
+              <a:t>Chọn nguồn từng câu; đo bằng đáp án SQL, ghi rõ cỡ mẫu</a:t>
+            </a:r>
+          </a:p>
+        </p:txBody>
+      </p:sp>
+      <p:sp>
+        <p:nvSpPr>
+          <p:cNvPr id="21" name="footer-no"/>
+          <p:cNvSpPr txBox="1"/>
+          <p:nvPr/>
+        </p:nvSpPr>
+        <p:spPr>
+          <a:xfrm>
+            <a:off x="10728655" y="6419088"/>
+            <a:ext cx="914400" cy="274320"/>
+          </a:xfrm>
+          <a:prstGeom prst="rect">
+            <a:avLst/>
+          </a:prstGeom>
+          <a:noFill/>
+        </p:spPr>
+        <p:txBody>
+          <a:bodyPr wrap="square" anchor="t" lIns="36576" rIns="36576" tIns="36576" bIns="36576">
+            <a:spAutoFit/>
+          </a:bodyPr>
+          <a:lstStyle/>
+          <a:p>
+            <a:pPr algn="r">
+              <a:lnSpc>
+                <a:spcPct val="110000"/>
+              </a:lnSpc>
+            </a:pPr>
+            <a:r>
+              <a:rPr sz="1200" b="0" i="0">
+                <a:solidFill>
+                  <a:srgbClr val="64748B"/>
+                </a:solidFill>
+                <a:latin typeface="Calibri"/>
+              </a:rPr>
+              <a:t>54</a:t>
+            </a:r>
+          </a:p>
+        </p:txBody>
+      </p:sp>
+      <p:sp>
+        <p:nvSpPr>
+          <p:cNvPr id="22" name="footer"/>
+          <p:cNvSpPr txBox="1"/>
+          <p:nvPr/>
+        </p:nvSpPr>
+        <p:spPr>
+          <a:xfrm>
+            <a:off x="548640" y="6419088"/>
+            <a:ext cx="6400800" cy="274320"/>
+          </a:xfrm>
+          <a:prstGeom prst="rect">
+            <a:avLst/>
+          </a:prstGeom>
+          <a:noFill/>
+        </p:spPr>
+        <p:txBody>
+          <a:bodyPr wrap="square" anchor="t" lIns="36576" rIns="36576" tIns="36576" bIns="36576">
+            <a:spAutoFit/>
+          </a:bodyPr>
+          <a:lstStyle/>
+          <a:p>
+            <a:pPr algn="l">
+              <a:lnSpc>
+                <a:spcPct val="110000"/>
+              </a:lnSpc>
+            </a:pPr>
+            <a:r>
+              <a:rPr sz="1200" b="0" i="0">
+                <a:solidFill>
+                  <a:srgbClr val="64748B"/>
+                </a:solidFill>
+                <a:latin typeface="Calibri"/>
+              </a:rPr>
+              <a:t>Nhóm 7 · Từ RAG đến GraphRAG</a:t>
+            </a:r>
+          </a:p>
+        </p:txBody>
+      </p:sp>
+    </p:spTree>
+  </p:cSld>
+  <p:clrMapOvr>
+    <a:masterClrMapping/>
+  </p:clrMapOvr>
+</p:sld>
+</file>
+
+<file path=ppt/slides/slide55.xml><?xml version="1.0" encoding="utf-8"?>
+<p:sld xmlns:a="http://schemas.openxmlformats.org/drawingml/2006/main" xmlns:p="http://schemas.openxmlformats.org/presentationml/2006/main" xmlns:r="http://schemas.openxmlformats.org/officeDocument/2006/relationships">
   <p:cSld name="end-qa">
     <p:spTree>
       <p:nvGrpSpPr>
@@ -58297,7 +59346,7 @@
                 </a:solidFill>
                 <a:latin typeface="Calibri"/>
               </a:rPr>
-              <a:t>54</a:t>
+              <a:t>55</a:t>
             </a:r>
           </a:p>
         </p:txBody>
